--- a/126/slides/slides-126-nmop-chair-slides-session1.pptx
+++ b/126/slides/slides-126-nmop-chair-slides-session1.pptx
@@ -5,7 +5,7 @@
     <p:sldMasterId id="2147483664" r:id="rId1"/>
   </p:sldMasterIdLst>
   <p:notesMasterIdLst>
-    <p:notesMasterId r:id="rId13"/>
+    <p:notesMasterId r:id="rId16"/>
   </p:notesMasterIdLst>
   <p:sldIdLst>
     <p:sldId id="276" r:id="rId2"/>
@@ -14,11 +14,14 @@
     <p:sldId id="261" r:id="rId5"/>
     <p:sldId id="287" r:id="rId6"/>
     <p:sldId id="278" r:id="rId7"/>
-    <p:sldId id="283" r:id="rId8"/>
+    <p:sldId id="288" r:id="rId8"/>
     <p:sldId id="284" r:id="rId9"/>
-    <p:sldId id="285" r:id="rId10"/>
-    <p:sldId id="286" r:id="rId11"/>
-    <p:sldId id="260" r:id="rId12"/>
+    <p:sldId id="289" r:id="rId10"/>
+    <p:sldId id="290" r:id="rId11"/>
+    <p:sldId id="291" r:id="rId12"/>
+    <p:sldId id="292" r:id="rId13"/>
+    <p:sldId id="286" r:id="rId14"/>
+    <p:sldId id="260" r:id="rId15"/>
   </p:sldIdLst>
   <p:sldSz cx="9144000" cy="5143500" type="screen16x9"/>
   <p:notesSz cx="6858000" cy="9144000"/>
@@ -454,6 +457,174 @@
 </pc:chgInfo>
 </file>
 
+<file path=ppt/ink/ink1.xml><?xml version="1.0" encoding="utf-8"?>
+<inkml:ink xmlns:inkml="http://www.w3.org/2003/InkML">
+  <inkml:definitions>
+    <inkml:context xml:id="ctx0">
+      <inkml:inkSource xml:id="inkSrc0">
+        <inkml:traceFormat>
+          <inkml:channel name="X" type="integer" min="-2.14748E9" max="2.14748E9" units="cm"/>
+          <inkml:channel name="Y" type="integer" min="-2.14748E9" max="2.14748E9" units="cm"/>
+          <inkml:channel name="F" type="integer" max="32767" units="dev"/>
+        </inkml:traceFormat>
+        <inkml:channelProperties>
+          <inkml:channelProperty channel="X" name="resolution" value="1000" units="1/cm"/>
+          <inkml:channelProperty channel="Y" name="resolution" value="1000" units="1/cm"/>
+          <inkml:channelProperty channel="F" name="resolution" value="0" units="1/dev"/>
+        </inkml:channelProperties>
+      </inkml:inkSource>
+      <inkml:timestamp xml:id="ts0" timeString="2026-07-13T19:04:30.683"/>
+    </inkml:context>
+    <inkml:brush xml:id="br0">
+      <inkml:brushProperty name="width" value="0.05" units="cm"/>
+      <inkml:brushProperty name="height" value="0.05" units="cm"/>
+      <inkml:brushProperty name="color" value="#E71224"/>
+    </inkml:brush>
+  </inkml:definitions>
+  <inkml:trace contextRef="#ctx0" brushRef="#br0">451 150 24575,'-6'5'0,"1"-1"0,-1 0 0,2 1 0,-3 0 0,1 1 0,-1 1 0,0-1 0,1 1 0,-1 0 0,-1 2 0,0 0 0,2 0 0,2-2 0,1-2 0,-1 0 0,-1 1 0,-3 2 0,-2 3 0,-2 2 0,-1 2 0,-1 1 0,2-1 0,2 0 0,0-1 0,1-1 0,1 1 0,-1-1 0,0 1 0,-1 3 0,-3 4 0,-1 2 0,-1 3 0,1-1 0,0-1 0,2-1 0,0-1 0,3 0 0,1-2 0,2-1 0,2 0 0,0 2 0,0 3 0,-1 1 0,0 1 0,0-1 0,-1-1 0,3-2 0,-1-1 0,2-2 0,1 2 0,-1 0 0,-1 0 0,1 0 0,0 2 0,0-1 0,1 1 0,1 1 0,0 2 0,0 3 0,0 5 0,0 1 0,0 0 0,0-5 0,0-4 0,0-3 0,0-1 0,0 0 0,-1 1 0,-1 1 0,0 4 0,-2 2 0,2 3 0,-3 4 0,-1 2 0,0 3 0,0-2 0,1-3 0,2-5 0,1-3 0,1-2 0,1-2 0,0-2 0,0-1 0,0-3 0,0-1 0,0-2 0,0-1 0,0-1 0,0 1 0,0 0 0,0 3 0,0-1 0,0-1 0,0-1 0,0-2 0,0 2 0,0 1 0,1 2 0,1 1 0,1 0 0,3 2 0,-1 0 0,1 1 0,0-1 0,1-1 0,0-3 0,0-2 0,1-2 0,0 1 0,1-1 0,-1 0 0,0 1 0,1-1 0,0 1 0,1-1 0,0 0 0,0 0 0,-2 1 0,-1-2 0,-1-1 0,0-1 0,0 0 0,-2 0 0,2-1 0,0 0 0,1 1 0,1 1 0,0 1 0,-1-1 0,0 1 0,1 1 0,1-1 0,-1-1 0,2-1 0,-2 0 0,1 0 0,0 0 0,0 1 0,0-1 0,0 0 0,2-1 0,-1 1 0,1-1 0,1 0 0,0 0 0,1 0 0,1 0 0,-1-1 0,0-1 0,1-1 0,-1 0 0,-2-1 0,1-1 0,-1 1 0,0 1 0,1-1 0,-1 0 0,1 0 0,2-2 0,-1 2 0,-1-2 0,-1-1 0,-1 1 0,0-1 0,2 1 0,-1 0 0,3 0 0,-1 1 0,1-1 0,-1 2 0,2-2 0,1 2 0,1-2 0,0 0 0,0 1 0,1-3 0,-1 2 0,1-1 0,-3 0 0,0 0 0,-1-1 0,-1 1 0,1 0 0,1-1 0,1-1 0,-1 0 0,0 0 0,-2 0 0,1 0 0,-1 0 0,1 0 0,2 0 0,1 0 0,1 0 0,2 0 0,1 0 0,3 0 0,0 0 0,1 0 0,1 0 0,-2 0 0,1 0 0,-1 0 0,1 0 0,3 0 0,0 0 0,3 0 0,2 0 0,0 0 0,1-1 0,1 0 0,5-1 0,4-2 0,3 0 0,-1 0 0,1-1 0,1-1 0,-2-1 0,-2 1 0,-1 0 0,-1 2 0,2 0 0,2 0 0,1 0 0,0 0 0,2 1 0,0 2 0,3 1 0,2 0 0,0-2 0,1-1 0,2-2 0,3 1 0,2 1 0,3 0 0,1 1 0,-1-3 0,-1 1 0,-3 0 0,-5-1 0,-3 3 0,-2 0 0,-2 2 0,1-2 0,4 0 0,1-1 0,2 0 0,-2-2 0,-3-1 0,-1-2 0,-3 0 0,-1-1 0,-1 1 0,-4-2 0,-4-2 0,0-3 0,-2-5 0,2-4 0,-2-4 0,0-5 0,0-2 0,-2-4 0,0-5 0,-3-1 0,-2-6 0,-2-3 0,1-6 0,1-3 0,-3 1 0,-1-1 0,-2 4 0,-2-1 0,1 0 0,-4 1 0,-1 4 0,-3 4 0,-3 5 0,-4 6 0,-3 1 0,-2 1 0,-2-2 0,0-7 0,-2-2 0,-3-2 0,-3-1 0,-3 2 0,-5-2 0,-3-2 0,-5-3 0,-4-5 0,-5-4 0,-3-4 0,-3-1 0,0 4 0,4 7 0,4 9 0,3 9 0,5 6 0,-1 6 0,-1 2 0,1 2 0,-2 0 0,2 0 0,-2 2 0,0 0 0,1 1 0,0 0 0,1 2 0,-1 3 0,2 4 0,0 3 0,-1 2 0,0 1 0,-1 2 0,1 0 0,-2 1 0,-1-1 0,-1 1 0,-2-2 0,-1 0 0,0 1 0,-3 1 0,0 0 0,-1 0 0,1 0 0,-2 0 0,-1 0 0,-2-1 0,-2 1 0,-2-1 0,-2 1 0,-2 0 0,-3 0 0,-4 3 0,-1 0 0,0 1 0,4 0 0,7-3 0,3-2 0,2-2 0,0 1 0,0-1 0,0 1 0,0 1 0,-1 2 0,-1 0 0,-2 0 0,0 1 0,-1 0 0,1-1 0,0 0 0,-1 2 0,0-1 0,-3 1 0,-1 0 0,-1 0 0,0 1 0,3 1 0,1 0 0,2 0 0,3 0 0,1-2 0,2 0 0,5 0 0,1 0 0,0 2 0,-1 0 0,0 0 0,-2 0 0,-1 0 0,0 1 0,-1 1 0,-1 2 0,-1 0 0,1 0 0,3 0 0,4-2 0,1-1 0,4 1 0,-1 0 0,2-1 0,2 2 0,2 0 0,2 0 0,-2 0 0,3 1 0,1-1 0,-1 1 0,-1 2 0,-1 0 0,-1 1 0,1-1 0,3 0 0,2-2 0,2 0 0,1-1 0,0-1 0,1 0 0,0-2 0,-2 1 0,0 1 0,-2 1 0,1 0 0,-1-1 0,3 1 0,-1-2 0,3 2 0,1 0 0,0-1 0,0 0 0,-2-2 0,-1 0 0,-1 0 0,-2 0 0,1 0 0,-1 2 0,1 1 0,-1 0 0,1 1 0,-1-1 0,-3 1 0,-1 1 0,-2 1 0,3-1 0,4-1 0,7-1 0,3 0 0,6 0 0,0 0 0,0 0 0,1 0 0,1 0 0,1-2 0,0 0 0,-2 0 0,-2-1 0</inkml:trace>
+</inkml:ink>
+</file>
+
+<file path=ppt/ink/ink2.xml><?xml version="1.0" encoding="utf-8"?>
+<inkml:ink xmlns:inkml="http://www.w3.org/2003/InkML">
+  <inkml:definitions>
+    <inkml:context xml:id="ctx0">
+      <inkml:inkSource xml:id="inkSrc0">
+        <inkml:traceFormat>
+          <inkml:channel name="X" type="integer" min="-2.14748E9" max="2.14748E9" units="cm"/>
+          <inkml:channel name="Y" type="integer" min="-2.14748E9" max="2.14748E9" units="cm"/>
+          <inkml:channel name="F" type="integer" max="32767" units="dev"/>
+        </inkml:traceFormat>
+        <inkml:channelProperties>
+          <inkml:channelProperty channel="X" name="resolution" value="1000" units="1/cm"/>
+          <inkml:channelProperty channel="Y" name="resolution" value="1000" units="1/cm"/>
+          <inkml:channelProperty channel="F" name="resolution" value="0" units="1/dev"/>
+        </inkml:channelProperties>
+      </inkml:inkSource>
+      <inkml:timestamp xml:id="ts0" timeString="2026-07-13T18:52:37.469"/>
+    </inkml:context>
+    <inkml:brush xml:id="br0">
+      <inkml:brushProperty name="width" value="0.035" units="cm"/>
+      <inkml:brushProperty name="height" value="0.035" units="cm"/>
+      <inkml:brushProperty name="color" value="#E71224"/>
+    </inkml:brush>
+  </inkml:definitions>
+  <inkml:trace contextRef="#ctx0" brushRef="#br0">458 2796 24575,'0'13'0,"-2"10"0,-5 15 0,-9 12 0,-7 7 0,-3-1 0,3-7 0,3-7 0,2-8 0,2-2 0,0-3 0,3-1 0,1-3 0,2-4 0,2-5 0,1 0 0,2-1 0,-1 2 0,-2 4 0,0 1 0,-2 3 0,2-1 0,0 0 0,0 1 0,-2 1 0,0 2 0,-1 0 0,-1 0 0,1-1 0,1-1 0,1 0 0,4-1 0,0 1 0,-1 4 0,0 5 0,-2 5 0,0 2 0,-1 2 0,0-1 0,1-4 0,1 0 0,1-1 0,0 1 0,0 3 0,1 1 0,1 1 0,0 0 0,1 0 0,1-1 0,2-1 0,0-1 0,0-1 0,0-1 0,0-2 0,0-3 0,0-3 0,0-1 0,0-2 0,0-2 0,0 0 0,0-1 0,0 0 0,0 3 0,0-2 0,0 4 0,0 0 0,0 0 0,0 3 0,0 2 0,0 2 0,0 1 0,0-1 0,0-3 0,2 0 0,-1-3 0,3-1 0,-1 0 0,1-2 0,1 1 0,-1 1 0,0 0 0,1-1 0,1 1 0,0-1 0,2 1 0,0 0 0,0-1 0,0-1 0,-1-1 0,0-1 0,0 0 0,0 0 0,0 0 0,0-1 0,0-1 0,0-1 0,0-1 0,-1-1 0,3 1 0,0 1 0,0 1 0,1 2 0,-1 1 0,1 1 0,0 1 0,0-1 0,0-3 0,-1-2 0,-1-2 0,-1-2 0,-1-3 0,0-1 0,-2-1 0,0-1 0,1 0 0,-2 1 0,0-1 0,2 1 0,-2-1 0,2 2 0,-1 1 0,0-1 0,0 1 0,-1-3 0,0 2 0,1 1 0,0-1 0,0 0 0,1-1 0,1-1 0,-1 0 0,1 1 0,-1 1 0,1 0 0,0 1 0,1-1 0,0-2 0,-1 2 0,2 1 0,0-1 0,0 0 0,0-1 0,-2-2 0,1-2 0,-1-1 0,0 0 0,-1-1 0,1 1 0,1 0 0,1 1 0,1 1 0,-1 0 0,1 0 0,1 1 0,0-2 0,1 2 0,0-1 0,0 2 0,2-1 0,0 0 0,-1-2 0,1-2 0,2 0 0,1-1 0,3 2 0,1 0 0,0 0 0,2 0 0,1-1 0,2 1 0,1 0 0,3-1 0,3 0 0,4 0 0,2 0 0,1 0 0,1-1 0,-1 1 0,-1-2 0,-4-1 0,-1 0 0,-4-1 0,0 0 0,-2-3 0,2 1 0,3 0 0,3 2 0,6 0 0,1 0 0,3 0 0,-1 0 0,1 0 0,1-2 0,1 0 0,-1-2 0,0 0 0,1 0 0,-1 0 0,1 0 0,-1 0 0,1 0 0,0 0 0,2 0 0,3 0 0,2 0 0,1 0 0,2 0 0,-2 0 0,-4 0 0,-2 0 0,-5 0 0,-2 0 0,-3 0 0,-1 0 0,2 0 0,4 0 0,4 0 0,6 0 0,4 0 0,3-1 0,3-2 0,1 0 0,-1-1 0,-5-1 0,-3 0 0,-5 1 0,-2 0 0,-2 0 0,1-2 0,4-1 0,2-1 0,5-2 0,6-2 0,3 1 0,6-2 0,-1 1 0,-4 1 0,-5 2 0,-8 4 0,-5 0 0,-4 3 0,-2-1 0,-1 0 0,0-1 0,2-2 0,5-1 0,5-5 0,6-2 0,8-3 0,6-1 0,3-3 0,1 0 0,0-2 0,-3-1 0,-4-1 0,-3-2 0,-5 1 0,-3 0 0,-5 0 0,-5 1 0,-3 0 0,-4 0 0,-4 1 0,-5 1 0,-4-1 0,0-1 0,2-2 0,4-3 0,5-1 0,3 0 0,-2 3 0,-5 3 0,-8 7 0,-14 6 0,-10 8 0,-8 5 0,-5 2 0,0 1 0,0-2 0,2-1 0,3-3 0,2-2 0,0-1 0,-1 2 0,0 3 0,0 3 0,2 3 0,1 1 0,4 0 0,0-2 0,0 0 0,2-3 0,-2 2 0,0 0 0,-3 3 0,-3 2 0,-1 1 0,0 3 0,0 2 0,0 0 0,2 0 0,-1-1 0,2-1 0,0-1 0,-1-2 0,1-2 0,-1-2 0,0-1 0,-1 1 0,-1 0 0,0 0 0,0 1 0,1-3 0,1-4 0,2-6 0,13-9 0,20-13 0,24-10 0,16-4 0,8 4 0,0 9 0,0 3 0,7 2 0,-46 12 0,2 0 0,-1 0 0,0 0 0,0-1 0,0-1 0,41-14 0,-2 1 0,-4 2 0,-8 7 0,-9 4 0,-9 3 0,-10 1 0,-5 0 0,-4-3 0,1-3 0,3-5 0,8-7 0,9-3 0,9-6 0,7-2 0,3 1 0,0 1 0,-1 1 0,0-1 0,1-4 0,2-3 0,2-5 0,0-2 0,-40 22 0,0 0 0,0-1 0,-1-1 0,-1 1 0,0-1 0,37-29 0,-3 2 0,0 1 0,0-1 0,0 0 0,1-1 0,1-2 0,-35 28 0,0 0 0,1 0 0,1-1 0,4-2 0,1 0 0,3-1 0,-1 0 0,1 2 0,1 1 0,0 0 0,-1 1 0,-5 4 0,-1 1 0,35-24 0,-14 8 0,-13 7 0,-12 7 0,-9 4 0,-8 2 0,-6 1 0,-1-3 0,-2-4 0,0-7 0,3-6 0,1-7 0,0-5 0,-2-6 0,-5-5 0,-3-6 0,-5-6 0,-2-10 0,-1-10 0,0 43 0,0 0 0,-2-4 0,-1 1 0,-1-1 0,-3 1 0,-1 0 0,-2 1 0,-2 3 0,-1 1 0,0 1 0,0 1 0,-1 1 0,0 1 0,-11-39 0,4 12 0,1 22 0,7 23 0,0 0 0,0-13 0,-8-34 0,6 27 0,-1-3 0,-4-2 0,-2-1 0,-1 1 0,-1 1 0,1 7 0,-1 1 0,2 2 0,0 1 0,-16-39 0,4 3 0,5 3 0,3 6 0,2 9 0,4 7 0,1 8 0,0 3 0,3 2 0,0 0 0,1 0 0,1 0 0,1-1 0,0 2 0,-1-1 0,-1 2 0,-1 3 0,-1 3 0,-3 2 0,-3-2 0,-3-3 0,-3-3 0,1 1 0,1 2 0,2 5 0,0 4 0,-2 2 0,-3 1 0,-6-2 0,-7-3 0,-5-1 0,-8-3 0,-2 0 0,-3-1 0,-4 0 0,-1-2 0,-2-2 0,-1 3 0,3 2 0,6 6 0,8 7 0,7 5 0,7 4 0,3 2 0,-2 2 0,-3 1 0,-3-1 0,-1 2 0,0 3 0,-5 1 0,-17 2 0,-20 0 0,29 0 0,-4 0 0,-15 2 0,-2 3 0,-3 1 0,0 2 0,-1 2 0,2 2 0,9 0 0,6 1 0,14-2 0,6-1 0,-19 4 0,34-6 0,18-5 0,-7-1 0,-24-1 0,-35-3 0,27 1 0,-3-1 0,-5-1 0,-1 0 0,-1 0 0,0 1 0,3 0 0,0 1 0,1-1 0,0 0 0,3 0 0,1 1 0,3 0 0,-1-1 0,3 1 0,1 0 0,-40 1 0,10 0 0,9 0 0,7 0 0,6 0 0,1 0 0,4 0 0,3 0 0,-1 0 0,-2 0 0,-4 0 0,-3 2 0,4 2 0,9 2 0,11 1 0,12 0 0,8 1 0,2 2 0,1 4 0,-4 4 0,-3 4 0,-4 4 0,-2 2 0,1-1 0,2-3 0,1 0 0,2-1 0,0 1 0,2 3 0,1 2 0,-1 5 0,2 5 0,2 7 0,0 6 0,0 11 0,1 5 0,-1 3 0,2-1 0,0-5 0,3-5 0,0-6 0,2-3 0,2-3 0,1 1 0,1 1 0,0 2 0,0 4 0,-1 1 0,-1-1 0,0-3 0,0-4 0,1-5 0,1-2 0,0-3 0,0 0 0,0 1 0,0-1 0,0 0 0,0-2 0,0-1 0,0 1 0,0-1 0,0 3 0,0-2 0,2-2 0,0-4 0,0-4 0,-1-3 0,-1-1 0,0-3 0,0-3 0,0-2 0,0-2 0,0-1 0,0 0 0,0-2 0,0-1 0,0 0 0,0-1 0,0 0 0,0-1 0,0 2 0,0 0 0,0 0 0,-1 0 0,-2-2 0,-2-1 0,-4-1 0,-2 2 0,-2 0 0,-2 1 0,-1-1 0,2 0 0,1 0 0,0-1 0,1 1 0,1 0 0,0-2 0,2 0 0,3-1 0,0-2 0,-1 1 0,-4 0 0,-3 2 0,-2 2 0,-4 0 0,0-2 0,1-1 0,2-3 0,2-1 0,0 0 0,0 0 0,0 0 0,-4 0 0,-1 0 0,0 0 0,-1 0 0,1 0 0,-1 0 0,1 0 0,0 0 0,2 0 0,1 0 0,0 0 0,1 0 0,2 0 0,2 0 0,3 0 0,2 0 0,0 0 0,0 0 0,1 0 0,-1 0 0,-2 0 0,-2 0 0,0 0 0,-4 0 0,0 0 0,-1 0 0,-3 0 0,1 0 0,0 0 0,0 0 0,-1 0 0,1 0 0,2 0 0,1 0 0,2 0 0,0 0 0,1 0 0,-1 0 0,0 0 0,0 0 0,-2 0 0,0 0 0,-1 0 0,0 0 0,-1 0 0,-1 0 0,0 0 0,-2 0 0,-2 0 0,-1 0 0,0 0 0,-1 0 0,-2 0 0,-3 0 0,-2 0 0,3 0 0,3 0 0,3 0 0,1-2 0,1 0 0,0 0 0,2 1 0,2 1 0,1 0 0,2 0 0,1 0 0,-1 0 0,0 0 0,-1 0 0,-2 0 0,0 0 0,-1 0 0,2 0 0,1 0 0,3 0 0,2-2 0,0 0 0,0-1 0,2-1 0,0 1 0,1-2 0,1 2 0,-1 1 0,1-2 0,7 1 0,2-2 0,0 1 0,1 2 0,-8 0 0,-20 2 0,-26 0 0,-30 0 0,32 0 0,-2 0 0,-45 0 0,6 0 0,12-1 0,9-1 0,7-1 0,8 1 0,6 1 0,5 1 0,7 0 0,5 0 0,4 0 0,2 0 0,1 0 0,0 0 0,0 0 0,-2 0 0,3 0 0,0 0 0,2 0 0,3 0 0,-1 0 0,0 0 0,-1 0 0,-2 0 0,-2 0 0,-1 0 0,0 0 0,-2 0 0,2 0 0,0 0 0,1 0 0,2 0 0,-1 0 0,-2 0 0,0 0 0,0 0 0,1 0 0,4 1 0,-1 1 0,1 1 0,-1 2 0,-4 0 0,1-1 0,-1 0 0,1-1 0,-1 2 0,0-1 0,1 1 0,-1-1 0,1 0 0,-1 2 0,-2-1 0,-1 2 0,2-1 0,3 1 0,6-2 0,2-1 0,1-1 0,2 1 0,0 1 0,2-1 0,3 0 0,3 0 0,0 1 0,0 0 0,-3-1 0,-6 2 0,-5-2 0,-6 0 0,-3 1 0,0-2 0,0 1 0,4-2 0,2 0 0,2 0 0,2 1 0,1 0 0,3-1 0,2-1 0,2-1 0,-1 2 0,0 0 0,-2 0 0,-4 1 0,-1-1 0,1 2 0,0-1 0,1 1 0,-2-2 0,0 0 0,0-1 0,1-1 0,1 0 0,-1 0 0,0 0 0,1 0 0,1 0 0,3 1 0,-2 1 0,2 0 0,0-1 0,1-1 0,3 2 0,2 0 0,2 3 0,1 0 0,-2 1 0,-1 1 0,-1-1 0,-2-1 0,1-1 0,2 1 0,2 0 0,1 1 0,-2 1 0,1 0 0,-2 0 0,-2 0 0,0-2 0,0 0 0,2 0 0,2 1 0,0 0 0,1-1 0,0 1 0,0 0 0,0 1 0,-3 2 0,-1 1 0,1-2 0,5-7 0,8-16 0,11-29 0,7-21 0,3-21 0,-13 36 0,-6 10 0</inkml:trace>
+</inkml:ink>
+</file>
+
+<file path=ppt/ink/ink3.xml><?xml version="1.0" encoding="utf-8"?>
+<inkml:ink xmlns:inkml="http://www.w3.org/2003/InkML">
+  <inkml:definitions>
+    <inkml:context xml:id="ctx0">
+      <inkml:inkSource xml:id="inkSrc0">
+        <inkml:traceFormat>
+          <inkml:channel name="X" type="integer" min="-2.14748E9" max="2.14748E9" units="cm"/>
+          <inkml:channel name="Y" type="integer" min="-2.14748E9" max="2.14748E9" units="cm"/>
+          <inkml:channel name="F" type="integer" max="32767" units="dev"/>
+        </inkml:traceFormat>
+        <inkml:channelProperties>
+          <inkml:channelProperty channel="X" name="resolution" value="1000" units="1/cm"/>
+          <inkml:channelProperty channel="Y" name="resolution" value="1000" units="1/cm"/>
+          <inkml:channelProperty channel="F" name="resolution" value="0" units="1/dev"/>
+        </inkml:channelProperties>
+      </inkml:inkSource>
+      <inkml:timestamp xml:id="ts0" timeString="2026-07-13T19:01:06.135"/>
+    </inkml:context>
+    <inkml:brush xml:id="br0">
+      <inkml:brushProperty name="width" value="0.05" units="cm"/>
+      <inkml:brushProperty name="height" value="0.05" units="cm"/>
+      <inkml:brushProperty name="color" value="#E71224"/>
+    </inkml:brush>
+  </inkml:definitions>
+  <inkml:trace contextRef="#ctx0" brushRef="#br0">48 0 24575,'-2'11'0,"0"5"0,-1 6 0,0 11 0,-1 9 0,-2 5 0,-1 0 0,1-5 0,2-6 0,2-9 0,1-7 0,1-4 0,0-4 0,0-2 0,0-1 0,0 1 0,0 4 0,0 4 0,0 2 0,-2 1 0,0-1 0,0-3 0,1-3 0,1 0 0,0 4 0,0 6 0,0 7 0,0 6 0,0 1 0,0-3 0,0-4 0,0-3 0,0-1 0,0 1 0,0 1 0,0 1 0,0 0 0,0-3 0,2-1 0,0-3 0,1-2 0,2-1 0,-1-1 0,1-2 0,-1-1 0,0-1 0,0-2 0,0-2 0,-1-1 0,1-1 0,2 3 0,2 4 0,2 4 0,2 3 0,0 1 0,3-1 0,-1-1 0,3 0 0,3 0 0,4 1 0,4-1 0,0 0 0,1 0 0,1-1 0,0-1 0,2-1 0,0-3 0,1 1 0,1-2 0,0-2 0,3 0 0,2-2 0,2 1 0,0 1 0,0-1 0,0 0 0,0-2 0,-1-1 0,-4-1 0,-3-2 0,-2-1 0,-1-1 0,0-2 0,-1 1 0,1-1 0,0 0 0,-1 0 0,1-2 0,0 0 0,-1 0 0,1 0 0,0 1 0,-1 1 0,3 0 0,0 0 0,1-2 0,-2 0 0,1 0 0,0 0 0,2 0 0,0 0 0,1 0 0,3 0 0,2 0 0,4 0 0,2 0 0,1-2 0,4-1 0,1-1 0,2 0 0,3 2 0,0-2 0,-1 0 0,0-1 0,-3-1 0,1 0 0,0 0 0,1-2 0,4-2 0,1 0 0,4-1 0,3 2 0,2-2 0,2-1 0,3 1 0,2 1 0,2 0 0,-1 1 0,-3 2 0,-5 3 0,-4 2 0,-5 0 0,-8 0 0,-7 0 0,-4 0 0,-4 2 0,-1-1 0,0 0 0,1-1 0,1-1 0,-1 0 0,-3 1 0,-2-1 0,0 0 0,2-1 0,4-1 0,3-1 0,3-4 0,2 0 0,0-1 0,0 0 0,-4 1 0,-5-2 0,-5 1 0,-4 0 0,0-2 0,-1 0 0,-1-1 0,2 1 0,-3-2 0,1 1 0,2-2 0,-2-3 0,2 3 0,-3-1 0,-3-1 0,-2 2 0,-4 1 0,-1-1 0,-1 1 0,0-4 0,0-3 0,0-1 0,-2-1 0,-3 2 0,-2-1 0,-2-1 0,1-1 0,-1 0 0,-1 2 0,-3 3 0,-1 2 0,0 0 0,0 0 0,0 1 0,0 0 0,0 3 0,0 3 0,0 5 0,0 6 0,0 5 0,0 1 0,0 2 0,0-2 0,0-2 0,-4-13 0,-1-1 0,-4-11 0,0 3 0,2 3 0,2-2 0,3 3 0,2 0 0,0 1 0,1 4 0,1 3 0,2 3 0,2 3 0,0 0 0,1 0 0,2 0 0,1 0 0,1 0 0,3 0 0,1 0 0,1 0 0,-1 0 0,-1 0 0,-3 0 0,-3 0 0,-1 0 0,1 0 0,2 0 0,3 0 0,5 0 0,4-1 0,0-1 0,-3-2 0,-5 1 0,-2 2 0,-1-1 0,1 1 0,1-2 0,3-2 0,3-2 0,2 0 0,2 0 0,0 1 0,-2 2 0,-4-1 0,-2-1 0,-2 1 0,1 0 0,-1 2 0,0-1 0,2 1 0,1-1 0,0 1 0,-1 1 0,-4 1 0,1 0 0,-1 0 0,2-1 0,3 0 0,3 1 0,6 1 0,1 0 0,-1 0 0,-3 0 0,-3 0 0,-4 0 0,-4 0 0,-4 0 0,0 0 0,1 0 0,2 0 0,4 0 0,2 0 0,2 0 0,2 0 0,0 0 0,0 0 0,4 0 0,0 0 0,1 0 0,3 0 0,0 0 0,1-1 0,-2-1 0,-4 0 0,-5 0 0,-5 1 0,-2 1 0,1 0 0,3 0 0,1 0 0,2 0 0,-6 2 0,-3-1 0,-3 2 0,-3 1 0,-1 1 0,-2-2 0,0 0 0</inkml:trace>
+</inkml:ink>
+</file>
+
+<file path=ppt/ink/ink4.xml><?xml version="1.0" encoding="utf-8"?>
+<inkml:ink xmlns:inkml="http://www.w3.org/2003/InkML">
+  <inkml:definitions>
+    <inkml:context xml:id="ctx0">
+      <inkml:inkSource xml:id="inkSrc0">
+        <inkml:traceFormat>
+          <inkml:channel name="X" type="integer" min="-2.14748E9" max="2.14748E9" units="cm"/>
+          <inkml:channel name="Y" type="integer" min="-2.14748E9" max="2.14748E9" units="cm"/>
+          <inkml:channel name="F" type="integer" max="32767" units="dev"/>
+        </inkml:traceFormat>
+        <inkml:channelProperties>
+          <inkml:channelProperty channel="X" name="resolution" value="1000" units="1/cm"/>
+          <inkml:channelProperty channel="Y" name="resolution" value="1000" units="1/cm"/>
+          <inkml:channelProperty channel="F" name="resolution" value="0" units="1/dev"/>
+        </inkml:channelProperties>
+      </inkml:inkSource>
+      <inkml:timestamp xml:id="ts0" timeString="2026-07-13T19:01:21.394"/>
+    </inkml:context>
+    <inkml:brush xml:id="br0">
+      <inkml:brushProperty name="width" value="0.05" units="cm"/>
+      <inkml:brushProperty name="height" value="0.05" units="cm"/>
+      <inkml:brushProperty name="color" value="#E71224"/>
+    </inkml:brush>
+  </inkml:definitions>
+  <inkml:trace contextRef="#ctx0" brushRef="#br0">5879 1017 24575,'23'0'0,"4"0"0,8 0 0,4 0 0,0 0 0,-2 0 0,-2 0 0,-3 0 0,-3 0 0,-1 0 0,-1 0 0,2 0 0,1 0 0,-4 0 0,-3 0 0,-4 0 0,-4 0 0,0 0 0,-2 0 0,1 0 0,-1 0 0,0 0 0,1 0 0,-1 0 0,0 0 0,1 0 0,-1 0 0,0 0 0,1 0 0,1 0 0,2 0 0,3 0 0,1 0 0,1 0 0,1 0 0,1 0 0,0 0 0,-1 0 0,-2 0 0,-1 0 0,-1 0 0,1 0 0,1 0 0,0 0 0,-1 0 0,0 0 0,-1 0 0,1 0 0,0 0 0,2 0 0,0 0 0,3 0 0,0 0 0,2 0 0,2 0 0,1 0 0,1 0 0,3 0 0,0 0 0,3 0 0,3-2 0,2 0 0,1 0 0,0 0 0,1 0 0,0 0 0,0 0 0,-1 0 0,-3 1 0,-2-1 0,-1 0 0,-2 0 0,0 2 0,-4 0 0,-1-2 0,0 0 0,0-2 0,-1 1 0,-1 1 0,0-2 0,-3 2 0,-1 0 0,-3 1 0,-2 1 0,-3 0 0,0 0 0,-1 0 0,-2 0 0,-1 0 0,-2 0 0,0 0 0,-2 0 0,2 0 0,1 0 0,-1 0 0,2 0 0,-1 0 0,2 0 0,0 0 0,0 0 0,1 0 0,-1 0 0,0 0 0,1 0 0,-2 0 0,-1 0 0,-1 0 0,-2 0 0,1 0 0,-1 0 0,0 0 0,2 0 0,0 0 0,1 0 0,0 0 0,1 0 0,0 0 0,3 0 0,0 0 0,1 0 0,1 0 0,-1 1 0,-1 1 0,0 0 0,-1-1 0,-1-1 0,0 0 0,1 0 0,1 0 0,1 0 0,2 0 0,3 0 0,0 0 0,2 0 0,4 0 0,3-1 0,2-2 0,2-1 0,-1-2 0,-2 1 0,-2 0 0,-5-1 0,-2 1 0,-3-1 0,-3 1 0,-4-1 0,-3 0 0,-2 0 0,-2-3 0,2-3 0,2-2 0,1-4 0,1 0 0,-2 2 0,-2 0 0,-1 3 0,0-2 0,-1-1 0,-2-2 0,-1 1 0,-2 0 0,0-1 0,0 2 0,0 1 0,0 2 0,0-1 0,0 1 0,-1 0 0,0-1 0,-3 0 0,-1 1 0,-2-1 0,0 0 0,1 0 0,0 1 0,1-1 0,-1 1 0,1 2 0,0-1 0,-1 2 0,2 0 0,-1 0 0,0 0 0,0 0 0,1 2 0,-1-2 0,0-1 0,0-1 0,-1-1 0,1 1 0,1 2 0,0 1 0,0-2 0,0 1 0,0 0 0,0 1 0,1 1 0,-1 2 0,1 0 0,0 1 0,0-2 0,0-1 0,-2 0 0,0-1 0,0 1 0,0 2 0,2 2 0,-1 1 0,0 0 0,0 0 0,-1-1 0,1 1 0,1-1 0,0 2 0,0-1 0,0 0 0,-1 0 0,0-2 0,-3 0 0,-2-2 0,-1 1 0,-1-2 0,-2 2 0,-3-1 0,-4-1 0,-2 0 0,0-1 0,-1 1 0,-2-2 0,1 1 0,-1 1 0,2 0 0,0 2 0,2 1 0,0-1 0,0 0 0,-2 1 0,-3 2 0,-2-1 0,-4-2 0,-2 1 0,-6-1 0,-6 0 0,-5 2 0,-4 2 0,-2 0 0,0 2 0,0 0 0,3 0 0,4 0 0,-2 0 0,-1 0 0,-3-1 0,-7-2 0,-6 1 0,-9 0 0,-10 2 0,-11 0 0,48 0 0,0 0 0,-3 0 0,0 0 0,0 0 0,1 0 0,1 0 0,-1 0 0,-1 0 0,-1 0 0,1 1 0,0 1 0,-1 0 0,-2 1 0,-2 1 0,-1 0 0,-1 1 0,-1 0 0,0 0 0,-1 0 0,2 0 0,2 0 0,2 0 0,2 0 0,4-1 0,1 1 0,-37 2 0,13 0 0,12-2 0,9 0 0,3 2 0,-1-1 0,-3-1 0,-1-2 0,-2-2 0,4 0 0,0 1 0,2 0 0,2 0 0,-1-1 0,4-1 0,2 0 0,2 0 0,3 0 0,-3 0 0,-2 0 0,-4 0 0,-4 0 0,0 0 0,1-2 0,0-1 0,4-3 0,4-1 0,5 1 0,7 0 0,3 0 0,2 1 0,0 2 0,-1 1 0,1 2 0,-2 0 0,1 0 0,-1 0 0,-2 0 0,2 0 0,1 0 0,1 0 0,2 0 0,-1 2 0,1 2 0,-1 2 0,-1 2 0,2 2 0,-1 0 0,1 1 0,-2 1 0,0-1 0,1-2 0,2 0 0,3-1 0,0-2 0,1-1 0,2 0 0,-1 1 0,1 1 0,0-1 0,-1 0 0,0-1 0,3-2 0,-2 0 0,1 0 0,-1 1 0,-1-1 0,-1-1 0,-1 0 0,-1-2 0,-3 0 0,0 0 0,-2 0 0,0 0 0,-2 0 0,-1 0 0,2 0 0,1 0 0,0 0 0,1 0 0,1 0 0,1 0 0,1 0 0,-2 0 0,-2 1 0,-2 1 0,-1 2 0,1-1 0,1 1 0,-1-1 0,1-1 0,1 1 0,1-1 0,3 1 0,2 1 0,2-2 0,3-1 0,-1 0 0,0-1 0,0 2 0,1-1 0,2 1 0,-2 0 0,-1-2 0,-2 0 0,-1 0 0,1 0 0,-1 0 0,0 1 0,0 1 0,0 0 0,2 0 0,-1 0 0,1 0 0,2-1 0,-1 0 0,-1-1 0,-2 0 0,-3 0 0,-4 0 0,-4 0 0,-4 0 0,-3 0 0,0 0 0,0 0 0,2 0 0,4 0 0,1 0 0,2 0 0,0-1 0,-1-1 0,1-2 0,0 1 0,3 1 0,2-1 0,0 1 0,3 0 0,1 0 0,1 0 0,3 1 0,1-1 0,2 0 0,0 2 0,3 0 0,-1 0 0,-1 0 0,0 0 0,0 0 0,-1 0 0,-1 0 0,-2 0 0,0 0 0,-1 0 0,1 0 0,1 0 0,-1 0 0,-3 0 0,0 0 0,0 0 0,0 0 0,2-1 0,1 0 0,0-1 0,-1 0 0,1 1 0,-2 1 0,1 0 0,0 0 0,1 0 0,1 0 0,1 0 0,-2 0 0,-1 0 0,0 0 0,-1 0 0,1 0 0,-1 0 0,-2 0 0,-1 0 0,-1 0 0,1 0 0,-1 0 0,2 0 0,-1 0 0,2 0 0,1 0 0,0-1 0,1-2 0,-1-1 0,0-1 0,-1 2 0,1 1 0,-1-2 0,1 2 0,3 0 0,1 0 0,4 2 0,1 0 0,1 0 0,0 0 0,1 0 0,-1 0 0,0 0 0,1 0 0,-1 0 0,0 0 0,0 2 0,-2 1 0,-2 0 0,1 2 0,-1-2 0,1 1 0,0-1 0,-2 1 0,0-2 0,-2 2 0,2 0 0,0 0 0,1-1 0,-1 0 0,-2-1 0,-1 1 0,-1 2 0,1-1 0,-2-1 0,1-1 0,-1 0 0,0 0 0,1 1 0,-2 2 0,0-2 0,1-1 0,1 0 0,0-2 0,2 0 0,1 0 0,-1 0 0,3 0 0,-3 0 0,1 0 0,-3 1 0,-2 1 0,2 0 0,-1-1 0,2-1 0,-3 0 0,1 0 0,1 0 0,1 0 0,0 0 0,0 0 0,-3 0 0,0 1 0,-2 1 0,0 0 0,3 0 0,2 0 0,3-1 0,2 3 0,1 0 0,0 0 0,0-1 0,-1-1 0,0-1 0,1 0 0,1 2 0,1 2 0,1-1 0,-2-1 0,-1-1 0,1-1 0,0 1 0,1-1 0,2 2 0,-1-2 0,1 1 0,2 1 0,-1-2 0,1 2 0,-1 0 0,-1-1 0,1 1 0,-2-1 0,-1 0 0,-1-1 0,0-1 0,2 1 0,2 1 0,0 0 0,2 3 0,-1-1 0,-1 1 0,1 0 0,0-1 0,1 0 0,3 1 0,1 0 0,-1-2 0,1 0 0,-2 2 0,0 0 0,0 0 0,0 1 0,0 2 0,0-2 0,0 1 0,1-1 0,2-3 0,2 0 0,-2-3 0,0 0 0</inkml:trace>
+</inkml:ink>
+</file>
+
+<file path=ppt/ink/ink5.xml><?xml version="1.0" encoding="utf-8"?>
+<inkml:ink xmlns:inkml="http://www.w3.org/2003/InkML">
+  <inkml:definitions>
+    <inkml:context xml:id="ctx0">
+      <inkml:inkSource xml:id="inkSrc0">
+        <inkml:traceFormat>
+          <inkml:channel name="X" type="integer" min="-2.14748E9" max="2.14748E9" units="cm"/>
+          <inkml:channel name="Y" type="integer" min="-2.14748E9" max="2.14748E9" units="cm"/>
+          <inkml:channel name="F" type="integer" max="32767" units="dev"/>
+        </inkml:traceFormat>
+        <inkml:channelProperties>
+          <inkml:channelProperty channel="X" name="resolution" value="1000" units="1/cm"/>
+          <inkml:channelProperty channel="Y" name="resolution" value="1000" units="1/cm"/>
+          <inkml:channelProperty channel="F" name="resolution" value="0" units="1/dev"/>
+        </inkml:channelProperties>
+      </inkml:inkSource>
+      <inkml:timestamp xml:id="ts0" timeString="2026-07-13T19:01:29.163"/>
+    </inkml:context>
+    <inkml:brush xml:id="br0">
+      <inkml:brushProperty name="width" value="0.05" units="cm"/>
+      <inkml:brushProperty name="height" value="0.05" units="cm"/>
+      <inkml:brushProperty name="color" value="#E71224"/>
+    </inkml:brush>
+  </inkml:definitions>
+  <inkml:trace contextRef="#ctx0" brushRef="#br0">0 1 24575,'0'0'0</inkml:trace>
+</inkml:ink>
+</file>
+
+<file path=ppt/ink/ink6.xml><?xml version="1.0" encoding="utf-8"?>
+<inkml:ink xmlns:inkml="http://www.w3.org/2003/InkML">
+  <inkml:definitions>
+    <inkml:context xml:id="ctx0">
+      <inkml:inkSource xml:id="inkSrc0">
+        <inkml:traceFormat>
+          <inkml:channel name="X" type="integer" min="-2.14748E9" max="2.14748E9" units="cm"/>
+          <inkml:channel name="Y" type="integer" min="-2.14748E9" max="2.14748E9" units="cm"/>
+          <inkml:channel name="F" type="integer" max="32767" units="dev"/>
+        </inkml:traceFormat>
+        <inkml:channelProperties>
+          <inkml:channelProperty channel="X" name="resolution" value="1000" units="1/cm"/>
+          <inkml:channelProperty channel="Y" name="resolution" value="1000" units="1/cm"/>
+          <inkml:channelProperty channel="F" name="resolution" value="0" units="1/dev"/>
+        </inkml:channelProperties>
+      </inkml:inkSource>
+      <inkml:timestamp xml:id="ts0" timeString="2026-07-13T19:06:48.148"/>
+    </inkml:context>
+    <inkml:brush xml:id="br0">
+      <inkml:brushProperty name="width" value="0.05" units="cm"/>
+      <inkml:brushProperty name="height" value="0.05" units="cm"/>
+      <inkml:brushProperty name="color" value="#E71224"/>
+    </inkml:brush>
+  </inkml:definitions>
+  <inkml:trace contextRef="#ctx0" brushRef="#br0">7106 1789 24575,'19'0'0,"9"0"0,15 0 0,10 0 0,4 0 0,-2 0 0,-8 0 0,-13 0 0,-12 0 0,-7 0 0,-5 0 0,1-2 0,3 0 0,7-2 0,8-4 0,6-2 0,2-4 0,2-2 0,-4 1 0,-7 1 0,-5 3 0,-9 1 0,-3 3 0,-4-1 0,-2-3 0,2-6 0,1-4 0,3-2 0,-1 3 0,-3 6 0,-2 4 0,-2 5 0,-2 1 0,1 0 0,0-1 0,3-6 0,4-3 0,5-3 0,1 0 0,-3 4 0,-3 5 0,-1 1 0,0 1 0,2-1 0,-1 0 0,-2-2 0,-3 1 0,-2 0 0,-2 1 0,1 1 0,1-1 0,2-3 0,0-1 0,1 1 0,1 2 0,2 3 0,2-2 0,4-4 0,4-4 0,-1 0 0,0 2 0,-2 3 0,-3 4 0,-3 2 0,-2 1 0,-3-1 0,0 1 0,1 0 0,1 0 0,5-1 0,5-4 0,8 0 0,7-3 0,4 1 0,-2 3 0,-6 0 0,-6 3 0,-7 2 0,-4 1 0,-2 1 0,-2 0 0,2 0 0,3-1 0,3-1 0,3-2 0,3 1 0,-1 1 0,0 0 0,-1 2 0,0 0 0,3 0 0,1 0 0,4 0 0,4 0 0,2 0 0,2 0 0,2 0 0,-1 0 0,-2 0 0,-3 0 0,-5 0 0,-5 0 0,-4 1 0,-4 1 0,-3 1 0,-4 0 0,-1-1 0,1-1 0,4-1 0,6 2 0,8 0 0,8 2 0,6 0 0,1 0 0,-1-1 0,0 0 0,0 0 0,-2-1 0,-1 0 0,-4-2 0,-3 0 0,-3 0 0,-3 0 0,0 2 0,0-1 0,1 1 0,1 0 0,-1-1 0,0 1 0,-3 0 0,-3-1 0,-1-1 0,-2 0 0,0 0 0,1 0 0,-1 0 0,2 0 0,6 0 0,4 0 0,7 0 0,4 0 0,3-1 0,-1-2 0,1-1 0,-2-2 0,1 0 0,1 1 0,0 0 0,-2-1 0,-2 2 0,-6 0 0,-3 0 0,-5 2 0,-3 0 0,-1 1 0,0 0 0,1 0 0,3-2 0,1 0 0,1-1 0,1 1 0,-1 0 0,-2 1 0,0 1 0,-1 1 0,2 0 0,1 0 0,4 0 0,3 0 0,2 0 0,2 0 0,3 0 0,-1 0 0,3 0 0,0 0 0,0 0 0,2 0 0,0 0 0,1 2 0,0 0 0,1 1 0,0 0 0,1-1 0,2 0 0,0 1 0,1-1 0,-2 0 0,-3 0 0,-1-2 0,-5 0 0,-4 1 0,-4 1 0,-4 0 0,1 1 0,-1-1 0,2 0 0,0 0 0,-4-2 0,-1 0 0,-2 0 0,1 0 0,3 0 0,3 0 0,3 0 0,4 0 0,4 0 0,3 0 0,4 0 0,2 0 0,3-1 0,3-3 0,0-4 0,-4-2 0,-5-2 0,-8 1 0,-4 1 0,-5 1 0,-6 2 0,-3 0 0,-6 1 0,-4 1 0,0-2 0,-2-3 0,1-6 0,0-8 0,0-10 0,0-7 0,-2-5 0,0-1 0,-3 1 0,-1 1 0,0 2 0,-1 2 0,-4 2 0,-4 4 0,-4 2 0,-2 3 0,-1 0 0,-3 0 0,-1 1 0,-4-1 0,-4 0 0,-5-1 0,-4 2 0,-2 0 0,-1 2 0,3 2 0,3 1 0,3 2 0,3 2 0,0 2 0,2 2 0,-1 1 0,-4 0 0,-5 0 0,-9-1 0,-6 0 0,-6-1 0,-5-1 0,-1 3 0,-3 2 0,0 2 0,-7 4 0,-12 3 0,-10 2 0,41 1 0,-1 1 0,-5 1 0,-1 1 0,-1 0 0,0 2 0,1 0 0,0 3 0,2 0 0,1 1 0,4 0 0,1 0 0,0 1 0,0-1 0,2 1 0,0-1 0,1 1 0,-1 0 0,-1-1 0,-1 1 0,-5 0 0,-2 0 0,-5 0 0,0 0 0,-2 0 0,-1 1 0,-3 2 0,-1 0 0,-1 0 0,-1 0 0,1-1 0,0-2 0,1 0 0,1-3 0,6-2 0,1-2 0,7 0 0,2-2 0,3 1 0,1 0 0,-39 2 0,12-1 0,10 2 0,8 0 0,3 2 0,-3 2 0,-3 1 0,-4 2 0,0 1 0,2 1 0,-1 0 0,-2-1 0,-1 0 0,0-2 0,5-3 0,7-2 0,11-4 0,9-1 0,8 0 0,7 0 0,4 0 0,4 0 0,4 0 0,2 0 0,3 2 0,2 2 0,1 2 0,2 2 0,1-3 0,1-2 0,3-1 0,-1-3 0,-1-4 0,-5-2 0,-2-1 0,-2 0 0,2 4 0,-1 1 0,1 1 0,-2 2 0,1 0 0,-1 0 0,0-2 0,-1-2 0,-2 1 0,-2-2 0,-6 1 0,-8-1 0,-10 0 0,-16 1 0,-13 2 0,-10 0 0,-8 2 0,0 0 0,3 2 0,6 1 0,4-1 0,3 0 0,1 0 0,-1 0 0,1 2 0,-6 3 0,-9 0 0,30-2 0,-1 0 0,-3-1 0,-2 0 0,-2 1 0,-2 0 0,0 0 0,-1 1 0,3 0 0,0 1 0,0 1 0,0 1 0,2 0 0,2 0 0,3 1 0,1-1 0,-45 11 0,12-2 0,10-1 0,12-2 0,8-1 0,3 1 0,1 0 0,-2 1 0,-1 1 0,-2-2 0,0-3 0,0-1 0,-3-2 0,-3-3 0,-3-2 0,3-2 0,4-2 0,6 0 0,6 0 0,3 0 0,1 0 0,2 0 0,-1 0 0,0 0 0,-3 0 0,0 0 0,-2 0 0,1 2 0,1 1 0,4 1 0,5 2 0,3-3 0,5 1 0,2 0 0,2-1 0,3 1 0,1-2 0,-3-1 0,1-1 0,-3 2 0,0-1 0,-1 1 0,-1 1 0,0-1 0,-1 2 0,2 0 0,0-1 0,1 0 0,3 0 0,1 0 0,1-1 0,0-1 0,2-1 0,1 0 0,2 0 0,1 0 0,-1 0 0,-2 0 0,-1 0 0,0 0 0,-1 0 0,0 0 0,1 0 0,-1 0 0,-2 0 0,1 0 0,-1 0 0,-1 0 0,2 0 0,0 0 0,2 0 0,1 0 0,2 0 0,1 2 0,-1 0 0,0-1 0,-1 2 0,-1-1 0,1 0 0,0 0 0,-1 1 0,-1-2 0,-1 1 0,0-2 0,-1 2 0,2 0 0,-1 0 0,1-1 0,2-1 0,1 0 0,1 1 0,-1 0 0,0 1 0,-3 0 0,0-2 0,-2 0 0,0 0 0,-2 0 0,2 0 0,-1 0 0,0 0 0,3 0 0,-1 0 0,1 0 0,-1 0 0,1 0 0,-2 0 0,1 0 0,-2 0 0,-1 0 0,0 0 0,0 0 0,1 0 0,1 0 0,-1 0 0,1 1 0,0 1 0,0 0 0,1-1 0,0 0 0,-1-1 0,1 0 0,-2 0 0,0 1 0,-2 1 0,-1 0 0,-3-1 0,-2-1 0,-1 0 0,-3 0 0,0 0 0,0 0 0,-2 0 0,0 0 0,-3 0 0,1 0 0,0 0 0,-1 0 0,3 0 0,2-3 0,4-1 0,0 0 0,2 0 0,2 0 0,1 1 0,2-1 0,2 3 0,-1 0 0,2 0 0,1-1 0,2 0 0,-1-1 0,-1 1 0,-3 0 0,0-1 0,-1 1 0,-3-2 0,-1-1 0,-1 2 0,0-2 0,1 1 0,0 2 0,1-2 0,2 2 0,1 1 0,2 0 0,1 1 0,1 0 0,1 0 0,1 0 0,-1 0 0,1 0 0,-1 0 0,-1 0 0,-2 0 0,-3 0 0,0 0 0,0 0 0,-1 0 0,-1 0 0,-1 0 0,1 0 0,-1 0 0,1 0 0,-1 1 0,2 1 0,0 1 0,3 0 0,2 0 0,-1-2 0,0 0 0,-1-1 0,0 0 0,1 0 0,1 1 0,-1 1 0,-1 0 0,0-1 0,-1 1 0,1 0 0,-1 1 0,1 0 0,1-1 0,-2 1 0,0-1 0,0 1 0,0-1 0,1 1 0,2 0 0,1-1 0,1 0 0,1-1 0,1-1 0,1 0 0,-1 0 0,1 0 0,0 0 0,-1 0 0,1 0 0,-3 1 0,-2 1 0,2 0 0,0-1 0,1 0 0,3 0 0,-1 1 0,1 1 0,1 0 0,-1 0 0,2 0 0,-2 1 0,0 1 0,0-1 0,-1 1 0,0-1 0,-1 1 0,1 0 0,0 1 0,0-1 0,3-1 0,1 1 0,0-2 0,-1 2 0,1 0 0,-1-1 0,2 0 0,0 1 0,0-1 0,1 0 0,1 1 0,0-1 0,2 2 0,1-1 0,-1 1 0,2-1 0,0 1 0,0 0 0,0 2 0,0 2 0,0 0 0,0-1 0,0 1 0,0-1 0,0 1 0,0-2 0,0 0 0,0-1 0,0 1 0,0-1 0,0 0 0,0 1 0,0 0 0,0 1 0,0-1 0,0 0 0,0 0 0,0-1 0,0 0 0,0 1 0,1 1 0,2 0 0,0 2 0,2 1 0,-1 0 0,-1-1 0,1-1 0,-1 0 0,1-3 0,-1 0 0,0-2 0,-1-1 0,0 1 0,0-2 0,-1 2 0,1 0 0,0 0 0,0 1 0,-1 0 0,-1 0 0,0 2 0,0 1 0,2 0 0,0 3 0,0-1 0,-1 3 0,1-1 0,0 0 0,0 1 0,1-1 0,-1 0 0,2 0 0,1-1 0,2-1 0,-1 1 0,1 1 0,1 0 0,1 0 0,1-1 0,1 0 0,3-1 0,5 2 0,3 2 0,4 2 0,4 1 0,3 1 0,4-2 0,3 2 0,5 1 0,8 3 0,7 3 0,10 2 0,5 0 0,5-1 0,3-1 0,1-2 0,-1-2 0,-2-2 0,0-1 0,3 0 0,4 0 0,5-1 0,-45-8 0,2 0 0,0-1 0,0-1 0,2-1 0,-1-2 0,1 1 0,-1-2 0,45 3 0,-7-2 0,-10 0 0,-6-1 0,-5-2 0,-6 0 0,-8 0 0,-6-2 0,-3 0 0,-2 0 0,-1-1 0,0-1 0,0-1 0,1-3 0,-1-1 0,5-2 0,2-1 0,3 0 0,5 0 0,0 1 0,5 1 0,3-1 0,4 0 0,1 1 0,-1-1 0,-4 1 0,-3 0 0,-5-1 0,-4 1 0,-5 1 0,-4 1 0,-3 1 0,0 0 0,1 2 0,6 1 0,3 2 0,2 0 0,4 0 0,-1 0 0,-1 0 0,1 0 0,-2 0 0,-1 0 0,-1 0 0,-3 0 0,0 0 0,0 0 0,2 0 0,1 0 0,-1 0 0,-3 0 0,-5 0 0,-5 0 0,-3 0 0,-3 0 0,-3 0 0,0 0 0,-1 0 0,-2 0 0,0 0 0,0 0 0,0 0 0,1 0 0,0 0 0,1 0 0,0 0 0,0 0 0,-1 0 0,1 0 0,1 0 0,1 0 0,0 0 0,-1 0 0,0-2 0,-1 0 0,2 0 0,0 1 0,2 1 0,1-2 0,-3 0 0,-1 0 0,-3 0 0,1 2 0,-1 0 0,1 0 0,3 0 0,0 0 0,4 0 0,0 0 0,1 0 0,-1 0 0,-2 0 0,0 0 0,-3 0 0,-1 0 0,-3 0 0,-4 0 0,-1 0 0,-3 0 0,-2 0 0,0 0 0,-2 0 0,0 0 0,0 0 0,-1 0 0,-1 0 0,1 0 0,0 0 0,2 0 0,-1 0 0,0 0 0,1 0 0,-1 0 0,1 0 0,-1 0 0,3 0 0,2 0 0,4 0 0,1 0 0,2 0 0,0-2 0,-2 0 0,-1 1 0,-3 0 0,-2 1 0,-1 0 0,-2 0 0,-1 0 0,1 0 0,-1 0 0,0 0 0,1 0 0,-1 0 0,0 0 0,2 0 0,1 0 0,0 0 0,-1 0 0,0 0 0,1 0 0,-1 0 0,-3 0 0,-3 0 0,-1 0 0,0 0 0,2 0 0,4 0 0,4-4 0,1 0 0,1 0 0,-3 1 0,-2 3 0,-1 0 0,-2 0 0,-1 0 0,0 0 0,3 0 0,4 0 0,5 0 0,2 0 0,-3 0 0,-2 0 0,-5 0 0,-5 0 0,-2 0 0,0 0 0,3-2 0,5-1 0,3-3 0,2-1 0,-1 1 0,-3 2 0,-4 3 0,-5-2 0,-3-1 0,-4-1 0,0-1 0,1 0 0,3-1 0,1 0 0,-1 2 0,-2 3 0,-2 2 0,-2 1 0</inkml:trace>
+</inkml:ink>
+</file>
+
 <file path=ppt/notesMasters/notesMaster1.xml><?xml version="1.0" encoding="utf-8"?>
 <p:notesMaster xmlns:a="http://schemas.openxmlformats.org/drawingml/2006/main" xmlns:r="http://schemas.openxmlformats.org/officeDocument/2006/relationships" xmlns:p="http://schemas.openxmlformats.org/presentationml/2006/main">
   <p:cSld>
@@ -1057,6 +1228,462 @@
         <p:cNvPr id="1" name="Shape 65">
           <a:extLst>
             <a:ext uri="{FF2B5EF4-FFF2-40B4-BE49-F238E27FC236}">
+              <a16:creationId xmlns:a16="http://schemas.microsoft.com/office/drawing/2014/main" id="{7BC640C6-050C-C78C-F846-1351E7E4BBBF}"/>
+            </a:ext>
+          </a:extLst>
+        </p:cNvPr>
+        <p:cNvGrpSpPr/>
+        <p:nvPr/>
+      </p:nvGrpSpPr>
+      <p:grpSpPr>
+        <a:xfrm>
+          <a:off x="0" y="0"/>
+          <a:ext cx="0" cy="0"/>
+          <a:chOff x="0" y="0"/>
+          <a:chExt cx="0" cy="0"/>
+        </a:xfrm>
+      </p:grpSpPr>
+      <p:sp>
+        <p:nvSpPr>
+          <p:cNvPr id="66" name="Google Shape;66;g7179d949db_7_60:notes">
+            <a:extLst>
+              <a:ext uri="{FF2B5EF4-FFF2-40B4-BE49-F238E27FC236}">
+                <a16:creationId xmlns:a16="http://schemas.microsoft.com/office/drawing/2014/main" id="{A89F2C07-3EB5-A0B5-7678-C76D143C14B2}"/>
+              </a:ext>
+            </a:extLst>
+          </p:cNvPr>
+          <p:cNvSpPr>
+            <a:spLocks noGrp="1" noRot="1" noChangeAspect="1"/>
+          </p:cNvSpPr>
+          <p:nvPr>
+            <p:ph type="sldImg" idx="2"/>
+          </p:nvPr>
+        </p:nvSpPr>
+        <p:spPr>
+          <a:xfrm>
+            <a:off x="381000" y="685800"/>
+            <a:ext cx="6096000" cy="3429000"/>
+          </a:xfrm>
+          <a:custGeom>
+            <a:avLst/>
+            <a:gdLst/>
+            <a:ahLst/>
+            <a:cxnLst/>
+            <a:rect l="l" t="t" r="r" b="b"/>
+            <a:pathLst>
+              <a:path w="120000" h="120000" extrusionOk="0">
+                <a:moveTo>
+                  <a:pt x="0" y="0"/>
+                </a:moveTo>
+                <a:lnTo>
+                  <a:pt x="120000" y="0"/>
+                </a:lnTo>
+                <a:lnTo>
+                  <a:pt x="120000" y="120000"/>
+                </a:lnTo>
+                <a:lnTo>
+                  <a:pt x="0" y="120000"/>
+                </a:lnTo>
+                <a:close/>
+              </a:path>
+            </a:pathLst>
+          </a:custGeom>
+          <a:noFill/>
+          <a:ln w="9525" cap="flat" cmpd="sng">
+            <a:solidFill>
+              <a:srgbClr val="000000"/>
+            </a:solidFill>
+            <a:prstDash val="solid"/>
+            <a:round/>
+            <a:headEnd type="none" w="sm" len="sm"/>
+            <a:tailEnd type="none" w="sm" len="sm"/>
+          </a:ln>
+        </p:spPr>
+      </p:sp>
+      <p:sp>
+        <p:nvSpPr>
+          <p:cNvPr id="67" name="Google Shape;67;g7179d949db_7_60:notes">
+            <a:extLst>
+              <a:ext uri="{FF2B5EF4-FFF2-40B4-BE49-F238E27FC236}">
+                <a16:creationId xmlns:a16="http://schemas.microsoft.com/office/drawing/2014/main" id="{30291E78-BC9B-FD65-61FA-E0A53D580FB9}"/>
+              </a:ext>
+            </a:extLst>
+          </p:cNvPr>
+          <p:cNvSpPr txBox="1">
+            <a:spLocks noGrp="1"/>
+          </p:cNvSpPr>
+          <p:nvPr>
+            <p:ph type="body" idx="1"/>
+          </p:nvPr>
+        </p:nvSpPr>
+        <p:spPr>
+          <a:xfrm>
+            <a:off x="685800" y="4343400"/>
+            <a:ext cx="5486400" cy="4114800"/>
+          </a:xfrm>
+          <a:prstGeom prst="rect">
+            <a:avLst/>
+          </a:prstGeom>
+          <a:noFill/>
+          <a:ln>
+            <a:noFill/>
+          </a:ln>
+        </p:spPr>
+        <p:txBody>
+          <a:bodyPr spcFirstLastPara="1" wrap="square" lIns="91425" tIns="91425" rIns="91425" bIns="91425" anchor="t" anchorCtr="0">
+            <a:noAutofit/>
+          </a:bodyPr>
+          <a:lstStyle/>
+          <a:p>
+            <a:pPr marL="0" lvl="0" indent="0" algn="l" rtl="0">
+              <a:spcBef>
+                <a:spcPts val="0"/>
+              </a:spcBef>
+              <a:spcAft>
+                <a:spcPts val="0"/>
+              </a:spcAft>
+              <a:buNone/>
+            </a:pPr>
+            <a:r>
+              <a:rPr lang="en-CA" dirty="0"/>
+              <a:t>8 dependencies reside in NETCONF/NETMOD/OPSAWG</a:t>
+            </a:r>
+            <a:endParaRPr dirty="0"/>
+          </a:p>
+        </p:txBody>
+      </p:sp>
+    </p:spTree>
+    <p:extLst>
+      <p:ext uri="{BB962C8B-B14F-4D97-AF65-F5344CB8AC3E}">
+        <p14:creationId xmlns:p14="http://schemas.microsoft.com/office/powerpoint/2010/main" val="1746624410"/>
+      </p:ext>
+    </p:extLst>
+  </p:cSld>
+  <p:clrMapOvr>
+    <a:masterClrMapping/>
+  </p:clrMapOvr>
+</p:notes>
+</file>
+
+<file path=ppt/notesSlides/notesSlide11.xml><?xml version="1.0" encoding="utf-8"?>
+<p:notes xmlns:a="http://schemas.openxmlformats.org/drawingml/2006/main" xmlns:r="http://schemas.openxmlformats.org/officeDocument/2006/relationships" xmlns:p="http://schemas.openxmlformats.org/presentationml/2006/main" showMasterSp="0" showMasterPhAnim="0">
+  <p:cSld>
+    <p:spTree>
+      <p:nvGrpSpPr>
+        <p:cNvPr id="1" name="Shape 65">
+          <a:extLst>
+            <a:ext uri="{FF2B5EF4-FFF2-40B4-BE49-F238E27FC236}">
+              <a16:creationId xmlns:a16="http://schemas.microsoft.com/office/drawing/2014/main" id="{CD69ACF5-659A-0FC3-FBE7-AAB618026D59}"/>
+            </a:ext>
+          </a:extLst>
+        </p:cNvPr>
+        <p:cNvGrpSpPr/>
+        <p:nvPr/>
+      </p:nvGrpSpPr>
+      <p:grpSpPr>
+        <a:xfrm>
+          <a:off x="0" y="0"/>
+          <a:ext cx="0" cy="0"/>
+          <a:chOff x="0" y="0"/>
+          <a:chExt cx="0" cy="0"/>
+        </a:xfrm>
+      </p:grpSpPr>
+      <p:sp>
+        <p:nvSpPr>
+          <p:cNvPr id="66" name="Google Shape;66;g7179d949db_7_60:notes">
+            <a:extLst>
+              <a:ext uri="{FF2B5EF4-FFF2-40B4-BE49-F238E27FC236}">
+                <a16:creationId xmlns:a16="http://schemas.microsoft.com/office/drawing/2014/main" id="{01A235C6-0404-43D3-66CE-8F90DF462F95}"/>
+              </a:ext>
+            </a:extLst>
+          </p:cNvPr>
+          <p:cNvSpPr>
+            <a:spLocks noGrp="1" noRot="1" noChangeAspect="1"/>
+          </p:cNvSpPr>
+          <p:nvPr>
+            <p:ph type="sldImg" idx="2"/>
+          </p:nvPr>
+        </p:nvSpPr>
+        <p:spPr>
+          <a:xfrm>
+            <a:off x="381000" y="685800"/>
+            <a:ext cx="6096000" cy="3429000"/>
+          </a:xfrm>
+          <a:custGeom>
+            <a:avLst/>
+            <a:gdLst/>
+            <a:ahLst/>
+            <a:cxnLst/>
+            <a:rect l="l" t="t" r="r" b="b"/>
+            <a:pathLst>
+              <a:path w="120000" h="120000" extrusionOk="0">
+                <a:moveTo>
+                  <a:pt x="0" y="0"/>
+                </a:moveTo>
+                <a:lnTo>
+                  <a:pt x="120000" y="0"/>
+                </a:lnTo>
+                <a:lnTo>
+                  <a:pt x="120000" y="120000"/>
+                </a:lnTo>
+                <a:lnTo>
+                  <a:pt x="0" y="120000"/>
+                </a:lnTo>
+                <a:close/>
+              </a:path>
+            </a:pathLst>
+          </a:custGeom>
+          <a:noFill/>
+          <a:ln w="9525" cap="flat" cmpd="sng">
+            <a:solidFill>
+              <a:srgbClr val="000000"/>
+            </a:solidFill>
+            <a:prstDash val="solid"/>
+            <a:round/>
+            <a:headEnd type="none" w="sm" len="sm"/>
+            <a:tailEnd type="none" w="sm" len="sm"/>
+          </a:ln>
+        </p:spPr>
+      </p:sp>
+      <p:sp>
+        <p:nvSpPr>
+          <p:cNvPr id="67" name="Google Shape;67;g7179d949db_7_60:notes">
+            <a:extLst>
+              <a:ext uri="{FF2B5EF4-FFF2-40B4-BE49-F238E27FC236}">
+                <a16:creationId xmlns:a16="http://schemas.microsoft.com/office/drawing/2014/main" id="{81F3B3E0-3A09-A347-CBBD-7CE3A3783DCB}"/>
+              </a:ext>
+            </a:extLst>
+          </p:cNvPr>
+          <p:cNvSpPr txBox="1">
+            <a:spLocks noGrp="1"/>
+          </p:cNvSpPr>
+          <p:nvPr>
+            <p:ph type="body" idx="1"/>
+          </p:nvPr>
+        </p:nvSpPr>
+        <p:spPr>
+          <a:xfrm>
+            <a:off x="685800" y="4343400"/>
+            <a:ext cx="5486400" cy="4114800"/>
+          </a:xfrm>
+          <a:prstGeom prst="rect">
+            <a:avLst/>
+          </a:prstGeom>
+          <a:noFill/>
+          <a:ln>
+            <a:noFill/>
+          </a:ln>
+        </p:spPr>
+        <p:txBody>
+          <a:bodyPr spcFirstLastPara="1" wrap="square" lIns="91425" tIns="91425" rIns="91425" bIns="91425" anchor="t" anchorCtr="0">
+            <a:noAutofit/>
+          </a:bodyPr>
+          <a:lstStyle/>
+          <a:p>
+            <a:pPr marL="0" lvl="0" indent="0" algn="l" rtl="0">
+              <a:spcBef>
+                <a:spcPts val="0"/>
+              </a:spcBef>
+              <a:spcAft>
+                <a:spcPts val="0"/>
+              </a:spcAft>
+              <a:buNone/>
+            </a:pPr>
+            <a:r>
+              <a:rPr lang="en-CA" dirty="0"/>
+              <a:t>The cluster of 3 message-broker related documents can go together once the dependent documents have been submitted to the IESG</a:t>
+            </a:r>
+            <a:endParaRPr dirty="0"/>
+          </a:p>
+        </p:txBody>
+      </p:sp>
+    </p:spTree>
+    <p:extLst>
+      <p:ext uri="{BB962C8B-B14F-4D97-AF65-F5344CB8AC3E}">
+        <p14:creationId xmlns:p14="http://schemas.microsoft.com/office/powerpoint/2010/main" val="3251335543"/>
+      </p:ext>
+    </p:extLst>
+  </p:cSld>
+  <p:clrMapOvr>
+    <a:masterClrMapping/>
+  </p:clrMapOvr>
+</p:notes>
+</file>
+
+<file path=ppt/notesSlides/notesSlide12.xml><?xml version="1.0" encoding="utf-8"?>
+<p:notes xmlns:a="http://schemas.openxmlformats.org/drawingml/2006/main" xmlns:r="http://schemas.openxmlformats.org/officeDocument/2006/relationships" xmlns:p="http://schemas.openxmlformats.org/presentationml/2006/main" showMasterSp="0" showMasterPhAnim="0">
+  <p:cSld>
+    <p:spTree>
+      <p:nvGrpSpPr>
+        <p:cNvPr id="1" name="Shape 65">
+          <a:extLst>
+            <a:ext uri="{FF2B5EF4-FFF2-40B4-BE49-F238E27FC236}">
+              <a16:creationId xmlns:a16="http://schemas.microsoft.com/office/drawing/2014/main" id="{A561133C-4E41-7387-0C31-44AD12018DFF}"/>
+            </a:ext>
+          </a:extLst>
+        </p:cNvPr>
+        <p:cNvGrpSpPr/>
+        <p:nvPr/>
+      </p:nvGrpSpPr>
+      <p:grpSpPr>
+        <a:xfrm>
+          <a:off x="0" y="0"/>
+          <a:ext cx="0" cy="0"/>
+          <a:chOff x="0" y="0"/>
+          <a:chExt cx="0" cy="0"/>
+        </a:xfrm>
+      </p:grpSpPr>
+      <p:sp>
+        <p:nvSpPr>
+          <p:cNvPr id="66" name="Google Shape;66;g7179d949db_7_60:notes">
+            <a:extLst>
+              <a:ext uri="{FF2B5EF4-FFF2-40B4-BE49-F238E27FC236}">
+                <a16:creationId xmlns:a16="http://schemas.microsoft.com/office/drawing/2014/main" id="{AEAD58D3-39B0-1C58-ECA9-1E9845FA65A7}"/>
+              </a:ext>
+            </a:extLst>
+          </p:cNvPr>
+          <p:cNvSpPr>
+            <a:spLocks noGrp="1" noRot="1" noChangeAspect="1"/>
+          </p:cNvSpPr>
+          <p:nvPr>
+            <p:ph type="sldImg" idx="2"/>
+          </p:nvPr>
+        </p:nvSpPr>
+        <p:spPr>
+          <a:xfrm>
+            <a:off x="381000" y="685800"/>
+            <a:ext cx="6096000" cy="3429000"/>
+          </a:xfrm>
+          <a:custGeom>
+            <a:avLst/>
+            <a:gdLst/>
+            <a:ahLst/>
+            <a:cxnLst/>
+            <a:rect l="l" t="t" r="r" b="b"/>
+            <a:pathLst>
+              <a:path w="120000" h="120000" extrusionOk="0">
+                <a:moveTo>
+                  <a:pt x="0" y="0"/>
+                </a:moveTo>
+                <a:lnTo>
+                  <a:pt x="120000" y="0"/>
+                </a:lnTo>
+                <a:lnTo>
+                  <a:pt x="120000" y="120000"/>
+                </a:lnTo>
+                <a:lnTo>
+                  <a:pt x="0" y="120000"/>
+                </a:lnTo>
+                <a:close/>
+              </a:path>
+            </a:pathLst>
+          </a:custGeom>
+          <a:noFill/>
+          <a:ln w="9525" cap="flat" cmpd="sng">
+            <a:solidFill>
+              <a:srgbClr val="000000"/>
+            </a:solidFill>
+            <a:prstDash val="solid"/>
+            <a:round/>
+            <a:headEnd type="none" w="sm" len="sm"/>
+            <a:tailEnd type="none" w="sm" len="sm"/>
+          </a:ln>
+        </p:spPr>
+      </p:sp>
+      <p:sp>
+        <p:nvSpPr>
+          <p:cNvPr id="67" name="Google Shape;67;g7179d949db_7_60:notes">
+            <a:extLst>
+              <a:ext uri="{FF2B5EF4-FFF2-40B4-BE49-F238E27FC236}">
+                <a16:creationId xmlns:a16="http://schemas.microsoft.com/office/drawing/2014/main" id="{CA2D24D9-3D1E-A558-6D09-5790EA6A7D07}"/>
+              </a:ext>
+            </a:extLst>
+          </p:cNvPr>
+          <p:cNvSpPr txBox="1">
+            <a:spLocks noGrp="1"/>
+          </p:cNvSpPr>
+          <p:nvPr>
+            <p:ph type="body" idx="1"/>
+          </p:nvPr>
+        </p:nvSpPr>
+        <p:spPr>
+          <a:xfrm>
+            <a:off x="685800" y="4343400"/>
+            <a:ext cx="5486400" cy="4114800"/>
+          </a:xfrm>
+          <a:prstGeom prst="rect">
+            <a:avLst/>
+          </a:prstGeom>
+          <a:noFill/>
+          <a:ln>
+            <a:noFill/>
+          </a:ln>
+        </p:spPr>
+        <p:txBody>
+          <a:bodyPr spcFirstLastPara="1" wrap="square" lIns="91425" tIns="91425" rIns="91425" bIns="91425" anchor="t" anchorCtr="0">
+            <a:noAutofit/>
+          </a:bodyPr>
+          <a:lstStyle/>
+          <a:p>
+            <a:pPr marL="0" marR="0" lvl="0" indent="0" algn="l" defTabSz="914400" rtl="0" eaLnBrk="1" fontAlgn="auto" latinLnBrk="0" hangingPunct="1">
+              <a:lnSpc>
+                <a:spcPct val="100000"/>
+              </a:lnSpc>
+              <a:spcBef>
+                <a:spcPts val="0"/>
+              </a:spcBef>
+              <a:spcAft>
+                <a:spcPts val="0"/>
+              </a:spcAft>
+              <a:buClr>
+                <a:srgbClr val="000000"/>
+              </a:buClr>
+              <a:buSzPts val="1400"/>
+              <a:buFont typeface="Arial"/>
+              <a:buNone/>
+              <a:tabLst/>
+              <a:defRPr/>
+            </a:pPr>
+            <a:r>
+              <a:rPr lang="en-CA" dirty="0"/>
+              <a:t>The cluster of 3 network-anomaly related documents can go together once the dependent documents have been submitted to the IESG</a:t>
+            </a:r>
+          </a:p>
+          <a:p>
+            <a:pPr marL="0" lvl="0" indent="0" algn="l" rtl="0">
+              <a:spcBef>
+                <a:spcPts val="0"/>
+              </a:spcBef>
+              <a:spcAft>
+                <a:spcPts val="0"/>
+              </a:spcAft>
+              <a:buNone/>
+            </a:pPr>
+            <a:endParaRPr dirty="0"/>
+          </a:p>
+        </p:txBody>
+      </p:sp>
+    </p:spTree>
+    <p:extLst>
+      <p:ext uri="{BB962C8B-B14F-4D97-AF65-F5344CB8AC3E}">
+        <p14:creationId xmlns:p14="http://schemas.microsoft.com/office/powerpoint/2010/main" val="994273626"/>
+      </p:ext>
+    </p:extLst>
+  </p:cSld>
+  <p:clrMapOvr>
+    <a:masterClrMapping/>
+  </p:clrMapOvr>
+</p:notes>
+</file>
+
+<file path=ppt/notesSlides/notesSlide13.xml><?xml version="1.0" encoding="utf-8"?>
+<p:notes xmlns:a="http://schemas.openxmlformats.org/drawingml/2006/main" xmlns:r="http://schemas.openxmlformats.org/officeDocument/2006/relationships" xmlns:p="http://schemas.openxmlformats.org/presentationml/2006/main" showMasterSp="0" showMasterPhAnim="0">
+  <p:cSld>
+    <p:spTree>
+      <p:nvGrpSpPr>
+        <p:cNvPr id="1" name="Shape 65">
+          <a:extLst>
+            <a:ext uri="{FF2B5EF4-FFF2-40B4-BE49-F238E27FC236}">
               <a16:creationId xmlns:a16="http://schemas.microsoft.com/office/drawing/2014/main" id="{CB4127F8-10CB-EE51-33BB-1AFE47F25C36}"/>
             </a:ext>
           </a:extLst>
@@ -1177,7 +1804,7 @@
               <a:buNone/>
             </a:pPr>
             <a:r>
-              <a:rPr lang="en-US" sz="1200">
+              <a:rPr lang="en-US" sz="1200" dirty="0">
                 <a:solidFill>
                   <a:srgbClr val="424242"/>
                 </a:solidFill>
@@ -1192,7 +1819,7 @@
               <a:t>The IETF Note Well should be shown at the start of every IETF working session. The guidance below is </a:t>
             </a:r>
             <a:r>
-              <a:rPr lang="en-US" sz="1200" u="sng">
+              <a:rPr lang="en-US" sz="1200" u="sng" dirty="0">
                 <a:solidFill>
                   <a:srgbClr val="1976D2"/>
                 </a:solidFill>
@@ -1210,7 +1837,7 @@
               </a:rPr>
               <a:t>adapted from IETF legal counsel presentation during IETF 120</a:t>
             </a:r>
-            <a:endParaRPr sz="1200">
+            <a:endParaRPr sz="1200" dirty="0">
               <a:solidFill>
                 <a:srgbClr val="1B5E20"/>
               </a:solidFill>
@@ -1236,7 +1863,7 @@
               </a:spcAft>
               <a:buNone/>
             </a:pPr>
-            <a:endParaRPr sz="1200">
+            <a:endParaRPr sz="1200" dirty="0">
               <a:solidFill>
                 <a:srgbClr val="1B5E20"/>
               </a:solidFill>
@@ -1268,7 +1895,7 @@
               <a:buNone/>
             </a:pPr>
             <a:r>
-              <a:rPr lang="en-US" sz="1200">
+              <a:rPr lang="en-US" sz="1200" dirty="0">
                 <a:solidFill>
                   <a:srgbClr val="1B5E20"/>
                 </a:solidFill>
@@ -1282,7 +1909,7 @@
               </a:rPr>
               <a:t>DO</a:t>
             </a:r>
-            <a:endParaRPr sz="1200">
+            <a:endParaRPr sz="1200" dirty="0">
               <a:solidFill>
                 <a:srgbClr val="1B5E20"/>
               </a:solidFill>
@@ -1314,7 +1941,7 @@
               <a:buAutoNum type="arabicPeriod"/>
             </a:pPr>
             <a:r>
-              <a:rPr lang="en-US" sz="1200">
+              <a:rPr lang="en-US" sz="1200" dirty="0">
                 <a:solidFill>
                   <a:srgbClr val="424242"/>
                 </a:solidFill>
@@ -1325,7 +1952,7 @@
               </a:rPr>
               <a:t>Do make sure people have enough time to read through the slide before you move on,</a:t>
             </a:r>
-            <a:endParaRPr sz="1200">
+            <a:endParaRPr sz="1200" dirty="0">
               <a:solidFill>
                 <a:srgbClr val="424242"/>
               </a:solidFill>
@@ -1354,7 +1981,7 @@
               <a:buAutoNum type="arabicPeriod"/>
             </a:pPr>
             <a:r>
-              <a:rPr lang="en-US" sz="1200">
+              <a:rPr lang="en-US" sz="1200" dirty="0">
                 <a:solidFill>
                   <a:srgbClr val="424242"/>
                 </a:solidFill>
@@ -1365,7 +1992,7 @@
               </a:rPr>
               <a:t>Do give a high-level summary of what’s covered in the Note Well: “IETF policies on conduct, privacy and IPR.”,</a:t>
             </a:r>
-            <a:endParaRPr sz="1200">
+            <a:endParaRPr sz="1200" dirty="0">
               <a:solidFill>
                 <a:srgbClr val="424242"/>
               </a:solidFill>
@@ -1394,7 +2021,7 @@
               <a:buAutoNum type="arabicPeriod"/>
             </a:pPr>
             <a:r>
-              <a:rPr lang="en-US" sz="1200">
+              <a:rPr lang="en-US" sz="1200" dirty="0">
                 <a:solidFill>
                   <a:srgbClr val="424242"/>
                 </a:solidFill>
@@ -1405,7 +2032,7 @@
               </a:rPr>
               <a:t>Do encourage people to read through all the linked policies &amp; documents in detail before participating or contributing,</a:t>
             </a:r>
-            <a:endParaRPr sz="1200">
+            <a:endParaRPr sz="1200" dirty="0">
               <a:solidFill>
                 <a:srgbClr val="424242"/>
               </a:solidFill>
@@ -1434,7 +2061,7 @@
               <a:buAutoNum type="arabicPeriod"/>
             </a:pPr>
             <a:r>
-              <a:rPr lang="en-US" sz="1200">
+              <a:rPr lang="en-US" sz="1200" dirty="0">
                 <a:solidFill>
                   <a:srgbClr val="424242"/>
                 </a:solidFill>
@@ -1443,9 +2070,33 @@
                 <a:cs typeface="Roboto"/>
                 <a:sym typeface="Roboto"/>
               </a:rPr>
-              <a:t>Do explain where people can direct questions or concerns (IETF Executive Director or Ombudsteam).</a:t>
-            </a:r>
-            <a:endParaRPr sz="1200">
+              <a:t>Do explain where people can direct questions or concerns (IETF Executive Director or </a:t>
+            </a:r>
+            <a:r>
+              <a:rPr lang="en-US" sz="1200" dirty="0" err="1">
+                <a:solidFill>
+                  <a:srgbClr val="424242"/>
+                </a:solidFill>
+                <a:latin typeface="Roboto"/>
+                <a:ea typeface="Roboto"/>
+                <a:cs typeface="Roboto"/>
+                <a:sym typeface="Roboto"/>
+              </a:rPr>
+              <a:t>Ombudsteam</a:t>
+            </a:r>
+            <a:r>
+              <a:rPr lang="en-US" sz="1200" dirty="0">
+                <a:solidFill>
+                  <a:srgbClr val="424242"/>
+                </a:solidFill>
+                <a:latin typeface="Roboto"/>
+                <a:ea typeface="Roboto"/>
+                <a:cs typeface="Roboto"/>
+                <a:sym typeface="Roboto"/>
+              </a:rPr>
+              <a:t>).</a:t>
+            </a:r>
+            <a:endParaRPr sz="1200" dirty="0">
               <a:solidFill>
                 <a:srgbClr val="424242"/>
               </a:solidFill>
@@ -1474,7 +2125,7 @@
               <a:buNone/>
             </a:pPr>
             <a:r>
-              <a:rPr lang="en-US" sz="1200">
+              <a:rPr lang="en-US" sz="1200" dirty="0">
                 <a:solidFill>
                   <a:srgbClr val="B33F00"/>
                 </a:solidFill>
@@ -1488,7 +2139,7 @@
               </a:rPr>
               <a:t>DON'T</a:t>
             </a:r>
-            <a:endParaRPr sz="1200">
+            <a:endParaRPr sz="1200" dirty="0">
               <a:solidFill>
                 <a:srgbClr val="B33F00"/>
               </a:solidFill>
@@ -1520,7 +2171,7 @@
               <a:buAutoNum type="arabicPeriod"/>
             </a:pPr>
             <a:r>
-              <a:rPr lang="en-US" sz="1200">
+              <a:rPr lang="en-US" sz="1200" dirty="0">
                 <a:solidFill>
                   <a:srgbClr val="424242"/>
                 </a:solidFill>
@@ -1531,7 +2182,7 @@
               </a:rPr>
               <a:t>Don’t dismiss the importance or relevance of any of the information on the Note Well.</a:t>
             </a:r>
-            <a:endParaRPr sz="1200">
+            <a:endParaRPr sz="1200" dirty="0">
               <a:solidFill>
                 <a:srgbClr val="424242"/>
               </a:solidFill>
@@ -1560,7 +2211,7 @@
               <a:buAutoNum type="arabicPeriod"/>
             </a:pPr>
             <a:r>
-              <a:rPr lang="en-US" sz="1200">
+              <a:rPr lang="en-US" sz="1200" dirty="0">
                 <a:solidFill>
                   <a:srgbClr val="424242"/>
                 </a:solidFill>
@@ -1571,7 +2222,7 @@
               </a:rPr>
               <a:t>Don’t interpret the meaning or get into the substance of any of the topics or content of the policies.</a:t>
             </a:r>
-            <a:endParaRPr sz="1200">
+            <a:endParaRPr sz="1200" dirty="0">
               <a:solidFill>
                 <a:srgbClr val="424242"/>
               </a:solidFill>
@@ -1600,7 +2251,7 @@
               <a:buAutoNum type="arabicPeriod"/>
             </a:pPr>
             <a:r>
-              <a:rPr lang="en-US" sz="1200">
+              <a:rPr lang="en-US" sz="1200" dirty="0">
                 <a:solidFill>
                   <a:srgbClr val="424242"/>
                 </a:solidFill>
@@ -1611,7 +2262,7 @@
               </a:rPr>
               <a:t>Don’t communicate that the Note Well conveys all the information participants need to know.</a:t>
             </a:r>
-            <a:endParaRPr sz="1200">
+            <a:endParaRPr sz="1200" dirty="0">
               <a:solidFill>
                 <a:srgbClr val="424242"/>
               </a:solidFill>
@@ -1640,7 +2291,7 @@
               <a:buAutoNum type="arabicPeriod"/>
             </a:pPr>
             <a:r>
-              <a:rPr lang="en-US" sz="1200">
+              <a:rPr lang="en-US" sz="1200" dirty="0">
                 <a:solidFill>
                   <a:srgbClr val="424242"/>
                 </a:solidFill>
@@ -1651,7 +2302,7 @@
               </a:rPr>
               <a:t>Don’t address questions or concerns in the meeting itself.</a:t>
             </a:r>
-            <a:endParaRPr sz="1200">
+            <a:endParaRPr sz="1200" dirty="0">
               <a:solidFill>
                 <a:srgbClr val="424242"/>
               </a:solidFill>
@@ -1679,7 +2330,7 @@
               <a:buFont typeface="Arial"/>
               <a:buNone/>
             </a:pPr>
-            <a:endParaRPr sz="1200">
+            <a:endParaRPr sz="1200" dirty="0">
               <a:solidFill>
                 <a:srgbClr val="424242"/>
               </a:solidFill>
@@ -1699,7 +2350,7 @@
               </a:spcAft>
               <a:buNone/>
             </a:pPr>
-            <a:endParaRPr/>
+            <a:endParaRPr dirty="0"/>
           </a:p>
         </p:txBody>
       </p:sp>
@@ -1716,7 +2367,7 @@
 </p:notes>
 </file>
 
-<file path=ppt/notesSlides/notesSlide11.xml><?xml version="1.0" encoding="utf-8"?>
+<file path=ppt/notesSlides/notesSlide14.xml><?xml version="1.0" encoding="utf-8"?>
 <p:notes xmlns:a="http://schemas.openxmlformats.org/drawingml/2006/main" xmlns:r="http://schemas.openxmlformats.org/officeDocument/2006/relationships" xmlns:p="http://schemas.openxmlformats.org/presentationml/2006/main" showMasterSp="0" showMasterPhAnim="0">
   <p:cSld>
     <p:spTree>
@@ -2886,7 +3537,7 @@
               <a:buNone/>
             </a:pPr>
             <a:r>
-              <a:rPr lang="en-US" sz="1200">
+              <a:rPr lang="en-US" sz="1200" dirty="0">
                 <a:solidFill>
                   <a:srgbClr val="424242"/>
                 </a:solidFill>
@@ -2901,7 +3552,7 @@
               <a:t>The IETF Note Well should be shown at the start of every IETF working session. The guidance below is </a:t>
             </a:r>
             <a:r>
-              <a:rPr lang="en-US" sz="1200" u="sng">
+              <a:rPr lang="en-US" sz="1200" u="sng" dirty="0">
                 <a:solidFill>
                   <a:srgbClr val="1976D2"/>
                 </a:solidFill>
@@ -2919,7 +3570,7 @@
               </a:rPr>
               <a:t>adapted from IETF legal counsel presentation during IETF 120</a:t>
             </a:r>
-            <a:endParaRPr sz="1200">
+            <a:endParaRPr sz="1200" dirty="0">
               <a:solidFill>
                 <a:srgbClr val="1B5E20"/>
               </a:solidFill>
@@ -2945,7 +3596,7 @@
               </a:spcAft>
               <a:buNone/>
             </a:pPr>
-            <a:endParaRPr sz="1200">
+            <a:endParaRPr sz="1200" dirty="0">
               <a:solidFill>
                 <a:srgbClr val="1B5E20"/>
               </a:solidFill>
@@ -2977,7 +3628,7 @@
               <a:buNone/>
             </a:pPr>
             <a:r>
-              <a:rPr lang="en-US" sz="1200">
+              <a:rPr lang="en-US" sz="1200" dirty="0">
                 <a:solidFill>
                   <a:srgbClr val="1B5E20"/>
                 </a:solidFill>
@@ -2991,7 +3642,7 @@
               </a:rPr>
               <a:t>DO</a:t>
             </a:r>
-            <a:endParaRPr sz="1200">
+            <a:endParaRPr sz="1200" dirty="0">
               <a:solidFill>
                 <a:srgbClr val="1B5E20"/>
               </a:solidFill>
@@ -3023,7 +3674,7 @@
               <a:buAutoNum type="arabicPeriod"/>
             </a:pPr>
             <a:r>
-              <a:rPr lang="en-US" sz="1200">
+              <a:rPr lang="en-US" sz="1200" dirty="0">
                 <a:solidFill>
                   <a:srgbClr val="424242"/>
                 </a:solidFill>
@@ -3034,7 +3685,7 @@
               </a:rPr>
               <a:t>Do make sure people have enough time to read through the slide before you move on,</a:t>
             </a:r>
-            <a:endParaRPr sz="1200">
+            <a:endParaRPr sz="1200" dirty="0">
               <a:solidFill>
                 <a:srgbClr val="424242"/>
               </a:solidFill>
@@ -3063,7 +3714,7 @@
               <a:buAutoNum type="arabicPeriod"/>
             </a:pPr>
             <a:r>
-              <a:rPr lang="en-US" sz="1200">
+              <a:rPr lang="en-US" sz="1200" dirty="0">
                 <a:solidFill>
                   <a:srgbClr val="424242"/>
                 </a:solidFill>
@@ -3074,7 +3725,7 @@
               </a:rPr>
               <a:t>Do give a high-level summary of what’s covered in the Note Well: “IETF policies on conduct, privacy and IPR.”,</a:t>
             </a:r>
-            <a:endParaRPr sz="1200">
+            <a:endParaRPr sz="1200" dirty="0">
               <a:solidFill>
                 <a:srgbClr val="424242"/>
               </a:solidFill>
@@ -3103,7 +3754,7 @@
               <a:buAutoNum type="arabicPeriod"/>
             </a:pPr>
             <a:r>
-              <a:rPr lang="en-US" sz="1200">
+              <a:rPr lang="en-US" sz="1200" dirty="0">
                 <a:solidFill>
                   <a:srgbClr val="424242"/>
                 </a:solidFill>
@@ -3114,7 +3765,7 @@
               </a:rPr>
               <a:t>Do encourage people to read through all the linked policies &amp; documents in detail before participating or contributing,</a:t>
             </a:r>
-            <a:endParaRPr sz="1200">
+            <a:endParaRPr sz="1200" dirty="0">
               <a:solidFill>
                 <a:srgbClr val="424242"/>
               </a:solidFill>
@@ -3143,7 +3794,7 @@
               <a:buAutoNum type="arabicPeriod"/>
             </a:pPr>
             <a:r>
-              <a:rPr lang="en-US" sz="1200">
+              <a:rPr lang="en-US" sz="1200" dirty="0">
                 <a:solidFill>
                   <a:srgbClr val="424242"/>
                 </a:solidFill>
@@ -3152,9 +3803,33 @@
                 <a:cs typeface="Roboto"/>
                 <a:sym typeface="Roboto"/>
               </a:rPr>
-              <a:t>Do explain where people can direct questions or concerns (IETF Executive Director or Ombudsteam).</a:t>
-            </a:r>
-            <a:endParaRPr sz="1200">
+              <a:t>Do explain where people can direct questions or concerns (IETF Executive Director or </a:t>
+            </a:r>
+            <a:r>
+              <a:rPr lang="en-US" sz="1200" dirty="0" err="1">
+                <a:solidFill>
+                  <a:srgbClr val="424242"/>
+                </a:solidFill>
+                <a:latin typeface="Roboto"/>
+                <a:ea typeface="Roboto"/>
+                <a:cs typeface="Roboto"/>
+                <a:sym typeface="Roboto"/>
+              </a:rPr>
+              <a:t>Ombudsteam</a:t>
+            </a:r>
+            <a:r>
+              <a:rPr lang="en-US" sz="1200" dirty="0">
+                <a:solidFill>
+                  <a:srgbClr val="424242"/>
+                </a:solidFill>
+                <a:latin typeface="Roboto"/>
+                <a:ea typeface="Roboto"/>
+                <a:cs typeface="Roboto"/>
+                <a:sym typeface="Roboto"/>
+              </a:rPr>
+              <a:t>).</a:t>
+            </a:r>
+            <a:endParaRPr sz="1200" dirty="0">
               <a:solidFill>
                 <a:srgbClr val="424242"/>
               </a:solidFill>
@@ -3183,7 +3858,7 @@
               <a:buNone/>
             </a:pPr>
             <a:r>
-              <a:rPr lang="en-US" sz="1200">
+              <a:rPr lang="en-US" sz="1200" dirty="0">
                 <a:solidFill>
                   <a:srgbClr val="B33F00"/>
                 </a:solidFill>
@@ -3197,7 +3872,7 @@
               </a:rPr>
               <a:t>DON'T</a:t>
             </a:r>
-            <a:endParaRPr sz="1200">
+            <a:endParaRPr sz="1200" dirty="0">
               <a:solidFill>
                 <a:srgbClr val="B33F00"/>
               </a:solidFill>
@@ -3229,7 +3904,7 @@
               <a:buAutoNum type="arabicPeriod"/>
             </a:pPr>
             <a:r>
-              <a:rPr lang="en-US" sz="1200">
+              <a:rPr lang="en-US" sz="1200" dirty="0">
                 <a:solidFill>
                   <a:srgbClr val="424242"/>
                 </a:solidFill>
@@ -3240,7 +3915,7 @@
               </a:rPr>
               <a:t>Don’t dismiss the importance or relevance of any of the information on the Note Well.</a:t>
             </a:r>
-            <a:endParaRPr sz="1200">
+            <a:endParaRPr sz="1200" dirty="0">
               <a:solidFill>
                 <a:srgbClr val="424242"/>
               </a:solidFill>
@@ -3269,7 +3944,7 @@
               <a:buAutoNum type="arabicPeriod"/>
             </a:pPr>
             <a:r>
-              <a:rPr lang="en-US" sz="1200">
+              <a:rPr lang="en-US" sz="1200" dirty="0">
                 <a:solidFill>
                   <a:srgbClr val="424242"/>
                 </a:solidFill>
@@ -3280,7 +3955,7 @@
               </a:rPr>
               <a:t>Don’t interpret the meaning or get into the substance of any of the topics or content of the policies.</a:t>
             </a:r>
-            <a:endParaRPr sz="1200">
+            <a:endParaRPr sz="1200" dirty="0">
               <a:solidFill>
                 <a:srgbClr val="424242"/>
               </a:solidFill>
@@ -3309,7 +3984,7 @@
               <a:buAutoNum type="arabicPeriod"/>
             </a:pPr>
             <a:r>
-              <a:rPr lang="en-US" sz="1200">
+              <a:rPr lang="en-US" sz="1200" dirty="0">
                 <a:solidFill>
                   <a:srgbClr val="424242"/>
                 </a:solidFill>
@@ -3320,7 +3995,7 @@
               </a:rPr>
               <a:t>Don’t communicate that the Note Well conveys all the information participants need to know.</a:t>
             </a:r>
-            <a:endParaRPr sz="1200">
+            <a:endParaRPr sz="1200" dirty="0">
               <a:solidFill>
                 <a:srgbClr val="424242"/>
               </a:solidFill>
@@ -3349,7 +4024,7 @@
               <a:buAutoNum type="arabicPeriod"/>
             </a:pPr>
             <a:r>
-              <a:rPr lang="en-US" sz="1200">
+              <a:rPr lang="en-US" sz="1200" dirty="0">
                 <a:solidFill>
                   <a:srgbClr val="424242"/>
                 </a:solidFill>
@@ -3360,7 +4035,7 @@
               </a:rPr>
               <a:t>Don’t address questions or concerns in the meeting itself.</a:t>
             </a:r>
-            <a:endParaRPr sz="1200">
+            <a:endParaRPr sz="1200" dirty="0">
               <a:solidFill>
                 <a:srgbClr val="424242"/>
               </a:solidFill>
@@ -3388,7 +4063,7 @@
               <a:buFont typeface="Arial"/>
               <a:buNone/>
             </a:pPr>
-            <a:endParaRPr sz="1200">
+            <a:endParaRPr sz="1200" dirty="0">
               <a:solidFill>
                 <a:srgbClr val="424242"/>
               </a:solidFill>
@@ -3408,7 +4083,7 @@
               </a:spcAft>
               <a:buNone/>
             </a:pPr>
-            <a:endParaRPr/>
+            <a:endParaRPr dirty="0"/>
           </a:p>
         </p:txBody>
       </p:sp>
@@ -3433,7 +4108,7 @@
         <p:cNvPr id="1" name="Shape 65">
           <a:extLst>
             <a:ext uri="{FF2B5EF4-FFF2-40B4-BE49-F238E27FC236}">
-              <a16:creationId xmlns:a16="http://schemas.microsoft.com/office/drawing/2014/main" id="{1CCA91F2-C8BC-2B48-CF08-6EBC486FFB1C}"/>
+              <a16:creationId xmlns:a16="http://schemas.microsoft.com/office/drawing/2014/main" id="{35BCB85C-91D3-87EF-C410-81685A173F7A}"/>
             </a:ext>
           </a:extLst>
         </p:cNvPr>
@@ -3453,7 +4128,7 @@
           <p:cNvPr id="66" name="Google Shape;66;g7179d949db_7_60:notes">
             <a:extLst>
               <a:ext uri="{FF2B5EF4-FFF2-40B4-BE49-F238E27FC236}">
-                <a16:creationId xmlns:a16="http://schemas.microsoft.com/office/drawing/2014/main" id="{F14264FF-CC51-9F3E-2958-38589B174310}"/>
+                <a16:creationId xmlns:a16="http://schemas.microsoft.com/office/drawing/2014/main" id="{5796B391-3E9A-86F4-62B6-681599F81973}"/>
               </a:ext>
             </a:extLst>
           </p:cNvPr>
@@ -3510,7 +4185,7 @@
           <p:cNvPr id="67" name="Google Shape;67;g7179d949db_7_60:notes">
             <a:extLst>
               <a:ext uri="{FF2B5EF4-FFF2-40B4-BE49-F238E27FC236}">
-                <a16:creationId xmlns:a16="http://schemas.microsoft.com/office/drawing/2014/main" id="{EFCE72B6-2F25-ADE3-88C1-5CA6B5B046B2}"/>
+                <a16:creationId xmlns:a16="http://schemas.microsoft.com/office/drawing/2014/main" id="{70EE440D-415C-E84F-DBAB-189B46D68102}"/>
               </a:ext>
             </a:extLst>
           </p:cNvPr>
@@ -3553,7 +4228,7 @@
               <a:buNone/>
             </a:pPr>
             <a:r>
-              <a:rPr lang="en-US" sz="1200">
+              <a:rPr lang="en-US" sz="1200" dirty="0">
                 <a:solidFill>
                   <a:srgbClr val="424242"/>
                 </a:solidFill>
@@ -3568,7 +4243,7 @@
               <a:t>The IETF Note Well should be shown at the start of every IETF working session. The guidance below is </a:t>
             </a:r>
             <a:r>
-              <a:rPr lang="en-US" sz="1200" u="sng">
+              <a:rPr lang="en-US" sz="1200" u="sng" dirty="0">
                 <a:solidFill>
                   <a:srgbClr val="1976D2"/>
                 </a:solidFill>
@@ -3586,7 +4261,7 @@
               </a:rPr>
               <a:t>adapted from IETF legal counsel presentation during IETF 120</a:t>
             </a:r>
-            <a:endParaRPr sz="1200">
+            <a:endParaRPr sz="1200" dirty="0">
               <a:solidFill>
                 <a:srgbClr val="1B5E20"/>
               </a:solidFill>
@@ -3612,7 +4287,7 @@
               </a:spcAft>
               <a:buNone/>
             </a:pPr>
-            <a:endParaRPr sz="1200">
+            <a:endParaRPr sz="1200" dirty="0">
               <a:solidFill>
                 <a:srgbClr val="1B5E20"/>
               </a:solidFill>
@@ -3644,7 +4319,7 @@
               <a:buNone/>
             </a:pPr>
             <a:r>
-              <a:rPr lang="en-US" sz="1200">
+              <a:rPr lang="en-US" sz="1200" dirty="0">
                 <a:solidFill>
                   <a:srgbClr val="1B5E20"/>
                 </a:solidFill>
@@ -3658,7 +4333,7 @@
               </a:rPr>
               <a:t>DO</a:t>
             </a:r>
-            <a:endParaRPr sz="1200">
+            <a:endParaRPr sz="1200" dirty="0">
               <a:solidFill>
                 <a:srgbClr val="1B5E20"/>
               </a:solidFill>
@@ -3690,7 +4365,7 @@
               <a:buAutoNum type="arabicPeriod"/>
             </a:pPr>
             <a:r>
-              <a:rPr lang="en-US" sz="1200">
+              <a:rPr lang="en-US" sz="1200" dirty="0">
                 <a:solidFill>
                   <a:srgbClr val="424242"/>
                 </a:solidFill>
@@ -3701,7 +4376,7 @@
               </a:rPr>
               <a:t>Do make sure people have enough time to read through the slide before you move on,</a:t>
             </a:r>
-            <a:endParaRPr sz="1200">
+            <a:endParaRPr sz="1200" dirty="0">
               <a:solidFill>
                 <a:srgbClr val="424242"/>
               </a:solidFill>
@@ -3730,7 +4405,7 @@
               <a:buAutoNum type="arabicPeriod"/>
             </a:pPr>
             <a:r>
-              <a:rPr lang="en-US" sz="1200">
+              <a:rPr lang="en-US" sz="1200" dirty="0">
                 <a:solidFill>
                   <a:srgbClr val="424242"/>
                 </a:solidFill>
@@ -3741,7 +4416,7 @@
               </a:rPr>
               <a:t>Do give a high-level summary of what’s covered in the Note Well: “IETF policies on conduct, privacy and IPR.”,</a:t>
             </a:r>
-            <a:endParaRPr sz="1200">
+            <a:endParaRPr sz="1200" dirty="0">
               <a:solidFill>
                 <a:srgbClr val="424242"/>
               </a:solidFill>
@@ -3770,7 +4445,7 @@
               <a:buAutoNum type="arabicPeriod"/>
             </a:pPr>
             <a:r>
-              <a:rPr lang="en-US" sz="1200">
+              <a:rPr lang="en-US" sz="1200" dirty="0">
                 <a:solidFill>
                   <a:srgbClr val="424242"/>
                 </a:solidFill>
@@ -3781,7 +4456,7 @@
               </a:rPr>
               <a:t>Do encourage people to read through all the linked policies &amp; documents in detail before participating or contributing,</a:t>
             </a:r>
-            <a:endParaRPr sz="1200">
+            <a:endParaRPr sz="1200" dirty="0">
               <a:solidFill>
                 <a:srgbClr val="424242"/>
               </a:solidFill>
@@ -3810,7 +4485,7 @@
               <a:buAutoNum type="arabicPeriod"/>
             </a:pPr>
             <a:r>
-              <a:rPr lang="en-US" sz="1200">
+              <a:rPr lang="en-US" sz="1200" dirty="0">
                 <a:solidFill>
                   <a:srgbClr val="424242"/>
                 </a:solidFill>
@@ -3819,9 +4494,33 @@
                 <a:cs typeface="Roboto"/>
                 <a:sym typeface="Roboto"/>
               </a:rPr>
-              <a:t>Do explain where people can direct questions or concerns (IETF Executive Director or Ombudsteam).</a:t>
-            </a:r>
-            <a:endParaRPr sz="1200">
+              <a:t>Do explain where people can direct questions or concerns (IETF Executive Director or </a:t>
+            </a:r>
+            <a:r>
+              <a:rPr lang="en-US" sz="1200" dirty="0" err="1">
+                <a:solidFill>
+                  <a:srgbClr val="424242"/>
+                </a:solidFill>
+                <a:latin typeface="Roboto"/>
+                <a:ea typeface="Roboto"/>
+                <a:cs typeface="Roboto"/>
+                <a:sym typeface="Roboto"/>
+              </a:rPr>
+              <a:t>Ombudsteam</a:t>
+            </a:r>
+            <a:r>
+              <a:rPr lang="en-US" sz="1200" dirty="0">
+                <a:solidFill>
+                  <a:srgbClr val="424242"/>
+                </a:solidFill>
+                <a:latin typeface="Roboto"/>
+                <a:ea typeface="Roboto"/>
+                <a:cs typeface="Roboto"/>
+                <a:sym typeface="Roboto"/>
+              </a:rPr>
+              <a:t>).</a:t>
+            </a:r>
+            <a:endParaRPr sz="1200" dirty="0">
               <a:solidFill>
                 <a:srgbClr val="424242"/>
               </a:solidFill>
@@ -3850,7 +4549,7 @@
               <a:buNone/>
             </a:pPr>
             <a:r>
-              <a:rPr lang="en-US" sz="1200">
+              <a:rPr lang="en-US" sz="1200" dirty="0">
                 <a:solidFill>
                   <a:srgbClr val="B33F00"/>
                 </a:solidFill>
@@ -3864,7 +4563,7 @@
               </a:rPr>
               <a:t>DON'T</a:t>
             </a:r>
-            <a:endParaRPr sz="1200">
+            <a:endParaRPr sz="1200" dirty="0">
               <a:solidFill>
                 <a:srgbClr val="B33F00"/>
               </a:solidFill>
@@ -3896,7 +4595,7 @@
               <a:buAutoNum type="arabicPeriod"/>
             </a:pPr>
             <a:r>
-              <a:rPr lang="en-US" sz="1200">
+              <a:rPr lang="en-US" sz="1200" dirty="0">
                 <a:solidFill>
                   <a:srgbClr val="424242"/>
                 </a:solidFill>
@@ -3907,7 +4606,7 @@
               </a:rPr>
               <a:t>Don’t dismiss the importance or relevance of any of the information on the Note Well.</a:t>
             </a:r>
-            <a:endParaRPr sz="1200">
+            <a:endParaRPr sz="1200" dirty="0">
               <a:solidFill>
                 <a:srgbClr val="424242"/>
               </a:solidFill>
@@ -3936,7 +4635,7 @@
               <a:buAutoNum type="arabicPeriod"/>
             </a:pPr>
             <a:r>
-              <a:rPr lang="en-US" sz="1200">
+              <a:rPr lang="en-US" sz="1200" dirty="0">
                 <a:solidFill>
                   <a:srgbClr val="424242"/>
                 </a:solidFill>
@@ -3947,7 +4646,7 @@
               </a:rPr>
               <a:t>Don’t interpret the meaning or get into the substance of any of the topics or content of the policies.</a:t>
             </a:r>
-            <a:endParaRPr sz="1200">
+            <a:endParaRPr sz="1200" dirty="0">
               <a:solidFill>
                 <a:srgbClr val="424242"/>
               </a:solidFill>
@@ -3976,7 +4675,7 @@
               <a:buAutoNum type="arabicPeriod"/>
             </a:pPr>
             <a:r>
-              <a:rPr lang="en-US" sz="1200">
+              <a:rPr lang="en-US" sz="1200" dirty="0">
                 <a:solidFill>
                   <a:srgbClr val="424242"/>
                 </a:solidFill>
@@ -3987,7 +4686,7 @@
               </a:rPr>
               <a:t>Don’t communicate that the Note Well conveys all the information participants need to know.</a:t>
             </a:r>
-            <a:endParaRPr sz="1200">
+            <a:endParaRPr sz="1200" dirty="0">
               <a:solidFill>
                 <a:srgbClr val="424242"/>
               </a:solidFill>
@@ -4016,7 +4715,7 @@
               <a:buAutoNum type="arabicPeriod"/>
             </a:pPr>
             <a:r>
-              <a:rPr lang="en-US" sz="1200">
+              <a:rPr lang="en-US" sz="1200" dirty="0">
                 <a:solidFill>
                   <a:srgbClr val="424242"/>
                 </a:solidFill>
@@ -4027,7 +4726,7 @@
               </a:rPr>
               <a:t>Don’t address questions or concerns in the meeting itself.</a:t>
             </a:r>
-            <a:endParaRPr sz="1200">
+            <a:endParaRPr sz="1200" dirty="0">
               <a:solidFill>
                 <a:srgbClr val="424242"/>
               </a:solidFill>
@@ -4055,7 +4754,7 @@
               <a:buFont typeface="Arial"/>
               <a:buNone/>
             </a:pPr>
-            <a:endParaRPr sz="1200">
+            <a:endParaRPr sz="1200" dirty="0">
               <a:solidFill>
                 <a:srgbClr val="424242"/>
               </a:solidFill>
@@ -4075,14 +4774,14 @@
               </a:spcAft>
               <a:buNone/>
             </a:pPr>
-            <a:endParaRPr/>
+            <a:endParaRPr dirty="0"/>
           </a:p>
         </p:txBody>
       </p:sp>
     </p:spTree>
     <p:extLst>
       <p:ext uri="{BB962C8B-B14F-4D97-AF65-F5344CB8AC3E}">
-        <p14:creationId xmlns:p14="http://schemas.microsoft.com/office/powerpoint/2010/main" val="3565868096"/>
+        <p14:creationId xmlns:p14="http://schemas.microsoft.com/office/powerpoint/2010/main" val="3362787770"/>
       </p:ext>
     </p:extLst>
   </p:cSld>
@@ -4208,9 +4907,6 @@
           <a:lstStyle/>
           <a:p>
             <a:pPr marL="0" lvl="0" indent="0" algn="l" rtl="0">
-              <a:lnSpc>
-                <a:spcPct val="115000"/>
-              </a:lnSpc>
               <a:spcBef>
                 <a:spcPts val="0"/>
               </a:spcBef>
@@ -4220,529 +4916,10 @@
               <a:buNone/>
             </a:pPr>
             <a:r>
-              <a:rPr lang="en-US" sz="1200">
-                <a:solidFill>
-                  <a:srgbClr val="424242"/>
-                </a:solidFill>
-                <a:highlight>
-                  <a:srgbClr val="FFFFFF"/>
-                </a:highlight>
-                <a:latin typeface="Roboto"/>
-                <a:ea typeface="Roboto"/>
-                <a:cs typeface="Roboto"/>
-                <a:sym typeface="Roboto"/>
-              </a:rPr>
-              <a:t>The IETF Note Well should be shown at the start of every IETF working session. The guidance below is </a:t>
-            </a:r>
-            <a:r>
-              <a:rPr lang="en-US" sz="1200" u="sng">
-                <a:solidFill>
-                  <a:srgbClr val="1976D2"/>
-                </a:solidFill>
-                <a:latin typeface="Roboto"/>
-                <a:ea typeface="Roboto"/>
-                <a:cs typeface="Roboto"/>
-                <a:sym typeface="Roboto"/>
-                <a:hlinkClick r:id="rId3">
-                  <a:extLst>
-                    <a:ext uri="{A12FA001-AC4F-418D-AE19-62706E023703}">
-                      <ahyp:hlinkClr xmlns:ahyp="http://schemas.microsoft.com/office/drawing/2018/hyperlinkcolor" val="tx"/>
-                    </a:ext>
-                  </a:extLst>
-                </a:hlinkClick>
-              </a:rPr>
-              <a:t>adapted from IETF legal counsel presentation during IETF 120</a:t>
-            </a:r>
-            <a:endParaRPr sz="1200">
-              <a:solidFill>
-                <a:srgbClr val="1B5E20"/>
-              </a:solidFill>
-              <a:highlight>
-                <a:srgbClr val="E8F5E9"/>
-              </a:highlight>
-              <a:latin typeface="Roboto"/>
-              <a:ea typeface="Roboto"/>
-              <a:cs typeface="Roboto"/>
-              <a:sym typeface="Roboto"/>
-            </a:endParaRPr>
-          </a:p>
-          <a:p>
-            <a:pPr marL="0" lvl="0" indent="0" algn="l" rtl="0">
-              <a:lnSpc>
-                <a:spcPct val="115000"/>
-              </a:lnSpc>
-              <a:spcBef>
-                <a:spcPts val="0"/>
-              </a:spcBef>
-              <a:spcAft>
-                <a:spcPts val="0"/>
-              </a:spcAft>
-              <a:buNone/>
-            </a:pPr>
-            <a:endParaRPr sz="1200">
-              <a:solidFill>
-                <a:srgbClr val="1B5E20"/>
-              </a:solidFill>
-              <a:highlight>
-                <a:srgbClr val="E8F5E9"/>
-              </a:highlight>
-              <a:latin typeface="Roboto"/>
-              <a:ea typeface="Roboto"/>
-              <a:cs typeface="Roboto"/>
-              <a:sym typeface="Roboto"/>
-            </a:endParaRPr>
-          </a:p>
-          <a:p>
-            <a:pPr marL="0" lvl="0" indent="0" algn="l" rtl="0">
-              <a:lnSpc>
-                <a:spcPct val="115000"/>
-              </a:lnSpc>
-              <a:spcBef>
-                <a:spcPts val="0"/>
-              </a:spcBef>
-              <a:spcAft>
-                <a:spcPts val="0"/>
-              </a:spcAft>
-              <a:buClr>
-                <a:schemeClr val="dk1"/>
-              </a:buClr>
-              <a:buSzPts val="1100"/>
-              <a:buFont typeface="Arial"/>
-              <a:buNone/>
-            </a:pPr>
-            <a:r>
-              <a:rPr lang="en-US" sz="1200">
-                <a:solidFill>
-                  <a:srgbClr val="1B5E20"/>
-                </a:solidFill>
-                <a:highlight>
-                  <a:srgbClr val="E8F5E9"/>
-                </a:highlight>
-                <a:latin typeface="Roboto"/>
-                <a:ea typeface="Roboto"/>
-                <a:cs typeface="Roboto"/>
-                <a:sym typeface="Roboto"/>
-              </a:rPr>
-              <a:t>DO</a:t>
-            </a:r>
-            <a:endParaRPr sz="1200">
-              <a:solidFill>
-                <a:srgbClr val="1B5E20"/>
-              </a:solidFill>
-              <a:highlight>
-                <a:srgbClr val="E8F5E9"/>
-              </a:highlight>
-              <a:latin typeface="Roboto"/>
-              <a:ea typeface="Roboto"/>
-              <a:cs typeface="Roboto"/>
-              <a:sym typeface="Roboto"/>
-            </a:endParaRPr>
-          </a:p>
-          <a:p>
-            <a:pPr marL="457200" lvl="0" indent="-304800" algn="l" rtl="0">
-              <a:lnSpc>
-                <a:spcPct val="115000"/>
-              </a:lnSpc>
-              <a:spcBef>
-                <a:spcPts val="0"/>
-              </a:spcBef>
-              <a:spcAft>
-                <a:spcPts val="0"/>
-              </a:spcAft>
-              <a:buClr>
-                <a:srgbClr val="424242"/>
-              </a:buClr>
-              <a:buSzPts val="1200"/>
-              <a:buFont typeface="Roboto"/>
-              <a:buAutoNum type="arabicPeriod"/>
-            </a:pPr>
-            <a:r>
-              <a:rPr lang="en-US" sz="1200">
-                <a:solidFill>
-                  <a:srgbClr val="424242"/>
-                </a:solidFill>
-                <a:latin typeface="Roboto"/>
-                <a:ea typeface="Roboto"/>
-                <a:cs typeface="Roboto"/>
-                <a:sym typeface="Roboto"/>
-              </a:rPr>
-              <a:t>Do make sure people have enough time to read through the slide before you move on,</a:t>
-            </a:r>
-            <a:endParaRPr sz="1200">
-              <a:solidFill>
-                <a:srgbClr val="424242"/>
-              </a:solidFill>
-              <a:latin typeface="Roboto"/>
-              <a:ea typeface="Roboto"/>
-              <a:cs typeface="Roboto"/>
-              <a:sym typeface="Roboto"/>
-            </a:endParaRPr>
-          </a:p>
-          <a:p>
-            <a:pPr marL="457200" lvl="0" indent="-304800" algn="l" rtl="0">
-              <a:lnSpc>
-                <a:spcPct val="115000"/>
-              </a:lnSpc>
-              <a:spcBef>
-                <a:spcPts val="0"/>
-              </a:spcBef>
-              <a:spcAft>
-                <a:spcPts val="0"/>
-              </a:spcAft>
-              <a:buClr>
-                <a:srgbClr val="424242"/>
-              </a:buClr>
-              <a:buSzPts val="1200"/>
-              <a:buFont typeface="Roboto"/>
-              <a:buAutoNum type="arabicPeriod"/>
-            </a:pPr>
-            <a:r>
-              <a:rPr lang="en-US" sz="1200">
-                <a:solidFill>
-                  <a:srgbClr val="424242"/>
-                </a:solidFill>
-                <a:latin typeface="Roboto"/>
-                <a:ea typeface="Roboto"/>
-                <a:cs typeface="Roboto"/>
-                <a:sym typeface="Roboto"/>
-              </a:rPr>
-              <a:t>Do give a high-level summary of what’s covered in the Note Well: “IETF policies on conduct, privacy and IPR.”,</a:t>
-            </a:r>
-            <a:endParaRPr sz="1200">
-              <a:solidFill>
-                <a:srgbClr val="424242"/>
-              </a:solidFill>
-              <a:latin typeface="Roboto"/>
-              <a:ea typeface="Roboto"/>
-              <a:cs typeface="Roboto"/>
-              <a:sym typeface="Roboto"/>
-            </a:endParaRPr>
-          </a:p>
-          <a:p>
-            <a:pPr marL="457200" lvl="0" indent="-304800" algn="l" rtl="0">
-              <a:lnSpc>
-                <a:spcPct val="115000"/>
-              </a:lnSpc>
-              <a:spcBef>
-                <a:spcPts val="0"/>
-              </a:spcBef>
-              <a:spcAft>
-                <a:spcPts val="0"/>
-              </a:spcAft>
-              <a:buClr>
-                <a:srgbClr val="424242"/>
-              </a:buClr>
-              <a:buSzPts val="1200"/>
-              <a:buFont typeface="Roboto"/>
-              <a:buAutoNum type="arabicPeriod"/>
-            </a:pPr>
-            <a:r>
-              <a:rPr lang="en-US" sz="1200">
-                <a:solidFill>
-                  <a:srgbClr val="424242"/>
-                </a:solidFill>
-                <a:latin typeface="Roboto"/>
-                <a:ea typeface="Roboto"/>
-                <a:cs typeface="Roboto"/>
-                <a:sym typeface="Roboto"/>
-              </a:rPr>
-              <a:t>Do encourage people to read through all the linked policies &amp; documents in detail before participating or contributing,</a:t>
-            </a:r>
-            <a:endParaRPr sz="1200">
-              <a:solidFill>
-                <a:srgbClr val="424242"/>
-              </a:solidFill>
-              <a:latin typeface="Roboto"/>
-              <a:ea typeface="Roboto"/>
-              <a:cs typeface="Roboto"/>
-              <a:sym typeface="Roboto"/>
-            </a:endParaRPr>
-          </a:p>
-          <a:p>
-            <a:pPr marL="457200" lvl="0" indent="-304800" algn="l" rtl="0">
-              <a:lnSpc>
-                <a:spcPct val="115000"/>
-              </a:lnSpc>
-              <a:spcBef>
-                <a:spcPts val="0"/>
-              </a:spcBef>
-              <a:spcAft>
-                <a:spcPts val="0"/>
-              </a:spcAft>
-              <a:buClr>
-                <a:srgbClr val="424242"/>
-              </a:buClr>
-              <a:buSzPts val="1200"/>
-              <a:buFont typeface="Roboto"/>
-              <a:buAutoNum type="arabicPeriod"/>
-            </a:pPr>
-            <a:r>
-              <a:rPr lang="en-US" sz="1200">
-                <a:solidFill>
-                  <a:srgbClr val="424242"/>
-                </a:solidFill>
-                <a:latin typeface="Roboto"/>
-                <a:ea typeface="Roboto"/>
-                <a:cs typeface="Roboto"/>
-                <a:sym typeface="Roboto"/>
-              </a:rPr>
-              <a:t>Do explain where people can direct questions or concerns (IETF Executive Director or Ombudsteam).</a:t>
-            </a:r>
-            <a:endParaRPr sz="1200">
-              <a:solidFill>
-                <a:srgbClr val="424242"/>
-              </a:solidFill>
-              <a:latin typeface="Roboto"/>
-              <a:ea typeface="Roboto"/>
-              <a:cs typeface="Roboto"/>
-              <a:sym typeface="Roboto"/>
-            </a:endParaRPr>
-          </a:p>
-          <a:p>
-            <a:pPr marL="0" lvl="0" indent="0" algn="l" rtl="0">
-              <a:lnSpc>
-                <a:spcPct val="115000"/>
-              </a:lnSpc>
-              <a:spcBef>
-                <a:spcPts val="0"/>
-              </a:spcBef>
-              <a:spcAft>
-                <a:spcPts val="0"/>
-              </a:spcAft>
-              <a:buClr>
-                <a:schemeClr val="dk1"/>
-              </a:buClr>
-              <a:buSzPts val="1100"/>
-              <a:buFont typeface="Arial"/>
-              <a:buNone/>
-            </a:pPr>
-            <a:r>
-              <a:rPr lang="en-US" sz="1200">
-                <a:solidFill>
-                  <a:srgbClr val="B33F00"/>
-                </a:solidFill>
-                <a:highlight>
-                  <a:srgbClr val="FFF3E0"/>
-                </a:highlight>
-                <a:latin typeface="Roboto"/>
-                <a:ea typeface="Roboto"/>
-                <a:cs typeface="Roboto"/>
-                <a:sym typeface="Roboto"/>
-              </a:rPr>
-              <a:t>DON'T</a:t>
-            </a:r>
-            <a:endParaRPr sz="1200">
-              <a:solidFill>
-                <a:srgbClr val="B33F00"/>
-              </a:solidFill>
-              <a:highlight>
-                <a:srgbClr val="FFF3E0"/>
-              </a:highlight>
-              <a:latin typeface="Roboto"/>
-              <a:ea typeface="Roboto"/>
-              <a:cs typeface="Roboto"/>
-              <a:sym typeface="Roboto"/>
-            </a:endParaRPr>
-          </a:p>
-          <a:p>
-            <a:pPr marL="457200" lvl="0" indent="-304800" algn="l" rtl="0">
-              <a:lnSpc>
-                <a:spcPct val="115000"/>
-              </a:lnSpc>
-              <a:spcBef>
-                <a:spcPts val="0"/>
-              </a:spcBef>
-              <a:spcAft>
-                <a:spcPts val="0"/>
-              </a:spcAft>
-              <a:buClr>
-                <a:srgbClr val="424242"/>
-              </a:buClr>
-              <a:buSzPts val="1200"/>
-              <a:buFont typeface="Roboto"/>
-              <a:buAutoNum type="arabicPeriod"/>
-            </a:pPr>
-            <a:r>
-              <a:rPr lang="en-US" sz="1200">
-                <a:solidFill>
-                  <a:srgbClr val="424242"/>
-                </a:solidFill>
-                <a:latin typeface="Roboto"/>
-                <a:ea typeface="Roboto"/>
-                <a:cs typeface="Roboto"/>
-                <a:sym typeface="Roboto"/>
-              </a:rPr>
-              <a:t>Don’t dismiss the importance or relevance of any of the information on the Note Well.</a:t>
-            </a:r>
-            <a:endParaRPr sz="1200">
-              <a:solidFill>
-                <a:srgbClr val="424242"/>
-              </a:solidFill>
-              <a:latin typeface="Roboto"/>
-              <a:ea typeface="Roboto"/>
-              <a:cs typeface="Roboto"/>
-              <a:sym typeface="Roboto"/>
-            </a:endParaRPr>
-          </a:p>
-          <a:p>
-            <a:pPr marL="457200" lvl="0" indent="-304800" algn="l" rtl="0">
-              <a:lnSpc>
-                <a:spcPct val="115000"/>
-              </a:lnSpc>
-              <a:spcBef>
-                <a:spcPts val="0"/>
-              </a:spcBef>
-              <a:spcAft>
-                <a:spcPts val="0"/>
-              </a:spcAft>
-              <a:buClr>
-                <a:srgbClr val="424242"/>
-              </a:buClr>
-              <a:buSzPts val="1200"/>
-              <a:buFont typeface="Roboto"/>
-              <a:buAutoNum type="arabicPeriod"/>
-            </a:pPr>
-            <a:r>
-              <a:rPr lang="en-US" sz="1200">
-                <a:solidFill>
-                  <a:srgbClr val="424242"/>
-                </a:solidFill>
-                <a:latin typeface="Roboto"/>
-                <a:ea typeface="Roboto"/>
-                <a:cs typeface="Roboto"/>
-                <a:sym typeface="Roboto"/>
-              </a:rPr>
-              <a:t>Don’t interpret the meaning or get into the substance of any of the topics or content of the policies.</a:t>
-            </a:r>
-            <a:endParaRPr sz="1200">
-              <a:solidFill>
-                <a:srgbClr val="424242"/>
-              </a:solidFill>
-              <a:latin typeface="Roboto"/>
-              <a:ea typeface="Roboto"/>
-              <a:cs typeface="Roboto"/>
-              <a:sym typeface="Roboto"/>
-            </a:endParaRPr>
-          </a:p>
-          <a:p>
-            <a:pPr marL="457200" lvl="0" indent="-304800" algn="l" rtl="0">
-              <a:lnSpc>
-                <a:spcPct val="115000"/>
-              </a:lnSpc>
-              <a:spcBef>
-                <a:spcPts val="0"/>
-              </a:spcBef>
-              <a:spcAft>
-                <a:spcPts val="0"/>
-              </a:spcAft>
-              <a:buClr>
-                <a:srgbClr val="424242"/>
-              </a:buClr>
-              <a:buSzPts val="1200"/>
-              <a:buFont typeface="Roboto"/>
-              <a:buAutoNum type="arabicPeriod"/>
-            </a:pPr>
-            <a:r>
-              <a:rPr lang="en-US" sz="1200">
-                <a:solidFill>
-                  <a:srgbClr val="424242"/>
-                </a:solidFill>
-                <a:latin typeface="Roboto"/>
-                <a:ea typeface="Roboto"/>
-                <a:cs typeface="Roboto"/>
-                <a:sym typeface="Roboto"/>
-              </a:rPr>
-              <a:t>Don’t communicate that the Note Well conveys all the information participants need to know.</a:t>
-            </a:r>
-            <a:endParaRPr sz="1200">
-              <a:solidFill>
-                <a:srgbClr val="424242"/>
-              </a:solidFill>
-              <a:latin typeface="Roboto"/>
-              <a:ea typeface="Roboto"/>
-              <a:cs typeface="Roboto"/>
-              <a:sym typeface="Roboto"/>
-            </a:endParaRPr>
-          </a:p>
-          <a:p>
-            <a:pPr marL="457200" lvl="0" indent="-304800" algn="l" rtl="0">
-              <a:lnSpc>
-                <a:spcPct val="115000"/>
-              </a:lnSpc>
-              <a:spcBef>
-                <a:spcPts val="0"/>
-              </a:spcBef>
-              <a:spcAft>
-                <a:spcPts val="0"/>
-              </a:spcAft>
-              <a:buClr>
-                <a:srgbClr val="424242"/>
-              </a:buClr>
-              <a:buSzPts val="1200"/>
-              <a:buFont typeface="Roboto"/>
-              <a:buAutoNum type="arabicPeriod"/>
-            </a:pPr>
-            <a:r>
-              <a:rPr lang="en-US" sz="1200">
-                <a:solidFill>
-                  <a:srgbClr val="424242"/>
-                </a:solidFill>
-                <a:latin typeface="Roboto"/>
-                <a:ea typeface="Roboto"/>
-                <a:cs typeface="Roboto"/>
-                <a:sym typeface="Roboto"/>
-              </a:rPr>
-              <a:t>Don’t address questions or concerns in the meeting itself.</a:t>
-            </a:r>
-            <a:endParaRPr sz="1200">
-              <a:solidFill>
-                <a:srgbClr val="424242"/>
-              </a:solidFill>
-              <a:latin typeface="Roboto"/>
-              <a:ea typeface="Roboto"/>
-              <a:cs typeface="Roboto"/>
-              <a:sym typeface="Roboto"/>
-            </a:endParaRPr>
-          </a:p>
-          <a:p>
-            <a:pPr marL="0" lvl="0" indent="0" algn="l" rtl="0">
-              <a:lnSpc>
-                <a:spcPct val="115000"/>
-              </a:lnSpc>
-              <a:spcBef>
-                <a:spcPts val="0"/>
-              </a:spcBef>
-              <a:spcAft>
-                <a:spcPts val="0"/>
-              </a:spcAft>
-              <a:buClr>
-                <a:schemeClr val="dk1"/>
-              </a:buClr>
-              <a:buSzPts val="1100"/>
-              <a:buFont typeface="Arial"/>
-              <a:buNone/>
-            </a:pPr>
-            <a:endParaRPr sz="1200">
-              <a:solidFill>
-                <a:srgbClr val="424242"/>
-              </a:solidFill>
-              <a:latin typeface="Roboto"/>
-              <a:ea typeface="Roboto"/>
-              <a:cs typeface="Roboto"/>
-              <a:sym typeface="Roboto"/>
-            </a:endParaRPr>
-          </a:p>
-          <a:p>
-            <a:pPr marL="0" lvl="0" indent="0" algn="l" rtl="0">
-              <a:spcBef>
-                <a:spcPts val="0"/>
-              </a:spcBef>
-              <a:spcAft>
-                <a:spcPts val="0"/>
-              </a:spcAft>
-              <a:buNone/>
-            </a:pPr>
-            <a:endParaRPr/>
+              <a:rPr lang="en-CA" dirty="0"/>
+              <a:t>In the next slides we will show how normative references are causing a bit of a backlog</a:t>
+            </a:r>
+            <a:endParaRPr dirty="0"/>
           </a:p>
         </p:txBody>
       </p:sp>
@@ -4767,7 +4944,7 @@
         <p:cNvPr id="1" name="Shape 65">
           <a:extLst>
             <a:ext uri="{FF2B5EF4-FFF2-40B4-BE49-F238E27FC236}">
-              <a16:creationId xmlns:a16="http://schemas.microsoft.com/office/drawing/2014/main" id="{0A426379-9679-532E-CC0D-7F43BD6132ED}"/>
+              <a16:creationId xmlns:a16="http://schemas.microsoft.com/office/drawing/2014/main" id="{93C740EE-856B-4580-6532-33CEAB5083CA}"/>
             </a:ext>
           </a:extLst>
         </p:cNvPr>
@@ -4787,7 +4964,7 @@
           <p:cNvPr id="66" name="Google Shape;66;g7179d949db_7_60:notes">
             <a:extLst>
               <a:ext uri="{FF2B5EF4-FFF2-40B4-BE49-F238E27FC236}">
-                <a16:creationId xmlns:a16="http://schemas.microsoft.com/office/drawing/2014/main" id="{5A2CE57F-CF3A-B8C2-F356-F9BE6BE646B2}"/>
+                <a16:creationId xmlns:a16="http://schemas.microsoft.com/office/drawing/2014/main" id="{FA807BE7-F0A0-88A9-6A35-F0AA8E15C531}"/>
               </a:ext>
             </a:extLst>
           </p:cNvPr>
@@ -4844,7 +5021,7 @@
           <p:cNvPr id="67" name="Google Shape;67;g7179d949db_7_60:notes">
             <a:extLst>
               <a:ext uri="{FF2B5EF4-FFF2-40B4-BE49-F238E27FC236}">
-                <a16:creationId xmlns:a16="http://schemas.microsoft.com/office/drawing/2014/main" id="{20AB62FC-7B0B-ED01-EF7F-9D236A9BF0BE}"/>
+                <a16:creationId xmlns:a16="http://schemas.microsoft.com/office/drawing/2014/main" id="{65389CA5-E549-4FD1-5C8E-63F684F30140}"/>
               </a:ext>
             </a:extLst>
           </p:cNvPr>
@@ -4875,9 +5052,6 @@
           <a:lstStyle/>
           <a:p>
             <a:pPr marL="0" lvl="0" indent="0" algn="l" rtl="0">
-              <a:lnSpc>
-                <a:spcPct val="115000"/>
-              </a:lnSpc>
               <a:spcBef>
                 <a:spcPts val="0"/>
               </a:spcBef>
@@ -4887,536 +5061,17 @@
               <a:buNone/>
             </a:pPr>
             <a:r>
-              <a:rPr lang="en-US" sz="1200">
-                <a:solidFill>
-                  <a:srgbClr val="424242"/>
-                </a:solidFill>
-                <a:highlight>
-                  <a:srgbClr val="FFFFFF"/>
-                </a:highlight>
-                <a:latin typeface="Roboto"/>
-                <a:ea typeface="Roboto"/>
-                <a:cs typeface="Roboto"/>
-                <a:sym typeface="Roboto"/>
-              </a:rPr>
-              <a:t>The IETF Note Well should be shown at the start of every IETF working session. The guidance below is </a:t>
-            </a:r>
-            <a:r>
-              <a:rPr lang="en-US" sz="1200" u="sng">
-                <a:solidFill>
-                  <a:srgbClr val="1976D2"/>
-                </a:solidFill>
-                <a:latin typeface="Roboto"/>
-                <a:ea typeface="Roboto"/>
-                <a:cs typeface="Roboto"/>
-                <a:sym typeface="Roboto"/>
-                <a:hlinkClick r:id="rId3">
-                  <a:extLst>
-                    <a:ext uri="{A12FA001-AC4F-418D-AE19-62706E023703}">
-                      <ahyp:hlinkClr xmlns:ahyp="http://schemas.microsoft.com/office/drawing/2018/hyperlinkcolor" val="tx"/>
-                    </a:ext>
-                  </a:extLst>
-                </a:hlinkClick>
-              </a:rPr>
-              <a:t>adapted from IETF legal counsel presentation during IETF 120</a:t>
-            </a:r>
-            <a:endParaRPr sz="1200">
-              <a:solidFill>
-                <a:srgbClr val="1B5E20"/>
-              </a:solidFill>
-              <a:highlight>
-                <a:srgbClr val="E8F5E9"/>
-              </a:highlight>
-              <a:latin typeface="Roboto"/>
-              <a:ea typeface="Roboto"/>
-              <a:cs typeface="Roboto"/>
-              <a:sym typeface="Roboto"/>
-            </a:endParaRPr>
-          </a:p>
-          <a:p>
-            <a:pPr marL="0" lvl="0" indent="0" algn="l" rtl="0">
-              <a:lnSpc>
-                <a:spcPct val="115000"/>
-              </a:lnSpc>
-              <a:spcBef>
-                <a:spcPts val="0"/>
-              </a:spcBef>
-              <a:spcAft>
-                <a:spcPts val="0"/>
-              </a:spcAft>
-              <a:buNone/>
-            </a:pPr>
-            <a:endParaRPr sz="1200">
-              <a:solidFill>
-                <a:srgbClr val="1B5E20"/>
-              </a:solidFill>
-              <a:highlight>
-                <a:srgbClr val="E8F5E9"/>
-              </a:highlight>
-              <a:latin typeface="Roboto"/>
-              <a:ea typeface="Roboto"/>
-              <a:cs typeface="Roboto"/>
-              <a:sym typeface="Roboto"/>
-            </a:endParaRPr>
-          </a:p>
-          <a:p>
-            <a:pPr marL="0" lvl="0" indent="0" algn="l" rtl="0">
-              <a:lnSpc>
-                <a:spcPct val="115000"/>
-              </a:lnSpc>
-              <a:spcBef>
-                <a:spcPts val="0"/>
-              </a:spcBef>
-              <a:spcAft>
-                <a:spcPts val="0"/>
-              </a:spcAft>
-              <a:buClr>
-                <a:schemeClr val="dk1"/>
-              </a:buClr>
-              <a:buSzPts val="1100"/>
-              <a:buFont typeface="Arial"/>
-              <a:buNone/>
-            </a:pPr>
-            <a:r>
-              <a:rPr lang="en-US" sz="1200">
-                <a:solidFill>
-                  <a:srgbClr val="1B5E20"/>
-                </a:solidFill>
-                <a:highlight>
-                  <a:srgbClr val="E8F5E9"/>
-                </a:highlight>
-                <a:latin typeface="Roboto"/>
-                <a:ea typeface="Roboto"/>
-                <a:cs typeface="Roboto"/>
-                <a:sym typeface="Roboto"/>
-              </a:rPr>
-              <a:t>DO</a:t>
-            </a:r>
-            <a:endParaRPr sz="1200">
-              <a:solidFill>
-                <a:srgbClr val="1B5E20"/>
-              </a:solidFill>
-              <a:highlight>
-                <a:srgbClr val="E8F5E9"/>
-              </a:highlight>
-              <a:latin typeface="Roboto"/>
-              <a:ea typeface="Roboto"/>
-              <a:cs typeface="Roboto"/>
-              <a:sym typeface="Roboto"/>
-            </a:endParaRPr>
-          </a:p>
-          <a:p>
-            <a:pPr marL="457200" lvl="0" indent="-304800" algn="l" rtl="0">
-              <a:lnSpc>
-                <a:spcPct val="115000"/>
-              </a:lnSpc>
-              <a:spcBef>
-                <a:spcPts val="0"/>
-              </a:spcBef>
-              <a:spcAft>
-                <a:spcPts val="0"/>
-              </a:spcAft>
-              <a:buClr>
-                <a:srgbClr val="424242"/>
-              </a:buClr>
-              <a:buSzPts val="1200"/>
-              <a:buFont typeface="Roboto"/>
-              <a:buAutoNum type="arabicPeriod"/>
-            </a:pPr>
-            <a:r>
-              <a:rPr lang="en-US" sz="1200">
-                <a:solidFill>
-                  <a:srgbClr val="424242"/>
-                </a:solidFill>
-                <a:latin typeface="Roboto"/>
-                <a:ea typeface="Roboto"/>
-                <a:cs typeface="Roboto"/>
-                <a:sym typeface="Roboto"/>
-              </a:rPr>
-              <a:t>Do make sure people have enough time to read through the slide before you move on,</a:t>
-            </a:r>
-            <a:endParaRPr sz="1200">
-              <a:solidFill>
-                <a:srgbClr val="424242"/>
-              </a:solidFill>
-              <a:latin typeface="Roboto"/>
-              <a:ea typeface="Roboto"/>
-              <a:cs typeface="Roboto"/>
-              <a:sym typeface="Roboto"/>
-            </a:endParaRPr>
-          </a:p>
-          <a:p>
-            <a:pPr marL="457200" lvl="0" indent="-304800" algn="l" rtl="0">
-              <a:lnSpc>
-                <a:spcPct val="115000"/>
-              </a:lnSpc>
-              <a:spcBef>
-                <a:spcPts val="0"/>
-              </a:spcBef>
-              <a:spcAft>
-                <a:spcPts val="0"/>
-              </a:spcAft>
-              <a:buClr>
-                <a:srgbClr val="424242"/>
-              </a:buClr>
-              <a:buSzPts val="1200"/>
-              <a:buFont typeface="Roboto"/>
-              <a:buAutoNum type="arabicPeriod"/>
-            </a:pPr>
-            <a:r>
-              <a:rPr lang="en-US" sz="1200">
-                <a:solidFill>
-                  <a:srgbClr val="424242"/>
-                </a:solidFill>
-                <a:latin typeface="Roboto"/>
-                <a:ea typeface="Roboto"/>
-                <a:cs typeface="Roboto"/>
-                <a:sym typeface="Roboto"/>
-              </a:rPr>
-              <a:t>Do give a high-level summary of what’s covered in the Note Well: “IETF policies on conduct, privacy and IPR.”,</a:t>
-            </a:r>
-            <a:endParaRPr sz="1200">
-              <a:solidFill>
-                <a:srgbClr val="424242"/>
-              </a:solidFill>
-              <a:latin typeface="Roboto"/>
-              <a:ea typeface="Roboto"/>
-              <a:cs typeface="Roboto"/>
-              <a:sym typeface="Roboto"/>
-            </a:endParaRPr>
-          </a:p>
-          <a:p>
-            <a:pPr marL="457200" lvl="0" indent="-304800" algn="l" rtl="0">
-              <a:lnSpc>
-                <a:spcPct val="115000"/>
-              </a:lnSpc>
-              <a:spcBef>
-                <a:spcPts val="0"/>
-              </a:spcBef>
-              <a:spcAft>
-                <a:spcPts val="0"/>
-              </a:spcAft>
-              <a:buClr>
-                <a:srgbClr val="424242"/>
-              </a:buClr>
-              <a:buSzPts val="1200"/>
-              <a:buFont typeface="Roboto"/>
-              <a:buAutoNum type="arabicPeriod"/>
-            </a:pPr>
-            <a:r>
-              <a:rPr lang="en-US" sz="1200">
-                <a:solidFill>
-                  <a:srgbClr val="424242"/>
-                </a:solidFill>
-                <a:latin typeface="Roboto"/>
-                <a:ea typeface="Roboto"/>
-                <a:cs typeface="Roboto"/>
-                <a:sym typeface="Roboto"/>
-              </a:rPr>
-              <a:t>Do encourage people to read through all the linked policies &amp; documents in detail before participating or contributing,</a:t>
-            </a:r>
-            <a:endParaRPr sz="1200">
-              <a:solidFill>
-                <a:srgbClr val="424242"/>
-              </a:solidFill>
-              <a:latin typeface="Roboto"/>
-              <a:ea typeface="Roboto"/>
-              <a:cs typeface="Roboto"/>
-              <a:sym typeface="Roboto"/>
-            </a:endParaRPr>
-          </a:p>
-          <a:p>
-            <a:pPr marL="457200" lvl="0" indent="-304800" algn="l" rtl="0">
-              <a:lnSpc>
-                <a:spcPct val="115000"/>
-              </a:lnSpc>
-              <a:spcBef>
-                <a:spcPts val="0"/>
-              </a:spcBef>
-              <a:spcAft>
-                <a:spcPts val="0"/>
-              </a:spcAft>
-              <a:buClr>
-                <a:srgbClr val="424242"/>
-              </a:buClr>
-              <a:buSzPts val="1200"/>
-              <a:buFont typeface="Roboto"/>
-              <a:buAutoNum type="arabicPeriod"/>
-            </a:pPr>
-            <a:r>
-              <a:rPr lang="en-US" sz="1200">
-                <a:solidFill>
-                  <a:srgbClr val="424242"/>
-                </a:solidFill>
-                <a:latin typeface="Roboto"/>
-                <a:ea typeface="Roboto"/>
-                <a:cs typeface="Roboto"/>
-                <a:sym typeface="Roboto"/>
-              </a:rPr>
-              <a:t>Do explain where people can direct questions or concerns (IETF Executive Director or Ombudsteam).</a:t>
-            </a:r>
-            <a:endParaRPr sz="1200">
-              <a:solidFill>
-                <a:srgbClr val="424242"/>
-              </a:solidFill>
-              <a:latin typeface="Roboto"/>
-              <a:ea typeface="Roboto"/>
-              <a:cs typeface="Roboto"/>
-              <a:sym typeface="Roboto"/>
-            </a:endParaRPr>
-          </a:p>
-          <a:p>
-            <a:pPr marL="0" lvl="0" indent="0" algn="l" rtl="0">
-              <a:lnSpc>
-                <a:spcPct val="115000"/>
-              </a:lnSpc>
-              <a:spcBef>
-                <a:spcPts val="0"/>
-              </a:spcBef>
-              <a:spcAft>
-                <a:spcPts val="0"/>
-              </a:spcAft>
-              <a:buClr>
-                <a:schemeClr val="dk1"/>
-              </a:buClr>
-              <a:buSzPts val="1100"/>
-              <a:buFont typeface="Arial"/>
-              <a:buNone/>
-            </a:pPr>
-            <a:r>
-              <a:rPr lang="en-US" sz="1200">
-                <a:solidFill>
-                  <a:srgbClr val="B33F00"/>
-                </a:solidFill>
-                <a:highlight>
-                  <a:srgbClr val="FFF3E0"/>
-                </a:highlight>
-                <a:latin typeface="Roboto"/>
-                <a:ea typeface="Roboto"/>
-                <a:cs typeface="Roboto"/>
-                <a:sym typeface="Roboto"/>
-              </a:rPr>
-              <a:t>DON'T</a:t>
-            </a:r>
-            <a:endParaRPr sz="1200">
-              <a:solidFill>
-                <a:srgbClr val="B33F00"/>
-              </a:solidFill>
-              <a:highlight>
-                <a:srgbClr val="FFF3E0"/>
-              </a:highlight>
-              <a:latin typeface="Roboto"/>
-              <a:ea typeface="Roboto"/>
-              <a:cs typeface="Roboto"/>
-              <a:sym typeface="Roboto"/>
-            </a:endParaRPr>
-          </a:p>
-          <a:p>
-            <a:pPr marL="457200" lvl="0" indent="-304800" algn="l" rtl="0">
-              <a:lnSpc>
-                <a:spcPct val="115000"/>
-              </a:lnSpc>
-              <a:spcBef>
-                <a:spcPts val="0"/>
-              </a:spcBef>
-              <a:spcAft>
-                <a:spcPts val="0"/>
-              </a:spcAft>
-              <a:buClr>
-                <a:srgbClr val="424242"/>
-              </a:buClr>
-              <a:buSzPts val="1200"/>
-              <a:buFont typeface="Roboto"/>
-              <a:buAutoNum type="arabicPeriod"/>
-            </a:pPr>
-            <a:r>
-              <a:rPr lang="en-US" sz="1200">
-                <a:solidFill>
-                  <a:srgbClr val="424242"/>
-                </a:solidFill>
-                <a:latin typeface="Roboto"/>
-                <a:ea typeface="Roboto"/>
-                <a:cs typeface="Roboto"/>
-                <a:sym typeface="Roboto"/>
-              </a:rPr>
-              <a:t>Don’t dismiss the importance or relevance of any of the information on the Note Well.</a:t>
-            </a:r>
-            <a:endParaRPr sz="1200">
-              <a:solidFill>
-                <a:srgbClr val="424242"/>
-              </a:solidFill>
-              <a:latin typeface="Roboto"/>
-              <a:ea typeface="Roboto"/>
-              <a:cs typeface="Roboto"/>
-              <a:sym typeface="Roboto"/>
-            </a:endParaRPr>
-          </a:p>
-          <a:p>
-            <a:pPr marL="457200" lvl="0" indent="-304800" algn="l" rtl="0">
-              <a:lnSpc>
-                <a:spcPct val="115000"/>
-              </a:lnSpc>
-              <a:spcBef>
-                <a:spcPts val="0"/>
-              </a:spcBef>
-              <a:spcAft>
-                <a:spcPts val="0"/>
-              </a:spcAft>
-              <a:buClr>
-                <a:srgbClr val="424242"/>
-              </a:buClr>
-              <a:buSzPts val="1200"/>
-              <a:buFont typeface="Roboto"/>
-              <a:buAutoNum type="arabicPeriod"/>
-            </a:pPr>
-            <a:r>
-              <a:rPr lang="en-US" sz="1200">
-                <a:solidFill>
-                  <a:srgbClr val="424242"/>
-                </a:solidFill>
-                <a:latin typeface="Roboto"/>
-                <a:ea typeface="Roboto"/>
-                <a:cs typeface="Roboto"/>
-                <a:sym typeface="Roboto"/>
-              </a:rPr>
-              <a:t>Don’t interpret the meaning or get into the substance of any of the topics or content of the policies.</a:t>
-            </a:r>
-            <a:endParaRPr sz="1200">
-              <a:solidFill>
-                <a:srgbClr val="424242"/>
-              </a:solidFill>
-              <a:latin typeface="Roboto"/>
-              <a:ea typeface="Roboto"/>
-              <a:cs typeface="Roboto"/>
-              <a:sym typeface="Roboto"/>
-            </a:endParaRPr>
-          </a:p>
-          <a:p>
-            <a:pPr marL="457200" lvl="0" indent="-304800" algn="l" rtl="0">
-              <a:lnSpc>
-                <a:spcPct val="115000"/>
-              </a:lnSpc>
-              <a:spcBef>
-                <a:spcPts val="0"/>
-              </a:spcBef>
-              <a:spcAft>
-                <a:spcPts val="0"/>
-              </a:spcAft>
-              <a:buClr>
-                <a:srgbClr val="424242"/>
-              </a:buClr>
-              <a:buSzPts val="1200"/>
-              <a:buFont typeface="Roboto"/>
-              <a:buAutoNum type="arabicPeriod"/>
-            </a:pPr>
-            <a:r>
-              <a:rPr lang="en-US" sz="1200">
-                <a:solidFill>
-                  <a:srgbClr val="424242"/>
-                </a:solidFill>
-                <a:latin typeface="Roboto"/>
-                <a:ea typeface="Roboto"/>
-                <a:cs typeface="Roboto"/>
-                <a:sym typeface="Roboto"/>
-              </a:rPr>
-              <a:t>Don’t communicate that the Note Well conveys all the information participants need to know.</a:t>
-            </a:r>
-            <a:endParaRPr sz="1200">
-              <a:solidFill>
-                <a:srgbClr val="424242"/>
-              </a:solidFill>
-              <a:latin typeface="Roboto"/>
-              <a:ea typeface="Roboto"/>
-              <a:cs typeface="Roboto"/>
-              <a:sym typeface="Roboto"/>
-            </a:endParaRPr>
-          </a:p>
-          <a:p>
-            <a:pPr marL="457200" lvl="0" indent="-304800" algn="l" rtl="0">
-              <a:lnSpc>
-                <a:spcPct val="115000"/>
-              </a:lnSpc>
-              <a:spcBef>
-                <a:spcPts val="0"/>
-              </a:spcBef>
-              <a:spcAft>
-                <a:spcPts val="0"/>
-              </a:spcAft>
-              <a:buClr>
-                <a:srgbClr val="424242"/>
-              </a:buClr>
-              <a:buSzPts val="1200"/>
-              <a:buFont typeface="Roboto"/>
-              <a:buAutoNum type="arabicPeriod"/>
-            </a:pPr>
-            <a:r>
-              <a:rPr lang="en-US" sz="1200">
-                <a:solidFill>
-                  <a:srgbClr val="424242"/>
-                </a:solidFill>
-                <a:latin typeface="Roboto"/>
-                <a:ea typeface="Roboto"/>
-                <a:cs typeface="Roboto"/>
-                <a:sym typeface="Roboto"/>
-              </a:rPr>
-              <a:t>Don’t address questions or concerns in the meeting itself.</a:t>
-            </a:r>
-            <a:endParaRPr sz="1200">
-              <a:solidFill>
-                <a:srgbClr val="424242"/>
-              </a:solidFill>
-              <a:latin typeface="Roboto"/>
-              <a:ea typeface="Roboto"/>
-              <a:cs typeface="Roboto"/>
-              <a:sym typeface="Roboto"/>
-            </a:endParaRPr>
-          </a:p>
-          <a:p>
-            <a:pPr marL="0" lvl="0" indent="0" algn="l" rtl="0">
-              <a:lnSpc>
-                <a:spcPct val="115000"/>
-              </a:lnSpc>
-              <a:spcBef>
-                <a:spcPts val="0"/>
-              </a:spcBef>
-              <a:spcAft>
-                <a:spcPts val="0"/>
-              </a:spcAft>
-              <a:buClr>
-                <a:schemeClr val="dk1"/>
-              </a:buClr>
-              <a:buSzPts val="1100"/>
-              <a:buFont typeface="Arial"/>
-              <a:buNone/>
-            </a:pPr>
-            <a:endParaRPr sz="1200">
-              <a:solidFill>
-                <a:srgbClr val="424242"/>
-              </a:solidFill>
-              <a:latin typeface="Roboto"/>
-              <a:ea typeface="Roboto"/>
-              <a:cs typeface="Roboto"/>
-              <a:sym typeface="Roboto"/>
-            </a:endParaRPr>
-          </a:p>
-          <a:p>
-            <a:pPr marL="0" lvl="0" indent="0" algn="l" rtl="0">
-              <a:spcBef>
-                <a:spcPts val="0"/>
-              </a:spcBef>
-              <a:spcAft>
-                <a:spcPts val="0"/>
-              </a:spcAft>
-              <a:buNone/>
-            </a:pPr>
-            <a:endParaRPr/>
+              <a:rPr lang="en-CA" dirty="0"/>
+              <a:t>Those 3 documents can go move forward on their own once they are ready to do so</a:t>
+            </a:r>
+            <a:endParaRPr dirty="0"/>
           </a:p>
         </p:txBody>
       </p:sp>
     </p:spTree>
     <p:extLst>
       <p:ext uri="{BB962C8B-B14F-4D97-AF65-F5344CB8AC3E}">
-        <p14:creationId xmlns:p14="http://schemas.microsoft.com/office/powerpoint/2010/main" val="1298566984"/>
+        <p14:creationId xmlns:p14="http://schemas.microsoft.com/office/powerpoint/2010/main" val="1354392727"/>
       </p:ext>
     </p:extLst>
   </p:cSld>
@@ -11472,6 +11127,1089 @@
         <p:cNvPr id="1" name="Shape 68">
           <a:extLst>
             <a:ext uri="{FF2B5EF4-FFF2-40B4-BE49-F238E27FC236}">
+              <a16:creationId xmlns:a16="http://schemas.microsoft.com/office/drawing/2014/main" id="{D3991861-15E8-8C3B-546E-D03F52728701}"/>
+            </a:ext>
+          </a:extLst>
+        </p:cNvPr>
+        <p:cNvGrpSpPr/>
+        <p:nvPr/>
+      </p:nvGrpSpPr>
+      <p:grpSpPr>
+        <a:xfrm>
+          <a:off x="0" y="0"/>
+          <a:ext cx="0" cy="0"/>
+          <a:chOff x="0" y="0"/>
+          <a:chExt cx="0" cy="0"/>
+        </a:xfrm>
+      </p:grpSpPr>
+      <p:sp>
+        <p:nvSpPr>
+          <p:cNvPr id="69" name="Google Shape;69;p12">
+            <a:extLst>
+              <a:ext uri="{FF2B5EF4-FFF2-40B4-BE49-F238E27FC236}">
+                <a16:creationId xmlns:a16="http://schemas.microsoft.com/office/drawing/2014/main" id="{D8ED7130-84F9-E6BA-0FD1-A3D0E467D145}"/>
+              </a:ext>
+            </a:extLst>
+          </p:cNvPr>
+          <p:cNvSpPr txBox="1">
+            <a:spLocks noGrp="1"/>
+          </p:cNvSpPr>
+          <p:nvPr>
+            <p:ph type="title"/>
+          </p:nvPr>
+        </p:nvSpPr>
+        <p:spPr>
+          <a:prstGeom prst="rect">
+            <a:avLst/>
+          </a:prstGeom>
+          <a:noFill/>
+          <a:ln>
+            <a:noFill/>
+          </a:ln>
+        </p:spPr>
+        <p:txBody>
+          <a:bodyPr spcFirstLastPara="1" wrap="square" lIns="91425" tIns="91425" rIns="91425" bIns="91425" anchor="b" anchorCtr="0">
+            <a:noAutofit/>
+          </a:bodyPr>
+          <a:lstStyle/>
+          <a:p>
+            <a:pPr marL="0" marR="0" lvl="0" indent="0" algn="l" rtl="0">
+              <a:lnSpc>
+                <a:spcPct val="100000"/>
+              </a:lnSpc>
+              <a:spcBef>
+                <a:spcPts val="0"/>
+              </a:spcBef>
+              <a:spcAft>
+                <a:spcPts val="0"/>
+              </a:spcAft>
+              <a:buClr>
+                <a:schemeClr val="lt1"/>
+              </a:buClr>
+              <a:buSzPts val="3200"/>
+              <a:buFont typeface="Open Sans SemiBold"/>
+              <a:buNone/>
+            </a:pPr>
+            <a:r>
+              <a:rPr lang="en-US" sz="2400" dirty="0">
+                <a:latin typeface="Inter"/>
+                <a:ea typeface="Inter"/>
+                <a:cs typeface="Inter"/>
+                <a:sym typeface="Inter"/>
+              </a:rPr>
+              <a:t>Document Dependencies (normative references)</a:t>
+            </a:r>
+            <a:endParaRPr sz="2400" i="0" u="none" strike="noStrike" cap="none" dirty="0">
+              <a:solidFill>
+                <a:schemeClr val="lt1"/>
+              </a:solidFill>
+              <a:latin typeface="Inter"/>
+              <a:ea typeface="Inter"/>
+              <a:cs typeface="Inter"/>
+              <a:sym typeface="Inter"/>
+            </a:endParaRPr>
+          </a:p>
+        </p:txBody>
+      </p:sp>
+      <p:pic>
+        <p:nvPicPr>
+          <p:cNvPr id="3" name="Picture 2">
+            <a:extLst>
+              <a:ext uri="{FF2B5EF4-FFF2-40B4-BE49-F238E27FC236}">
+                <a16:creationId xmlns:a16="http://schemas.microsoft.com/office/drawing/2014/main" id="{6F2850A7-8A8E-756D-A7C8-6B0D2B18E192}"/>
+              </a:ext>
+            </a:extLst>
+          </p:cNvPr>
+          <p:cNvPicPr>
+            <a:picLocks noChangeAspect="1"/>
+          </p:cNvPicPr>
+          <p:nvPr/>
+        </p:nvPicPr>
+        <p:blipFill>
+          <a:blip r:embed="rId3"/>
+          <a:stretch>
+            <a:fillRect/>
+          </a:stretch>
+        </p:blipFill>
+        <p:spPr>
+          <a:xfrm>
+            <a:off x="158699" y="1216427"/>
+            <a:ext cx="7772400" cy="2710646"/>
+          </a:xfrm>
+          <a:prstGeom prst="rect">
+            <a:avLst/>
+          </a:prstGeom>
+        </p:spPr>
+      </p:pic>
+      <mc:AlternateContent xmlns:mc="http://schemas.openxmlformats.org/markup-compatibility/2006">
+        <mc:Choice xmlns:p14="http://schemas.microsoft.com/office/powerpoint/2010/main" Requires="p14">
+          <p:contentPart p14:bwMode="auto" r:id="rId4">
+            <p14:nvContentPartPr>
+              <p14:cNvPr id="4" name="Ink 3">
+                <a:extLst>
+                  <a:ext uri="{FF2B5EF4-FFF2-40B4-BE49-F238E27FC236}">
+                    <a16:creationId xmlns:a16="http://schemas.microsoft.com/office/drawing/2014/main" id="{6BDF26F2-4CD3-F51A-9AE1-844466575DCC}"/>
+                  </a:ext>
+                </a:extLst>
+              </p14:cNvPr>
+              <p14:cNvContentPartPr/>
+              <p14:nvPr/>
+            </p14:nvContentPartPr>
+            <p14:xfrm>
+              <a:off x="4471272" y="1526904"/>
+              <a:ext cx="3639456" cy="2526840"/>
+            </p14:xfrm>
+          </p:contentPart>
+        </mc:Choice>
+        <mc:Fallback>
+          <p:pic>
+            <p:nvPicPr>
+              <p:cNvPr id="4" name="Ink 3">
+                <a:extLst>
+                  <a:ext uri="{FF2B5EF4-FFF2-40B4-BE49-F238E27FC236}">
+                    <a16:creationId xmlns:a16="http://schemas.microsoft.com/office/drawing/2014/main" id="{6BDF26F2-4CD3-F51A-9AE1-844466575DCC}"/>
+                  </a:ext>
+                </a:extLst>
+              </p:cNvPr>
+              <p:cNvPicPr/>
+              <p:nvPr/>
+            </p:nvPicPr>
+            <p:blipFill>
+              <a:blip r:embed="rId5"/>
+              <a:stretch>
+                <a:fillRect/>
+              </a:stretch>
+            </p:blipFill>
+            <p:spPr>
+              <a:xfrm>
+                <a:off x="4465152" y="1520784"/>
+                <a:ext cx="3651697" cy="2539080"/>
+              </a:xfrm>
+              <a:prstGeom prst="rect">
+                <a:avLst/>
+              </a:prstGeom>
+            </p:spPr>
+          </p:pic>
+        </mc:Fallback>
+      </mc:AlternateContent>
+    </p:spTree>
+    <p:extLst>
+      <p:ext uri="{BB962C8B-B14F-4D97-AF65-F5344CB8AC3E}">
+        <p14:creationId xmlns:p14="http://schemas.microsoft.com/office/powerpoint/2010/main" val="421109948"/>
+      </p:ext>
+    </p:extLst>
+  </p:cSld>
+  <p:clrMapOvr>
+    <a:masterClrMapping/>
+  </p:clrMapOvr>
+  <mc:AlternateContent xmlns:mc="http://schemas.openxmlformats.org/markup-compatibility/2006">
+    <mc:Choice xmlns:p14="http://schemas.microsoft.com/office/powerpoint/2010/main" Requires="p14">
+      <p:transition spd="med" p14:dur="700">
+        <p:fade/>
+      </p:transition>
+    </mc:Choice>
+    <mc:Fallback>
+      <p:transition spd="med">
+        <p:fade/>
+      </p:transition>
+    </mc:Fallback>
+  </mc:AlternateContent>
+  <p:timing>
+    <p:tnLst>
+      <p:par>
+        <p:cTn id="1" dur="indefinite" restart="never" nodeType="tmRoot">
+          <p:childTnLst>
+            <p:seq concurrent="1" nextAc="seek">
+              <p:cTn id="2" dur="indefinite" nodeType="mainSeq">
+                <p:childTnLst>
+                  <p:par>
+                    <p:cTn id="3" fill="hold">
+                      <p:stCondLst>
+                        <p:cond delay="indefinite"/>
+                      </p:stCondLst>
+                      <p:childTnLst>
+                        <p:par>
+                          <p:cTn id="4" fill="hold">
+                            <p:stCondLst>
+                              <p:cond delay="0"/>
+                            </p:stCondLst>
+                            <p:childTnLst>
+                              <p:par>
+                                <p:cTn id="5" presetID="1" presetClass="entr" presetSubtype="0" fill="hold" nodeType="clickEffect">
+                                  <p:stCondLst>
+                                    <p:cond delay="0"/>
+                                  </p:stCondLst>
+                                  <p:childTnLst>
+                                    <p:set>
+                                      <p:cBhvr>
+                                        <p:cTn id="6" dur="1" fill="hold">
+                                          <p:stCondLst>
+                                            <p:cond delay="0"/>
+                                          </p:stCondLst>
+                                        </p:cTn>
+                                        <p:tgtEl>
+                                          <p:spTgt spid="3"/>
+                                        </p:tgtEl>
+                                        <p:attrNameLst>
+                                          <p:attrName>style.visibility</p:attrName>
+                                        </p:attrNameLst>
+                                      </p:cBhvr>
+                                      <p:to>
+                                        <p:strVal val="visible"/>
+                                      </p:to>
+                                    </p:set>
+                                  </p:childTnLst>
+                                </p:cTn>
+                              </p:par>
+                            </p:childTnLst>
+                          </p:cTn>
+                        </p:par>
+                      </p:childTnLst>
+                    </p:cTn>
+                  </p:par>
+                  <p:par>
+                    <p:cTn id="7" fill="hold">
+                      <p:stCondLst>
+                        <p:cond delay="indefinite"/>
+                      </p:stCondLst>
+                      <p:childTnLst>
+                        <p:par>
+                          <p:cTn id="8" fill="hold">
+                            <p:stCondLst>
+                              <p:cond delay="0"/>
+                            </p:stCondLst>
+                            <p:childTnLst>
+                              <p:par>
+                                <p:cTn id="9" presetID="1" presetClass="entr" presetSubtype="0" fill="hold" nodeType="clickEffect">
+                                  <p:stCondLst>
+                                    <p:cond delay="0"/>
+                                  </p:stCondLst>
+                                  <p:childTnLst>
+                                    <p:set>
+                                      <p:cBhvr>
+                                        <p:cTn id="10" dur="1" fill="hold">
+                                          <p:stCondLst>
+                                            <p:cond delay="0"/>
+                                          </p:stCondLst>
+                                        </p:cTn>
+                                        <p:tgtEl>
+                                          <p:spTgt spid="4"/>
+                                        </p:tgtEl>
+                                        <p:attrNameLst>
+                                          <p:attrName>style.visibility</p:attrName>
+                                        </p:attrNameLst>
+                                      </p:cBhvr>
+                                      <p:to>
+                                        <p:strVal val="visible"/>
+                                      </p:to>
+                                    </p:set>
+                                  </p:childTnLst>
+                                </p:cTn>
+                              </p:par>
+                            </p:childTnLst>
+                          </p:cTn>
+                        </p:par>
+                      </p:childTnLst>
+                    </p:cTn>
+                  </p:par>
+                </p:childTnLst>
+              </p:cTn>
+              <p:prevCondLst>
+                <p:cond evt="onPrev" delay="0">
+                  <p:tgtEl>
+                    <p:sldTgt/>
+                  </p:tgtEl>
+                </p:cond>
+              </p:prevCondLst>
+              <p:nextCondLst>
+                <p:cond evt="onNext" delay="0">
+                  <p:tgtEl>
+                    <p:sldTgt/>
+                  </p:tgtEl>
+                </p:cond>
+              </p:nextCondLst>
+            </p:seq>
+          </p:childTnLst>
+        </p:cTn>
+      </p:par>
+    </p:tnLst>
+  </p:timing>
+</p:sld>
+</file>
+
+<file path=ppt/slides/slide11.xml><?xml version="1.0" encoding="utf-8"?>
+<p:sld xmlns:a="http://schemas.openxmlformats.org/drawingml/2006/main" xmlns:r="http://schemas.openxmlformats.org/officeDocument/2006/relationships" xmlns:p="http://schemas.openxmlformats.org/presentationml/2006/main">
+  <p:cSld>
+    <p:spTree>
+      <p:nvGrpSpPr>
+        <p:cNvPr id="1" name="Shape 68">
+          <a:extLst>
+            <a:ext uri="{FF2B5EF4-FFF2-40B4-BE49-F238E27FC236}">
+              <a16:creationId xmlns:a16="http://schemas.microsoft.com/office/drawing/2014/main" id="{F51A5281-F480-97C1-01D4-DDCC411FE356}"/>
+            </a:ext>
+          </a:extLst>
+        </p:cNvPr>
+        <p:cNvGrpSpPr/>
+        <p:nvPr/>
+      </p:nvGrpSpPr>
+      <p:grpSpPr>
+        <a:xfrm>
+          <a:off x="0" y="0"/>
+          <a:ext cx="0" cy="0"/>
+          <a:chOff x="0" y="0"/>
+          <a:chExt cx="0" cy="0"/>
+        </a:xfrm>
+      </p:grpSpPr>
+      <p:sp>
+        <p:nvSpPr>
+          <p:cNvPr id="69" name="Google Shape;69;p12">
+            <a:extLst>
+              <a:ext uri="{FF2B5EF4-FFF2-40B4-BE49-F238E27FC236}">
+                <a16:creationId xmlns:a16="http://schemas.microsoft.com/office/drawing/2014/main" id="{AAAF846F-B144-E06B-B2FB-F32EA4D27E56}"/>
+              </a:ext>
+            </a:extLst>
+          </p:cNvPr>
+          <p:cNvSpPr txBox="1">
+            <a:spLocks noGrp="1"/>
+          </p:cNvSpPr>
+          <p:nvPr>
+            <p:ph type="title"/>
+          </p:nvPr>
+        </p:nvSpPr>
+        <p:spPr>
+          <a:prstGeom prst="rect">
+            <a:avLst/>
+          </a:prstGeom>
+          <a:noFill/>
+          <a:ln>
+            <a:noFill/>
+          </a:ln>
+        </p:spPr>
+        <p:txBody>
+          <a:bodyPr spcFirstLastPara="1" wrap="square" lIns="91425" tIns="91425" rIns="91425" bIns="91425" anchor="b" anchorCtr="0">
+            <a:noAutofit/>
+          </a:bodyPr>
+          <a:lstStyle/>
+          <a:p>
+            <a:pPr marL="0" marR="0" lvl="0" indent="0" algn="l" rtl="0">
+              <a:lnSpc>
+                <a:spcPct val="100000"/>
+              </a:lnSpc>
+              <a:spcBef>
+                <a:spcPts val="0"/>
+              </a:spcBef>
+              <a:spcAft>
+                <a:spcPts val="0"/>
+              </a:spcAft>
+              <a:buClr>
+                <a:schemeClr val="lt1"/>
+              </a:buClr>
+              <a:buSzPts val="3200"/>
+              <a:buFont typeface="Open Sans SemiBold"/>
+              <a:buNone/>
+            </a:pPr>
+            <a:r>
+              <a:rPr lang="en-US" sz="2400" dirty="0">
+                <a:latin typeface="Inter"/>
+                <a:ea typeface="Inter"/>
+                <a:cs typeface="Inter"/>
+                <a:sym typeface="Inter"/>
+              </a:rPr>
+              <a:t>Document Dependencies (normative references)</a:t>
+            </a:r>
+            <a:endParaRPr sz="2400" i="0" u="none" strike="noStrike" cap="none" dirty="0">
+              <a:solidFill>
+                <a:schemeClr val="lt1"/>
+              </a:solidFill>
+              <a:latin typeface="Inter"/>
+              <a:ea typeface="Inter"/>
+              <a:cs typeface="Inter"/>
+              <a:sym typeface="Inter"/>
+            </a:endParaRPr>
+          </a:p>
+        </p:txBody>
+      </p:sp>
+      <p:pic>
+        <p:nvPicPr>
+          <p:cNvPr id="3" name="Picture 2">
+            <a:extLst>
+              <a:ext uri="{FF2B5EF4-FFF2-40B4-BE49-F238E27FC236}">
+                <a16:creationId xmlns:a16="http://schemas.microsoft.com/office/drawing/2014/main" id="{45F0B3D8-2DC5-9497-2B81-930003D6434F}"/>
+              </a:ext>
+            </a:extLst>
+          </p:cNvPr>
+          <p:cNvPicPr>
+            <a:picLocks noChangeAspect="1"/>
+          </p:cNvPicPr>
+          <p:nvPr/>
+        </p:nvPicPr>
+        <p:blipFill>
+          <a:blip r:embed="rId3"/>
+          <a:stretch>
+            <a:fillRect/>
+          </a:stretch>
+        </p:blipFill>
+        <p:spPr>
+          <a:xfrm>
+            <a:off x="158699" y="1216427"/>
+            <a:ext cx="7772400" cy="2710646"/>
+          </a:xfrm>
+          <a:prstGeom prst="rect">
+            <a:avLst/>
+          </a:prstGeom>
+        </p:spPr>
+      </p:pic>
+      <mc:AlternateContent xmlns:mc="http://schemas.openxmlformats.org/markup-compatibility/2006">
+        <mc:Choice xmlns:p14="http://schemas.microsoft.com/office/powerpoint/2010/main" Requires="p14">
+          <p:contentPart p14:bwMode="auto" r:id="rId4">
+            <p14:nvContentPartPr>
+              <p14:cNvPr id="2" name="Ink 1">
+                <a:extLst>
+                  <a:ext uri="{FF2B5EF4-FFF2-40B4-BE49-F238E27FC236}">
+                    <a16:creationId xmlns:a16="http://schemas.microsoft.com/office/drawing/2014/main" id="{8EC5771D-7E3C-25E3-BABD-990D0EC56AB0}"/>
+                  </a:ext>
+                </a:extLst>
+              </p14:cNvPr>
+              <p14:cNvContentPartPr/>
+              <p14:nvPr/>
+            </p14:nvContentPartPr>
+            <p14:xfrm>
+              <a:off x="2926872" y="2242224"/>
+              <a:ext cx="2140200" cy="604440"/>
+            </p14:xfrm>
+          </p:contentPart>
+        </mc:Choice>
+        <mc:Fallback>
+          <p:pic>
+            <p:nvPicPr>
+              <p:cNvPr id="2" name="Ink 1">
+                <a:extLst>
+                  <a:ext uri="{FF2B5EF4-FFF2-40B4-BE49-F238E27FC236}">
+                    <a16:creationId xmlns:a16="http://schemas.microsoft.com/office/drawing/2014/main" id="{8EC5771D-7E3C-25E3-BABD-990D0EC56AB0}"/>
+                  </a:ext>
+                </a:extLst>
+              </p:cNvPr>
+              <p:cNvPicPr/>
+              <p:nvPr/>
+            </p:nvPicPr>
+            <p:blipFill>
+              <a:blip r:embed="rId5"/>
+              <a:stretch>
+                <a:fillRect/>
+              </a:stretch>
+            </p:blipFill>
+            <p:spPr>
+              <a:xfrm>
+                <a:off x="2918232" y="2233224"/>
+                <a:ext cx="2157840" cy="622080"/>
+              </a:xfrm>
+              <a:prstGeom prst="rect">
+                <a:avLst/>
+              </a:prstGeom>
+            </p:spPr>
+          </p:pic>
+        </mc:Fallback>
+      </mc:AlternateContent>
+      <mc:AlternateContent xmlns:mc="http://schemas.openxmlformats.org/markup-compatibility/2006">
+        <mc:Choice xmlns:p14="http://schemas.microsoft.com/office/powerpoint/2010/main" Requires="p14">
+          <p:contentPart p14:bwMode="auto" r:id="rId6">
+            <p14:nvContentPartPr>
+              <p14:cNvPr id="4" name="Ink 3">
+                <a:extLst>
+                  <a:ext uri="{FF2B5EF4-FFF2-40B4-BE49-F238E27FC236}">
+                    <a16:creationId xmlns:a16="http://schemas.microsoft.com/office/drawing/2014/main" id="{4D1E808C-2373-B0E4-CCAE-B7DCA5AB6A06}"/>
+                  </a:ext>
+                </a:extLst>
+              </p14:cNvPr>
+              <p14:cNvContentPartPr/>
+              <p14:nvPr/>
+            </p14:nvContentPartPr>
+            <p14:xfrm>
+              <a:off x="2957832" y="2083824"/>
+              <a:ext cx="3291840" cy="366120"/>
+            </p14:xfrm>
+          </p:contentPart>
+        </mc:Choice>
+        <mc:Fallback>
+          <p:pic>
+            <p:nvPicPr>
+              <p:cNvPr id="4" name="Ink 3">
+                <a:extLst>
+                  <a:ext uri="{FF2B5EF4-FFF2-40B4-BE49-F238E27FC236}">
+                    <a16:creationId xmlns:a16="http://schemas.microsoft.com/office/drawing/2014/main" id="{4D1E808C-2373-B0E4-CCAE-B7DCA5AB6A06}"/>
+                  </a:ext>
+                </a:extLst>
+              </p:cNvPr>
+              <p:cNvPicPr/>
+              <p:nvPr/>
+            </p:nvPicPr>
+            <p:blipFill>
+              <a:blip r:embed="rId7"/>
+              <a:stretch>
+                <a:fillRect/>
+              </a:stretch>
+            </p:blipFill>
+            <p:spPr>
+              <a:xfrm>
+                <a:off x="2948832" y="2074824"/>
+                <a:ext cx="3309480" cy="383760"/>
+              </a:xfrm>
+              <a:prstGeom prst="rect">
+                <a:avLst/>
+              </a:prstGeom>
+            </p:spPr>
+          </p:pic>
+        </mc:Fallback>
+      </mc:AlternateContent>
+      <mc:AlternateContent xmlns:mc="http://schemas.openxmlformats.org/markup-compatibility/2006">
+        <mc:Choice xmlns:p14="http://schemas.microsoft.com/office/powerpoint/2010/main" Requires="p14">
+          <p:contentPart p14:bwMode="auto" r:id="rId8">
+            <p14:nvContentPartPr>
+              <p14:cNvPr id="5" name="Ink 4">
+                <a:extLst>
+                  <a:ext uri="{FF2B5EF4-FFF2-40B4-BE49-F238E27FC236}">
+                    <a16:creationId xmlns:a16="http://schemas.microsoft.com/office/drawing/2014/main" id="{0690DBE7-8108-A610-9AB7-09B39C69A520}"/>
+                  </a:ext>
+                </a:extLst>
+              </p14:cNvPr>
+              <p14:cNvContentPartPr/>
+              <p14:nvPr/>
+            </p14:nvContentPartPr>
+            <p14:xfrm>
+              <a:off x="806112" y="1309824"/>
+              <a:ext cx="360" cy="360"/>
+            </p14:xfrm>
+          </p:contentPart>
+        </mc:Choice>
+        <mc:Fallback>
+          <p:pic>
+            <p:nvPicPr>
+              <p:cNvPr id="5" name="Ink 4">
+                <a:extLst>
+                  <a:ext uri="{FF2B5EF4-FFF2-40B4-BE49-F238E27FC236}">
+                    <a16:creationId xmlns:a16="http://schemas.microsoft.com/office/drawing/2014/main" id="{0690DBE7-8108-A610-9AB7-09B39C69A520}"/>
+                  </a:ext>
+                </a:extLst>
+              </p:cNvPr>
+              <p:cNvPicPr/>
+              <p:nvPr/>
+            </p:nvPicPr>
+            <p:blipFill>
+              <a:blip r:embed="rId9"/>
+              <a:stretch>
+                <a:fillRect/>
+              </a:stretch>
+            </p:blipFill>
+            <p:spPr>
+              <a:xfrm>
+                <a:off x="797112" y="1301184"/>
+                <a:ext cx="18000" cy="18000"/>
+              </a:xfrm>
+              <a:prstGeom prst="rect">
+                <a:avLst/>
+              </a:prstGeom>
+            </p:spPr>
+          </p:pic>
+        </mc:Fallback>
+      </mc:AlternateContent>
+    </p:spTree>
+    <p:extLst>
+      <p:ext uri="{BB962C8B-B14F-4D97-AF65-F5344CB8AC3E}">
+        <p14:creationId xmlns:p14="http://schemas.microsoft.com/office/powerpoint/2010/main" val="2204136246"/>
+      </p:ext>
+    </p:extLst>
+  </p:cSld>
+  <p:clrMapOvr>
+    <a:masterClrMapping/>
+  </p:clrMapOvr>
+  <mc:AlternateContent xmlns:mc="http://schemas.openxmlformats.org/markup-compatibility/2006">
+    <mc:Choice xmlns:p14="http://schemas.microsoft.com/office/powerpoint/2010/main" Requires="p14">
+      <p:transition spd="med" p14:dur="700">
+        <p:fade/>
+      </p:transition>
+    </mc:Choice>
+    <mc:Fallback>
+      <p:transition spd="med">
+        <p:fade/>
+      </p:transition>
+    </mc:Fallback>
+  </mc:AlternateContent>
+  <p:timing>
+    <p:tnLst>
+      <p:par>
+        <p:cTn id="1" dur="indefinite" restart="never" nodeType="tmRoot">
+          <p:childTnLst>
+            <p:seq concurrent="1" nextAc="seek">
+              <p:cTn id="2" dur="indefinite" nodeType="mainSeq">
+                <p:childTnLst>
+                  <p:par>
+                    <p:cTn id="3" fill="hold">
+                      <p:stCondLst>
+                        <p:cond delay="indefinite"/>
+                      </p:stCondLst>
+                      <p:childTnLst>
+                        <p:par>
+                          <p:cTn id="4" fill="hold">
+                            <p:stCondLst>
+                              <p:cond delay="0"/>
+                            </p:stCondLst>
+                            <p:childTnLst>
+                              <p:par>
+                                <p:cTn id="5" presetID="1" presetClass="entr" presetSubtype="0" fill="hold" nodeType="clickEffect">
+                                  <p:stCondLst>
+                                    <p:cond delay="0"/>
+                                  </p:stCondLst>
+                                  <p:childTnLst>
+                                    <p:set>
+                                      <p:cBhvr>
+                                        <p:cTn id="6" dur="1" fill="hold">
+                                          <p:stCondLst>
+                                            <p:cond delay="0"/>
+                                          </p:stCondLst>
+                                        </p:cTn>
+                                        <p:tgtEl>
+                                          <p:spTgt spid="3"/>
+                                        </p:tgtEl>
+                                        <p:attrNameLst>
+                                          <p:attrName>style.visibility</p:attrName>
+                                        </p:attrNameLst>
+                                      </p:cBhvr>
+                                      <p:to>
+                                        <p:strVal val="visible"/>
+                                      </p:to>
+                                    </p:set>
+                                  </p:childTnLst>
+                                </p:cTn>
+                              </p:par>
+                            </p:childTnLst>
+                          </p:cTn>
+                        </p:par>
+                      </p:childTnLst>
+                    </p:cTn>
+                  </p:par>
+                  <p:par>
+                    <p:cTn id="7" fill="hold">
+                      <p:stCondLst>
+                        <p:cond delay="indefinite"/>
+                      </p:stCondLst>
+                      <p:childTnLst>
+                        <p:par>
+                          <p:cTn id="8" fill="hold">
+                            <p:stCondLst>
+                              <p:cond delay="0"/>
+                            </p:stCondLst>
+                            <p:childTnLst>
+                              <p:par>
+                                <p:cTn id="9" presetID="1" presetClass="entr" presetSubtype="0" fill="hold" nodeType="clickEffect">
+                                  <p:stCondLst>
+                                    <p:cond delay="0"/>
+                                  </p:stCondLst>
+                                  <p:childTnLst>
+                                    <p:set>
+                                      <p:cBhvr>
+                                        <p:cTn id="10" dur="1" fill="hold">
+                                          <p:stCondLst>
+                                            <p:cond delay="0"/>
+                                          </p:stCondLst>
+                                        </p:cTn>
+                                        <p:tgtEl>
+                                          <p:spTgt spid="2"/>
+                                        </p:tgtEl>
+                                        <p:attrNameLst>
+                                          <p:attrName>style.visibility</p:attrName>
+                                        </p:attrNameLst>
+                                      </p:cBhvr>
+                                      <p:to>
+                                        <p:strVal val="visible"/>
+                                      </p:to>
+                                    </p:set>
+                                  </p:childTnLst>
+                                </p:cTn>
+                              </p:par>
+                              <p:par>
+                                <p:cTn id="11" presetID="1" presetClass="entr" presetSubtype="0" fill="hold" nodeType="withEffect">
+                                  <p:stCondLst>
+                                    <p:cond delay="0"/>
+                                  </p:stCondLst>
+                                  <p:childTnLst>
+                                    <p:set>
+                                      <p:cBhvr>
+                                        <p:cTn id="12" dur="1" fill="hold">
+                                          <p:stCondLst>
+                                            <p:cond delay="0"/>
+                                          </p:stCondLst>
+                                        </p:cTn>
+                                        <p:tgtEl>
+                                          <p:spTgt spid="4"/>
+                                        </p:tgtEl>
+                                        <p:attrNameLst>
+                                          <p:attrName>style.visibility</p:attrName>
+                                        </p:attrNameLst>
+                                      </p:cBhvr>
+                                      <p:to>
+                                        <p:strVal val="visible"/>
+                                      </p:to>
+                                    </p:set>
+                                  </p:childTnLst>
+                                </p:cTn>
+                              </p:par>
+                            </p:childTnLst>
+                          </p:cTn>
+                        </p:par>
+                      </p:childTnLst>
+                    </p:cTn>
+                  </p:par>
+                </p:childTnLst>
+              </p:cTn>
+              <p:prevCondLst>
+                <p:cond evt="onPrev" delay="0">
+                  <p:tgtEl>
+                    <p:sldTgt/>
+                  </p:tgtEl>
+                </p:cond>
+              </p:prevCondLst>
+              <p:nextCondLst>
+                <p:cond evt="onNext" delay="0">
+                  <p:tgtEl>
+                    <p:sldTgt/>
+                  </p:tgtEl>
+                </p:cond>
+              </p:nextCondLst>
+            </p:seq>
+          </p:childTnLst>
+        </p:cTn>
+      </p:par>
+    </p:tnLst>
+  </p:timing>
+</p:sld>
+</file>
+
+<file path=ppt/slides/slide12.xml><?xml version="1.0" encoding="utf-8"?>
+<p:sld xmlns:a="http://schemas.openxmlformats.org/drawingml/2006/main" xmlns:r="http://schemas.openxmlformats.org/officeDocument/2006/relationships" xmlns:p="http://schemas.openxmlformats.org/presentationml/2006/main">
+  <p:cSld>
+    <p:spTree>
+      <p:nvGrpSpPr>
+        <p:cNvPr id="1" name="Shape 68">
+          <a:extLst>
+            <a:ext uri="{FF2B5EF4-FFF2-40B4-BE49-F238E27FC236}">
+              <a16:creationId xmlns:a16="http://schemas.microsoft.com/office/drawing/2014/main" id="{001D551E-10FE-55B7-79B9-F03177E810B5}"/>
+            </a:ext>
+          </a:extLst>
+        </p:cNvPr>
+        <p:cNvGrpSpPr/>
+        <p:nvPr/>
+      </p:nvGrpSpPr>
+      <p:grpSpPr>
+        <a:xfrm>
+          <a:off x="0" y="0"/>
+          <a:ext cx="0" cy="0"/>
+          <a:chOff x="0" y="0"/>
+          <a:chExt cx="0" cy="0"/>
+        </a:xfrm>
+      </p:grpSpPr>
+      <p:sp>
+        <p:nvSpPr>
+          <p:cNvPr id="69" name="Google Shape;69;p12">
+            <a:extLst>
+              <a:ext uri="{FF2B5EF4-FFF2-40B4-BE49-F238E27FC236}">
+                <a16:creationId xmlns:a16="http://schemas.microsoft.com/office/drawing/2014/main" id="{1848F6E1-3D32-B6C9-E876-300D75BCB14D}"/>
+              </a:ext>
+            </a:extLst>
+          </p:cNvPr>
+          <p:cNvSpPr txBox="1">
+            <a:spLocks noGrp="1"/>
+          </p:cNvSpPr>
+          <p:nvPr>
+            <p:ph type="title"/>
+          </p:nvPr>
+        </p:nvSpPr>
+        <p:spPr>
+          <a:prstGeom prst="rect">
+            <a:avLst/>
+          </a:prstGeom>
+          <a:noFill/>
+          <a:ln>
+            <a:noFill/>
+          </a:ln>
+        </p:spPr>
+        <p:txBody>
+          <a:bodyPr spcFirstLastPara="1" wrap="square" lIns="91425" tIns="91425" rIns="91425" bIns="91425" anchor="b" anchorCtr="0">
+            <a:noAutofit/>
+          </a:bodyPr>
+          <a:lstStyle/>
+          <a:p>
+            <a:pPr marL="0" marR="0" lvl="0" indent="0" algn="l" rtl="0">
+              <a:lnSpc>
+                <a:spcPct val="100000"/>
+              </a:lnSpc>
+              <a:spcBef>
+                <a:spcPts val="0"/>
+              </a:spcBef>
+              <a:spcAft>
+                <a:spcPts val="0"/>
+              </a:spcAft>
+              <a:buClr>
+                <a:schemeClr val="lt1"/>
+              </a:buClr>
+              <a:buSzPts val="3200"/>
+              <a:buFont typeface="Open Sans SemiBold"/>
+              <a:buNone/>
+            </a:pPr>
+            <a:r>
+              <a:rPr lang="en-US" sz="2400" dirty="0">
+                <a:latin typeface="Inter"/>
+                <a:ea typeface="Inter"/>
+                <a:cs typeface="Inter"/>
+                <a:sym typeface="Inter"/>
+              </a:rPr>
+              <a:t>Document Dependencies (normative references)</a:t>
+            </a:r>
+            <a:endParaRPr sz="2400" i="0" u="none" strike="noStrike" cap="none" dirty="0">
+              <a:solidFill>
+                <a:schemeClr val="lt1"/>
+              </a:solidFill>
+              <a:latin typeface="Inter"/>
+              <a:ea typeface="Inter"/>
+              <a:cs typeface="Inter"/>
+              <a:sym typeface="Inter"/>
+            </a:endParaRPr>
+          </a:p>
+        </p:txBody>
+      </p:sp>
+      <p:pic>
+        <p:nvPicPr>
+          <p:cNvPr id="3" name="Picture 2">
+            <a:extLst>
+              <a:ext uri="{FF2B5EF4-FFF2-40B4-BE49-F238E27FC236}">
+                <a16:creationId xmlns:a16="http://schemas.microsoft.com/office/drawing/2014/main" id="{CB9D8D57-A153-EABD-CDC8-AFFB902A36FB}"/>
+              </a:ext>
+            </a:extLst>
+          </p:cNvPr>
+          <p:cNvPicPr>
+            <a:picLocks noChangeAspect="1"/>
+          </p:cNvPicPr>
+          <p:nvPr/>
+        </p:nvPicPr>
+        <p:blipFill>
+          <a:blip r:embed="rId3"/>
+          <a:stretch>
+            <a:fillRect/>
+          </a:stretch>
+        </p:blipFill>
+        <p:spPr>
+          <a:xfrm>
+            <a:off x="158699" y="1216427"/>
+            <a:ext cx="7772400" cy="2710646"/>
+          </a:xfrm>
+          <a:prstGeom prst="rect">
+            <a:avLst/>
+          </a:prstGeom>
+        </p:spPr>
+      </p:pic>
+      <mc:AlternateContent xmlns:mc="http://schemas.openxmlformats.org/markup-compatibility/2006">
+        <mc:Choice xmlns:p14="http://schemas.microsoft.com/office/powerpoint/2010/main" Requires="p14">
+          <p:contentPart p14:bwMode="auto" r:id="rId4">
+            <p14:nvContentPartPr>
+              <p14:cNvPr id="4" name="Ink 3">
+                <a:extLst>
+                  <a:ext uri="{FF2B5EF4-FFF2-40B4-BE49-F238E27FC236}">
+                    <a16:creationId xmlns:a16="http://schemas.microsoft.com/office/drawing/2014/main" id="{8432FAF7-073D-E48F-52DC-3AC912CA565B}"/>
+                  </a:ext>
+                </a:extLst>
+              </p14:cNvPr>
+              <p14:cNvContentPartPr/>
+              <p14:nvPr/>
+            </p14:nvContentPartPr>
+            <p14:xfrm>
+              <a:off x="103752" y="1758024"/>
+              <a:ext cx="4430520" cy="736920"/>
+            </p14:xfrm>
+          </p:contentPart>
+        </mc:Choice>
+        <mc:Fallback>
+          <p:pic>
+            <p:nvPicPr>
+              <p:cNvPr id="4" name="Ink 3">
+                <a:extLst>
+                  <a:ext uri="{FF2B5EF4-FFF2-40B4-BE49-F238E27FC236}">
+                    <a16:creationId xmlns:a16="http://schemas.microsoft.com/office/drawing/2014/main" id="{8432FAF7-073D-E48F-52DC-3AC912CA565B}"/>
+                  </a:ext>
+                </a:extLst>
+              </p:cNvPr>
+              <p:cNvPicPr/>
+              <p:nvPr/>
+            </p:nvPicPr>
+            <p:blipFill>
+              <a:blip r:embed="rId5"/>
+              <a:stretch>
+                <a:fillRect/>
+              </a:stretch>
+            </p:blipFill>
+            <p:spPr>
+              <a:xfrm>
+                <a:off x="95112" y="1749024"/>
+                <a:ext cx="4448160" cy="754560"/>
+              </a:xfrm>
+              <a:prstGeom prst="rect">
+                <a:avLst/>
+              </a:prstGeom>
+            </p:spPr>
+          </p:pic>
+        </mc:Fallback>
+      </mc:AlternateContent>
+    </p:spTree>
+    <p:extLst>
+      <p:ext uri="{BB962C8B-B14F-4D97-AF65-F5344CB8AC3E}">
+        <p14:creationId xmlns:p14="http://schemas.microsoft.com/office/powerpoint/2010/main" val="3187459411"/>
+      </p:ext>
+    </p:extLst>
+  </p:cSld>
+  <p:clrMapOvr>
+    <a:masterClrMapping/>
+  </p:clrMapOvr>
+  <mc:AlternateContent xmlns:mc="http://schemas.openxmlformats.org/markup-compatibility/2006">
+    <mc:Choice xmlns:p14="http://schemas.microsoft.com/office/powerpoint/2010/main" Requires="p14">
+      <p:transition spd="med" p14:dur="700">
+        <p:fade/>
+      </p:transition>
+    </mc:Choice>
+    <mc:Fallback>
+      <p:transition spd="med">
+        <p:fade/>
+      </p:transition>
+    </mc:Fallback>
+  </mc:AlternateContent>
+  <p:timing>
+    <p:tnLst>
+      <p:par>
+        <p:cTn id="1" dur="indefinite" restart="never" nodeType="tmRoot">
+          <p:childTnLst>
+            <p:seq concurrent="1" nextAc="seek">
+              <p:cTn id="2" dur="indefinite" nodeType="mainSeq">
+                <p:childTnLst>
+                  <p:par>
+                    <p:cTn id="3" fill="hold">
+                      <p:stCondLst>
+                        <p:cond delay="indefinite"/>
+                      </p:stCondLst>
+                      <p:childTnLst>
+                        <p:par>
+                          <p:cTn id="4" fill="hold">
+                            <p:stCondLst>
+                              <p:cond delay="0"/>
+                            </p:stCondLst>
+                            <p:childTnLst>
+                              <p:par>
+                                <p:cTn id="5" presetID="1" presetClass="entr" presetSubtype="0" fill="hold" nodeType="clickEffect">
+                                  <p:stCondLst>
+                                    <p:cond delay="0"/>
+                                  </p:stCondLst>
+                                  <p:childTnLst>
+                                    <p:set>
+                                      <p:cBhvr>
+                                        <p:cTn id="6" dur="1" fill="hold">
+                                          <p:stCondLst>
+                                            <p:cond delay="0"/>
+                                          </p:stCondLst>
+                                        </p:cTn>
+                                        <p:tgtEl>
+                                          <p:spTgt spid="3"/>
+                                        </p:tgtEl>
+                                        <p:attrNameLst>
+                                          <p:attrName>style.visibility</p:attrName>
+                                        </p:attrNameLst>
+                                      </p:cBhvr>
+                                      <p:to>
+                                        <p:strVal val="visible"/>
+                                      </p:to>
+                                    </p:set>
+                                  </p:childTnLst>
+                                </p:cTn>
+                              </p:par>
+                            </p:childTnLst>
+                          </p:cTn>
+                        </p:par>
+                      </p:childTnLst>
+                    </p:cTn>
+                  </p:par>
+                  <p:par>
+                    <p:cTn id="7" fill="hold">
+                      <p:stCondLst>
+                        <p:cond delay="indefinite"/>
+                      </p:stCondLst>
+                      <p:childTnLst>
+                        <p:par>
+                          <p:cTn id="8" fill="hold">
+                            <p:stCondLst>
+                              <p:cond delay="0"/>
+                            </p:stCondLst>
+                            <p:childTnLst>
+                              <p:par>
+                                <p:cTn id="9" presetID="1" presetClass="entr" presetSubtype="0" fill="hold" nodeType="clickEffect">
+                                  <p:stCondLst>
+                                    <p:cond delay="0"/>
+                                  </p:stCondLst>
+                                  <p:childTnLst>
+                                    <p:set>
+                                      <p:cBhvr>
+                                        <p:cTn id="10" dur="1" fill="hold">
+                                          <p:stCondLst>
+                                            <p:cond delay="0"/>
+                                          </p:stCondLst>
+                                        </p:cTn>
+                                        <p:tgtEl>
+                                          <p:spTgt spid="4"/>
+                                        </p:tgtEl>
+                                        <p:attrNameLst>
+                                          <p:attrName>style.visibility</p:attrName>
+                                        </p:attrNameLst>
+                                      </p:cBhvr>
+                                      <p:to>
+                                        <p:strVal val="visible"/>
+                                      </p:to>
+                                    </p:set>
+                                  </p:childTnLst>
+                                </p:cTn>
+                              </p:par>
+                            </p:childTnLst>
+                          </p:cTn>
+                        </p:par>
+                      </p:childTnLst>
+                    </p:cTn>
+                  </p:par>
+                </p:childTnLst>
+              </p:cTn>
+              <p:prevCondLst>
+                <p:cond evt="onPrev" delay="0">
+                  <p:tgtEl>
+                    <p:sldTgt/>
+                  </p:tgtEl>
+                </p:cond>
+              </p:prevCondLst>
+              <p:nextCondLst>
+                <p:cond evt="onNext" delay="0">
+                  <p:tgtEl>
+                    <p:sldTgt/>
+                  </p:tgtEl>
+                </p:cond>
+              </p:nextCondLst>
+            </p:seq>
+          </p:childTnLst>
+        </p:cTn>
+      </p:par>
+    </p:tnLst>
+  </p:timing>
+</p:sld>
+</file>
+
+<file path=ppt/slides/slide13.xml><?xml version="1.0" encoding="utf-8"?>
+<p:sld xmlns:a="http://schemas.openxmlformats.org/drawingml/2006/main" xmlns:r="http://schemas.openxmlformats.org/officeDocument/2006/relationships" xmlns:p="http://schemas.openxmlformats.org/presentationml/2006/main">
+  <p:cSld>
+    <p:spTree>
+      <p:nvGrpSpPr>
+        <p:cNvPr id="1" name="Shape 68">
+          <a:extLst>
+            <a:ext uri="{FF2B5EF4-FFF2-40B4-BE49-F238E27FC236}">
               <a16:creationId xmlns:a16="http://schemas.microsoft.com/office/drawing/2014/main" id="{944F257A-7422-C74D-1144-87352D7E8B6A}"/>
             </a:ext>
           </a:extLst>
@@ -11556,6 +12294,67 @@
           </a:p>
         </p:txBody>
       </p:sp>
+      <p:sp>
+        <p:nvSpPr>
+          <p:cNvPr id="2" name="Text Placeholder 2">
+            <a:extLst>
+              <a:ext uri="{FF2B5EF4-FFF2-40B4-BE49-F238E27FC236}">
+                <a16:creationId xmlns:a16="http://schemas.microsoft.com/office/drawing/2014/main" id="{EC61995F-2E89-DA6C-2F25-66703AE0AA93}"/>
+              </a:ext>
+            </a:extLst>
+          </p:cNvPr>
+          <p:cNvSpPr>
+            <a:spLocks noGrp="1"/>
+          </p:cNvSpPr>
+          <p:nvPr>
+            <p:ph type="body" idx="1"/>
+          </p:nvPr>
+        </p:nvSpPr>
+        <p:spPr>
+          <a:xfrm>
+            <a:off x="471900" y="1919074"/>
+            <a:ext cx="8222100" cy="2710201"/>
+          </a:xfrm>
+        </p:spPr>
+        <p:txBody>
+          <a:bodyPr/>
+          <a:lstStyle/>
+          <a:p>
+            <a:r>
+              <a:rPr lang="en-CA" dirty="0"/>
+              <a:t>Very interested in the “NETCONF/YANG Push integration with Apache Kafka and TSDB” work. Kudos for the focus on running code.</a:t>
+            </a:r>
+          </a:p>
+          <a:p>
+            <a:r>
+              <a:rPr lang="en-CA" dirty="0"/>
+              <a:t>More work to do on Binary YANG Push (e.g. SID </a:t>
+            </a:r>
+            <a:r>
+              <a:rPr lang="en-CA"/>
+              <a:t>file management)</a:t>
+            </a:r>
+            <a:endParaRPr lang="en-CA" dirty="0"/>
+          </a:p>
+          <a:p>
+            <a:r>
+              <a:rPr lang="en-CA" dirty="0"/>
+              <a:t>Suggestion to update charter for “AI for network management automation and related operational issues” e.g. management agent architecture </a:t>
+            </a:r>
+            <a:r>
+              <a:rPr lang="en-CA" dirty="0" err="1"/>
+              <a:t>etc</a:t>
+            </a:r>
+            <a:endParaRPr lang="en-CA" dirty="0"/>
+          </a:p>
+          <a:p>
+            <a:endParaRPr lang="en-CA" dirty="0"/>
+          </a:p>
+          <a:p>
+            <a:endParaRPr lang="en-US" dirty="0"/>
+          </a:p>
+        </p:txBody>
+      </p:sp>
     </p:spTree>
     <p:extLst>
       <p:ext uri="{BB962C8B-B14F-4D97-AF65-F5344CB8AC3E}">
@@ -11581,7 +12380,7 @@
 </p:sld>
 </file>
 
-<file path=ppt/slides/slide11.xml><?xml version="1.0" encoding="utf-8"?>
+<file path=ppt/slides/slide14.xml><?xml version="1.0" encoding="utf-8"?>
 <p:sld xmlns:a="http://schemas.openxmlformats.org/drawingml/2006/main" xmlns:r="http://schemas.openxmlformats.org/officeDocument/2006/relationships" xmlns:p="http://schemas.openxmlformats.org/presentationml/2006/main" show="0">
   <p:cSld>
     <p:spTree>
@@ -11928,7 +12727,7 @@
             </a:pPr>
             <a:fld id="{00000000-1234-1234-1234-123412341234}" type="slidenum">
               <a:rPr lang="en-US"/>
-              <a:t>11</a:t>
+              <a:t>14</a:t>
             </a:fld>
             <a:endParaRPr dirty="0"/>
           </a:p>
@@ -13565,11 +14364,7 @@
             </a:r>
             <a:r>
               <a:rPr lang="en-CA" dirty="0"/>
-              <a:t>  our </a:t>
-            </a:r>
-            <a:r>
-              <a:rPr lang="en-CA"/>
-              <a:t>departing secretary.</a:t>
+              <a:t>  our departing secretary.</a:t>
             </a:r>
             <a:endParaRPr lang="en-US" dirty="0"/>
           </a:p>
@@ -13876,7 +14671,7 @@
         <p:cNvPr id="1" name="Shape 68">
           <a:extLst>
             <a:ext uri="{FF2B5EF4-FFF2-40B4-BE49-F238E27FC236}">
-              <a16:creationId xmlns:a16="http://schemas.microsoft.com/office/drawing/2014/main" id="{0B82840E-8823-51A0-8E43-3C993C1B0B9C}"/>
+              <a16:creationId xmlns:a16="http://schemas.microsoft.com/office/drawing/2014/main" id="{022BF7CC-BDBC-52A3-14EF-9FA6AB072D27}"/>
             </a:ext>
           </a:extLst>
         </p:cNvPr>
@@ -13893,10 +14688,10 @@
       </p:grpSpPr>
       <p:pic>
         <p:nvPicPr>
-          <p:cNvPr id="11" name="Picture 10" descr="A screenshot of a computer&#10;&#10;AI-generated content may be incorrect.">
+          <p:cNvPr id="8" name="Picture 7">
             <a:extLst>
               <a:ext uri="{FF2B5EF4-FFF2-40B4-BE49-F238E27FC236}">
-                <a16:creationId xmlns:a16="http://schemas.microsoft.com/office/drawing/2014/main" id="{9E310682-4611-83BF-D44B-68AE8B9060A8}"/>
+                <a16:creationId xmlns:a16="http://schemas.microsoft.com/office/drawing/2014/main" id="{B59081C1-25BC-4BB3-2D0C-D005C1D04F62}"/>
               </a:ext>
             </a:extLst>
           </p:cNvPr>
@@ -13913,8 +14708,8 @@
         </p:blipFill>
         <p:spPr>
           <a:xfrm>
-            <a:off x="1" y="722269"/>
-            <a:ext cx="7251590" cy="4421231"/>
+            <a:off x="0" y="791472"/>
+            <a:ext cx="7457839" cy="4378551"/>
           </a:xfrm>
           <a:prstGeom prst="rect">
             <a:avLst/>
@@ -13926,7 +14721,7 @@
           <p:cNvPr id="69" name="Google Shape;69;p12">
             <a:extLst>
               <a:ext uri="{FF2B5EF4-FFF2-40B4-BE49-F238E27FC236}">
-                <a16:creationId xmlns:a16="http://schemas.microsoft.com/office/drawing/2014/main" id="{379F77B1-2B3F-CAA6-FB67-67C4478615FD}"/>
+                <a16:creationId xmlns:a16="http://schemas.microsoft.com/office/drawing/2014/main" id="{BE064739-DE95-D869-F304-BC9296152BB8}"/>
               </a:ext>
             </a:extLst>
           </p:cNvPr>
@@ -13995,7 +14790,7 @@
           <p:cNvPr id="6" name="Bulle narrative : ronde 8">
             <a:extLst>
               <a:ext uri="{FF2B5EF4-FFF2-40B4-BE49-F238E27FC236}">
-                <a16:creationId xmlns:a16="http://schemas.microsoft.com/office/drawing/2014/main" id="{7810E069-5DC9-93DB-6EE3-4270F84AFED9}"/>
+                <a16:creationId xmlns:a16="http://schemas.microsoft.com/office/drawing/2014/main" id="{02B2F86E-5F6A-CCDD-A367-161F7EE3C322}"/>
               </a:ext>
             </a:extLst>
           </p:cNvPr>
@@ -14004,13 +14799,13 @@
         </p:nvSpPr>
         <p:spPr>
           <a:xfrm>
-            <a:off x="7325439" y="3637074"/>
+            <a:off x="7642049" y="4112101"/>
             <a:ext cx="1343250" cy="921123"/>
           </a:xfrm>
           <a:prstGeom prst="wedgeEllipseCallout">
             <a:avLst>
-              <a:gd name="adj1" fmla="val -192507"/>
-              <a:gd name="adj2" fmla="val 61234"/>
+              <a:gd name="adj1" fmla="val -231309"/>
+              <a:gd name="adj2" fmla="val 45351"/>
             </a:avLst>
           </a:prstGeom>
           <a:solidFill>
@@ -14049,7 +14844,7 @@
                   <a:schemeClr val="accent4"/>
                 </a:solidFill>
               </a:rPr>
-              <a:t>RFC Editor Queue</a:t>
+              <a:t>Our first RFC!</a:t>
             </a:r>
           </a:p>
         </p:txBody>
@@ -14059,7 +14854,7 @@
           <p:cNvPr id="5" name="Bulle narrative : ronde 8">
             <a:extLst>
               <a:ext uri="{FF2B5EF4-FFF2-40B4-BE49-F238E27FC236}">
-                <a16:creationId xmlns:a16="http://schemas.microsoft.com/office/drawing/2014/main" id="{E67EEA6E-C123-F5BF-38D5-1E1611E7A6E0}"/>
+                <a16:creationId xmlns:a16="http://schemas.microsoft.com/office/drawing/2014/main" id="{0A1D58D8-286F-327E-4C5D-5B6E3AA79955}"/>
               </a:ext>
             </a:extLst>
           </p:cNvPr>
@@ -14068,13 +14863,13 @@
         </p:nvSpPr>
         <p:spPr>
           <a:xfrm>
-            <a:off x="7369099" y="2339545"/>
+            <a:off x="7685709" y="2721427"/>
             <a:ext cx="1255930" cy="921123"/>
           </a:xfrm>
           <a:prstGeom prst="wedgeEllipseCallout">
             <a:avLst>
-              <a:gd name="adj1" fmla="val -212774"/>
-              <a:gd name="adj2" fmla="val -46760"/>
+              <a:gd name="adj1" fmla="val -238256"/>
+              <a:gd name="adj2" fmla="val 105124"/>
             </a:avLst>
           </a:prstGeom>
           <a:solidFill>
@@ -14108,23 +14903,28 @@
           <a:p>
             <a:pPr algn="ctr"/>
             <a:r>
+              <a:rPr lang="fr-FR" sz="1200" dirty="0" err="1">
+                <a:solidFill>
+                  <a:schemeClr val="accent4"/>
+                </a:solidFill>
+              </a:rPr>
+              <a:t>Cleared</a:t>
+            </a:r>
+            <a:r>
               <a:rPr lang="fr-FR" sz="1200" dirty="0">
                 <a:solidFill>
                   <a:schemeClr val="accent4"/>
                 </a:solidFill>
               </a:rPr>
-              <a:t>WGLC</a:t>
-            </a:r>
-          </a:p>
-          <a:p>
-            <a:pPr algn="ctr"/>
+              <a:t> AD </a:t>
+            </a:r>
             <a:r>
               <a:rPr lang="fr-FR" sz="1200" dirty="0" err="1">
                 <a:solidFill>
                   <a:schemeClr val="accent4"/>
                 </a:solidFill>
               </a:rPr>
-              <a:t>completed</a:t>
+              <a:t>review</a:t>
             </a:r>
             <a:endParaRPr lang="fr-FR" sz="1200" dirty="0">
               <a:solidFill>
@@ -14136,109 +14936,10 @@
       </p:sp>
       <p:sp>
         <p:nvSpPr>
-          <p:cNvPr id="9" name="Bulle narrative : ronde 8">
-            <a:extLst>
-              <a:ext uri="{FF2B5EF4-FFF2-40B4-BE49-F238E27FC236}">
-                <a16:creationId xmlns:a16="http://schemas.microsoft.com/office/drawing/2014/main" id="{50BBA8CB-30AB-A916-E5F5-F7F3B5B40157}"/>
-              </a:ext>
-            </a:extLst>
-          </p:cNvPr>
-          <p:cNvSpPr/>
-          <p:nvPr/>
-        </p:nvSpPr>
-        <p:spPr>
-          <a:xfrm>
-            <a:off x="7325439" y="1330754"/>
-            <a:ext cx="1343250" cy="921123"/>
-          </a:xfrm>
-          <a:prstGeom prst="wedgeEllipseCallout">
-            <a:avLst>
-              <a:gd name="adj1" fmla="val -239468"/>
-              <a:gd name="adj2" fmla="val 18121"/>
-            </a:avLst>
-          </a:prstGeom>
-          <a:solidFill>
-            <a:schemeClr val="tx1"/>
-          </a:solidFill>
-          <a:ln>
-            <a:solidFill>
-              <a:schemeClr val="tx1"/>
-            </a:solidFill>
-          </a:ln>
-        </p:spPr>
-        <p:style>
-          <a:lnRef idx="2">
-            <a:schemeClr val="accent1">
-              <a:shade val="15000"/>
-            </a:schemeClr>
-          </a:lnRef>
-          <a:fillRef idx="1">
-            <a:schemeClr val="accent1"/>
-          </a:fillRef>
-          <a:effectRef idx="0">
-            <a:schemeClr val="accent1"/>
-          </a:effectRef>
-          <a:fontRef idx="minor">
-            <a:schemeClr val="lt1"/>
-          </a:fontRef>
-        </p:style>
-        <p:txBody>
-          <a:bodyPr rtlCol="0" anchor="ctr"/>
-          <a:lstStyle/>
-          <a:p>
-            <a:pPr algn="ctr"/>
-            <a:r>
-              <a:rPr lang="fr-FR" sz="1200" dirty="0" err="1">
-                <a:solidFill>
-                  <a:schemeClr val="accent4"/>
-                </a:solidFill>
-              </a:rPr>
-              <a:t>Adopted</a:t>
-            </a:r>
-            <a:r>
-              <a:rPr lang="fr-FR" sz="1200" dirty="0">
-                <a:solidFill>
-                  <a:schemeClr val="accent4"/>
-                </a:solidFill>
-              </a:rPr>
-              <a:t> </a:t>
-            </a:r>
-            <a:r>
-              <a:rPr lang="fr-FR" sz="1200" dirty="0" err="1">
-                <a:solidFill>
-                  <a:schemeClr val="accent4"/>
-                </a:solidFill>
-              </a:rPr>
-              <a:t>since</a:t>
-            </a:r>
-            <a:r>
-              <a:rPr lang="fr-FR" sz="1200" dirty="0">
-                <a:solidFill>
-                  <a:schemeClr val="accent4"/>
-                </a:solidFill>
-              </a:rPr>
-              <a:t> </a:t>
-            </a:r>
-          </a:p>
-          <a:p>
-            <a:pPr algn="ctr"/>
-            <a:r>
-              <a:rPr lang="fr-FR" sz="1200" dirty="0">
-                <a:solidFill>
-                  <a:schemeClr val="accent4"/>
-                </a:solidFill>
-              </a:rPr>
-              <a:t>IETF 124</a:t>
-            </a:r>
-          </a:p>
-        </p:txBody>
-      </p:sp>
-      <p:sp>
-        <p:nvSpPr>
           <p:cNvPr id="2" name="Slide Number Placeholder 1">
             <a:extLst>
               <a:ext uri="{FF2B5EF4-FFF2-40B4-BE49-F238E27FC236}">
-                <a16:creationId xmlns:a16="http://schemas.microsoft.com/office/drawing/2014/main" id="{6E72AC35-771D-1C2B-0578-89488CAFEE38}"/>
+                <a16:creationId xmlns:a16="http://schemas.microsoft.com/office/drawing/2014/main" id="{49F6B32A-186B-DD08-DF83-AF3BF6008AF0}"/>
               </a:ext>
             </a:extLst>
           </p:cNvPr>
@@ -14274,20 +14975,20 @@
     </p:spTree>
     <p:extLst>
       <p:ext uri="{BB962C8B-B14F-4D97-AF65-F5344CB8AC3E}">
-        <p14:creationId xmlns:p14="http://schemas.microsoft.com/office/powerpoint/2010/main" val="244518723"/>
+        <p14:creationId xmlns:p14="http://schemas.microsoft.com/office/powerpoint/2010/main" val="3105631329"/>
       </p:ext>
     </p:extLst>
   </p:cSld>
   <p:clrMapOvr>
     <a:masterClrMapping/>
   </p:clrMapOvr>
-  <mc:AlternateContent xmlns:mc="http://schemas.openxmlformats.org/markup-compatibility/2006" xmlns:p14="http://schemas.microsoft.com/office/powerpoint/2010/main">
-    <mc:Choice Requires="p14">
+  <mc:AlternateContent xmlns:mc="http://schemas.openxmlformats.org/markup-compatibility/2006">
+    <mc:Choice xmlns:p14="http://schemas.microsoft.com/office/powerpoint/2010/main" Requires="p14">
       <p:transition spd="med" p14:dur="700">
         <p:fade/>
       </p:transition>
     </mc:Choice>
-    <mc:Fallback xmlns="">
+    <mc:Fallback>
       <p:transition spd="med">
         <p:fade/>
       </p:transition>
@@ -14490,12 +15191,20 @@
           <a:lstStyle/>
           <a:p>
             <a:r>
+              <a:rPr lang="fr-FR" dirty="0">
+                <a:solidFill>
+                  <a:srgbClr val="00B0F0"/>
+                </a:solidFill>
+              </a:rPr>
+              <a:t>??? (</a:t>
+            </a:r>
+            <a:r>
               <a:rPr lang="fr-FR" dirty="0" err="1">
                 <a:solidFill>
                   <a:srgbClr val="00B0F0"/>
                 </a:solidFill>
               </a:rPr>
-              <a:t>November</a:t>
+              <a:t>next</a:t>
             </a:r>
             <a:r>
               <a:rPr lang="fr-FR" dirty="0">
@@ -14503,7 +15212,7 @@
                   <a:srgbClr val="00B0F0"/>
                 </a:solidFill>
               </a:rPr>
-              <a:t> 2026 </a:t>
+              <a:t> slides) </a:t>
             </a:r>
           </a:p>
         </p:txBody>
@@ -14596,37 +15305,8 @@
                   <a:srgbClr val="00B0F0"/>
                 </a:solidFill>
               </a:rPr>
-              <a:t>Our </a:t>
-            </a:r>
-            <a:r>
-              <a:rPr lang="fr-FR" dirty="0" err="1">
-                <a:solidFill>
-                  <a:srgbClr val="00B0F0"/>
-                </a:solidFill>
-              </a:rPr>
-              <a:t>next</a:t>
-            </a:r>
-            <a:r>
-              <a:rPr lang="fr-FR" dirty="0">
-                <a:solidFill>
-                  <a:srgbClr val="00B0F0"/>
-                </a:solidFill>
-              </a:rPr>
-              <a:t> </a:t>
-            </a:r>
-            <a:r>
-              <a:rPr lang="fr-FR" dirty="0" err="1">
-                <a:solidFill>
-                  <a:srgbClr val="00B0F0"/>
-                </a:solidFill>
-              </a:rPr>
-              <a:t>target</a:t>
-            </a:r>
-            <a:endParaRPr lang="fr-FR" dirty="0">
-              <a:solidFill>
-                <a:srgbClr val="00B0F0"/>
-              </a:solidFill>
-            </a:endParaRPr>
+              <a:t>Soon</a:t>
+            </a:r>
           </a:p>
         </p:txBody>
       </p:sp>
@@ -14819,7 +15499,23 @@
                   <a:srgbClr val="00B0F0"/>
                 </a:solidFill>
               </a:rPr>
-              <a:t>July 2026 </a:t>
+              <a:t>??? (</a:t>
+            </a:r>
+            <a:r>
+              <a:rPr lang="fr-FR" dirty="0" err="1">
+                <a:solidFill>
+                  <a:srgbClr val="00B0F0"/>
+                </a:solidFill>
+              </a:rPr>
+              <a:t>next</a:t>
+            </a:r>
+            <a:r>
+              <a:rPr lang="fr-FR" dirty="0">
+                <a:solidFill>
+                  <a:srgbClr val="00B0F0"/>
+                </a:solidFill>
+              </a:rPr>
+              <a:t> slides)</a:t>
             </a:r>
           </a:p>
         </p:txBody>
@@ -14911,7 +15607,7 @@
         <p:cNvPr id="1" name="Shape 68">
           <a:extLst>
             <a:ext uri="{FF2B5EF4-FFF2-40B4-BE49-F238E27FC236}">
-              <a16:creationId xmlns:a16="http://schemas.microsoft.com/office/drawing/2014/main" id="{4528F9CB-41FD-5D2B-6FEE-E3B062EC0FE0}"/>
+              <a16:creationId xmlns:a16="http://schemas.microsoft.com/office/drawing/2014/main" id="{85217A75-3051-7314-C37E-1EC4DAD2969B}"/>
             </a:ext>
           </a:extLst>
         </p:cNvPr>
@@ -14931,7 +15627,7 @@
           <p:cNvPr id="69" name="Google Shape;69;p12">
             <a:extLst>
               <a:ext uri="{FF2B5EF4-FFF2-40B4-BE49-F238E27FC236}">
-                <a16:creationId xmlns:a16="http://schemas.microsoft.com/office/drawing/2014/main" id="{9A32A1F9-3244-50EA-E7C0-33DA839E87B8}"/>
+                <a16:creationId xmlns:a16="http://schemas.microsoft.com/office/drawing/2014/main" id="{0C10FC9F-7D50-4BF5-30EC-4CD9A4AD7289}"/>
               </a:ext>
             </a:extLst>
           </p:cNvPr>
@@ -14997,10 +15693,10 @@
       </p:sp>
       <p:pic>
         <p:nvPicPr>
-          <p:cNvPr id="17" name="Graphic 16">
+          <p:cNvPr id="3" name="Picture 2">
             <a:extLst>
               <a:ext uri="{FF2B5EF4-FFF2-40B4-BE49-F238E27FC236}">
-                <a16:creationId xmlns:a16="http://schemas.microsoft.com/office/drawing/2014/main" id="{963836B2-30B7-510E-E416-2592E30D8FC5}"/>
+                <a16:creationId xmlns:a16="http://schemas.microsoft.com/office/drawing/2014/main" id="{2CAC6F96-28D3-BE49-6E2C-3132F2B86513}"/>
               </a:ext>
             </a:extLst>
           </p:cNvPr>
@@ -15010,31 +15706,76 @@
           <p:nvPr/>
         </p:nvPicPr>
         <p:blipFill>
-          <a:blip>
-            <a:extLst>
-              <a:ext uri="{96DAC541-7B7A-43D3-8B79-37D633B846F1}">
-                <asvg:svgBlip xmlns:asvg="http://schemas.microsoft.com/office/drawing/2016/SVG/main" r:embed="rId3"/>
-              </a:ext>
-            </a:extLst>
-          </a:blip>
+          <a:blip r:embed="rId3"/>
           <a:stretch>
             <a:fillRect/>
           </a:stretch>
         </p:blipFill>
         <p:spPr>
           <a:xfrm>
-            <a:off x="231478" y="1434112"/>
-            <a:ext cx="8681044" cy="2772128"/>
+            <a:off x="158699" y="1216427"/>
+            <a:ext cx="7772400" cy="2710646"/>
           </a:xfrm>
           <a:prstGeom prst="rect">
             <a:avLst/>
           </a:prstGeom>
         </p:spPr>
       </p:pic>
+      <mc:AlternateContent xmlns:mc="http://schemas.openxmlformats.org/markup-compatibility/2006">
+        <mc:Choice xmlns:p14="http://schemas.microsoft.com/office/powerpoint/2010/main" Requires="p14">
+          <p:contentPart p14:bwMode="auto" r:id="rId4">
+            <p14:nvContentPartPr>
+              <p14:cNvPr id="4" name="Ink 3">
+                <a:extLst>
+                  <a:ext uri="{FF2B5EF4-FFF2-40B4-BE49-F238E27FC236}">
+                    <a16:creationId xmlns:a16="http://schemas.microsoft.com/office/drawing/2014/main" id="{BF16F081-DA81-495D-75D4-9ECAC40D20C4}"/>
+                  </a:ext>
+                </a:extLst>
+              </p14:cNvPr>
+              <p14:cNvContentPartPr/>
+              <p14:nvPr/>
+            </p14:nvContentPartPr>
+            <p14:xfrm>
+              <a:off x="142272" y="1060704"/>
+              <a:ext cx="1576440" cy="1018800"/>
+            </p14:xfrm>
+          </p:contentPart>
+        </mc:Choice>
+        <mc:Fallback>
+          <p:pic>
+            <p:nvPicPr>
+              <p:cNvPr id="4" name="Ink 3">
+                <a:extLst>
+                  <a:ext uri="{FF2B5EF4-FFF2-40B4-BE49-F238E27FC236}">
+                    <a16:creationId xmlns:a16="http://schemas.microsoft.com/office/drawing/2014/main" id="{BF16F081-DA81-495D-75D4-9ECAC40D20C4}"/>
+                  </a:ext>
+                </a:extLst>
+              </p:cNvPr>
+              <p:cNvPicPr/>
+              <p:nvPr/>
+            </p:nvPicPr>
+            <p:blipFill>
+              <a:blip r:embed="rId5"/>
+              <a:stretch>
+                <a:fillRect/>
+              </a:stretch>
+            </p:blipFill>
+            <p:spPr>
+              <a:xfrm>
+                <a:off x="133632" y="1051704"/>
+                <a:ext cx="1594080" cy="1036440"/>
+              </a:xfrm>
+              <a:prstGeom prst="rect">
+                <a:avLst/>
+              </a:prstGeom>
+            </p:spPr>
+          </p:pic>
+        </mc:Fallback>
+      </mc:AlternateContent>
     </p:spTree>
     <p:extLst>
       <p:ext uri="{BB962C8B-B14F-4D97-AF65-F5344CB8AC3E}">
-        <p14:creationId xmlns:p14="http://schemas.microsoft.com/office/powerpoint/2010/main" val="3498725332"/>
+        <p14:creationId xmlns:p14="http://schemas.microsoft.com/office/powerpoint/2010/main" val="3429382068"/>
       </p:ext>
     </p:extLst>
   </p:cSld>
@@ -15053,6 +15794,126 @@
       </p:transition>
     </mc:Fallback>
   </mc:AlternateContent>
+  <p:timing>
+    <p:tnLst>
+      <p:par>
+        <p:cTn id="1" dur="indefinite" restart="never" nodeType="tmRoot">
+          <p:childTnLst>
+            <p:seq concurrent="1" nextAc="seek">
+              <p:cTn id="2" dur="indefinite" nodeType="mainSeq">
+                <p:childTnLst>
+                  <p:par>
+                    <p:cTn id="3" fill="hold">
+                      <p:stCondLst>
+                        <p:cond delay="indefinite"/>
+                      </p:stCondLst>
+                      <p:childTnLst>
+                        <p:par>
+                          <p:cTn id="4" fill="hold">
+                            <p:stCondLst>
+                              <p:cond delay="0"/>
+                            </p:stCondLst>
+                            <p:childTnLst>
+                              <p:par>
+                                <p:cTn id="5" presetID="1" presetClass="entr" presetSubtype="0" fill="hold" nodeType="clickEffect">
+                                  <p:stCondLst>
+                                    <p:cond delay="0"/>
+                                  </p:stCondLst>
+                                  <p:childTnLst>
+                                    <p:set>
+                                      <p:cBhvr>
+                                        <p:cTn id="6" dur="1" fill="hold">
+                                          <p:stCondLst>
+                                            <p:cond delay="0"/>
+                                          </p:stCondLst>
+                                        </p:cTn>
+                                        <p:tgtEl>
+                                          <p:spTgt spid="3"/>
+                                        </p:tgtEl>
+                                        <p:attrNameLst>
+                                          <p:attrName>style.visibility</p:attrName>
+                                        </p:attrNameLst>
+                                      </p:cBhvr>
+                                      <p:to>
+                                        <p:strVal val="visible"/>
+                                      </p:to>
+                                    </p:set>
+                                  </p:childTnLst>
+                                </p:cTn>
+                              </p:par>
+                            </p:childTnLst>
+                          </p:cTn>
+                        </p:par>
+                      </p:childTnLst>
+                    </p:cTn>
+                  </p:par>
+                  <p:par>
+                    <p:cTn id="7" fill="hold">
+                      <p:stCondLst>
+                        <p:cond delay="indefinite"/>
+                      </p:stCondLst>
+                      <p:childTnLst>
+                        <p:par>
+                          <p:cTn id="8" fill="hold">
+                            <p:stCondLst>
+                              <p:cond delay="0"/>
+                            </p:stCondLst>
+                            <p:childTnLst>
+                              <p:par>
+                                <p:cTn id="9" presetID="1" presetClass="entr" presetSubtype="0" fill="hold" nodeType="clickEffect">
+                                  <p:stCondLst>
+                                    <p:cond delay="0"/>
+                                  </p:stCondLst>
+                                  <p:childTnLst>
+                                    <p:set>
+                                      <p:cBhvr>
+                                        <p:cTn id="10" dur="1" fill="hold">
+                                          <p:stCondLst>
+                                            <p:cond delay="0"/>
+                                          </p:stCondLst>
+                                        </p:cTn>
+                                        <p:tgtEl>
+                                          <p:spTgt spid="4"/>
+                                        </p:tgtEl>
+                                        <p:attrNameLst>
+                                          <p:attrName>style.visibility</p:attrName>
+                                        </p:attrNameLst>
+                                      </p:cBhvr>
+                                      <p:to>
+                                        <p:strVal val="visible"/>
+                                      </p:to>
+                                    </p:set>
+                                  </p:childTnLst>
+                                </p:cTn>
+                              </p:par>
+                            </p:childTnLst>
+                          </p:cTn>
+                        </p:par>
+                      </p:childTnLst>
+                    </p:cTn>
+                  </p:par>
+                </p:childTnLst>
+              </p:cTn>
+              <p:prevCondLst>
+                <p:cond evt="onPrev" delay="0">
+                  <p:tgtEl>
+                    <p:sldTgt/>
+                  </p:tgtEl>
+                </p:cond>
+              </p:prevCondLst>
+              <p:nextCondLst>
+                <p:cond evt="onNext" delay="0">
+                  <p:tgtEl>
+                    <p:sldTgt/>
+                  </p:tgtEl>
+                </p:cond>
+              </p:nextCondLst>
+            </p:seq>
+          </p:childTnLst>
+        </p:cTn>
+      </p:par>
+    </p:tnLst>
+  </p:timing>
 </p:sld>
 </file>
 

--- a/126/slides/slides-126-nmop-chair-slides-session1.pptx
+++ b/126/slides/slides-126-nmop-chair-slides-session1.pptx
@@ -279,182 +279,6 @@
     <p1510:client id="{AA659D06-233B-4A84-BAB1-FC917D228196}" v="7" dt="2026-03-16T00:35:04.726"/>
   </p1510:revLst>
 </p1510:revInfo>
-</file>
-
-<file path=ppt/changesInfos/changesInfo1.xml><?xml version="1.0" encoding="utf-8"?>
-<pc:chgInfo xmlns:a="http://schemas.openxmlformats.org/drawingml/2006/main" xmlns:r="http://schemas.openxmlformats.org/officeDocument/2006/relationships" xmlns:ac="http://schemas.microsoft.com/office/drawing/2013/main/command" xmlns:pc="http://schemas.microsoft.com/office/powerpoint/2013/main/command">
-  <pc:docChgLst>
-    <pc:chgData name="Graf Thomas, SCS-INI-NET-VNC-E2E" userId="487bc3e3-9ce7-4cdd-b7b4-8899ea88d289" providerId="ADAL" clId="{ADEEF08A-D719-4B50-A383-4105EDA2C206}"/>
-    <pc:docChg chg="custSel mod addSld delSld modSld">
-      <pc:chgData name="Graf Thomas, SCS-INI-NET-VNC-E2E" userId="487bc3e3-9ce7-4cdd-b7b4-8899ea88d289" providerId="ADAL" clId="{ADEEF08A-D719-4B50-A383-4105EDA2C206}" dt="2026-03-16T00:34:54.732" v="33" actId="20577"/>
-      <pc:docMkLst>
-        <pc:docMk/>
-      </pc:docMkLst>
-      <pc:sldChg chg="del">
-        <pc:chgData name="Graf Thomas, SCS-INI-NET-VNC-E2E" userId="487bc3e3-9ce7-4cdd-b7b4-8899ea88d289" providerId="ADAL" clId="{ADEEF08A-D719-4B50-A383-4105EDA2C206}" dt="2026-03-16T00:33:00.591" v="26" actId="47"/>
-        <pc:sldMkLst>
-          <pc:docMk/>
-          <pc:sldMk cId="0" sldId="258"/>
-        </pc:sldMkLst>
-      </pc:sldChg>
-      <pc:sldChg chg="add">
-        <pc:chgData name="Graf Thomas, SCS-INI-NET-VNC-E2E" userId="487bc3e3-9ce7-4cdd-b7b4-8899ea88d289" providerId="ADAL" clId="{ADEEF08A-D719-4B50-A383-4105EDA2C206}" dt="2026-03-16T00:34:31.635" v="27"/>
-        <pc:sldMkLst>
-          <pc:docMk/>
-          <pc:sldMk cId="0" sldId="259"/>
-        </pc:sldMkLst>
-      </pc:sldChg>
-      <pc:sldChg chg="add">
-        <pc:chgData name="Graf Thomas, SCS-INI-NET-VNC-E2E" userId="487bc3e3-9ce7-4cdd-b7b4-8899ea88d289" providerId="ADAL" clId="{ADEEF08A-D719-4B50-A383-4105EDA2C206}" dt="2026-03-16T00:31:09.369" v="19"/>
-        <pc:sldMkLst>
-          <pc:docMk/>
-          <pc:sldMk cId="0" sldId="260"/>
-        </pc:sldMkLst>
-      </pc:sldChg>
-      <pc:sldChg chg="modSp add mod">
-        <pc:chgData name="Graf Thomas, SCS-INI-NET-VNC-E2E" userId="487bc3e3-9ce7-4cdd-b7b4-8899ea88d289" providerId="ADAL" clId="{ADEEF08A-D719-4B50-A383-4105EDA2C206}" dt="2026-03-16T00:34:54.732" v="33" actId="20577"/>
-        <pc:sldMkLst>
-          <pc:docMk/>
-          <pc:sldMk cId="3471097262" sldId="261"/>
-        </pc:sldMkLst>
-        <pc:spChg chg="mod">
-          <ac:chgData name="Graf Thomas, SCS-INI-NET-VNC-E2E" userId="487bc3e3-9ce7-4cdd-b7b4-8899ea88d289" providerId="ADAL" clId="{ADEEF08A-D719-4B50-A383-4105EDA2C206}" dt="2026-03-16T00:34:54.732" v="33" actId="20577"/>
-          <ac:spMkLst>
-            <pc:docMk/>
-            <pc:sldMk cId="3471097262" sldId="261"/>
-            <ac:spMk id="3" creationId="{DA4A6F5D-9442-B583-BAB9-5A102B90EC22}"/>
-          </ac:spMkLst>
-        </pc:spChg>
-      </pc:sldChg>
-      <pc:sldChg chg="modSp mod">
-        <pc:chgData name="Graf Thomas, SCS-INI-NET-VNC-E2E" userId="487bc3e3-9ce7-4cdd-b7b4-8899ea88d289" providerId="ADAL" clId="{ADEEF08A-D719-4B50-A383-4105EDA2C206}" dt="2026-03-16T00:26:03.620" v="12" actId="20577"/>
-        <pc:sldMkLst>
-          <pc:docMk/>
-          <pc:sldMk cId="0" sldId="276"/>
-        </pc:sldMkLst>
-        <pc:spChg chg="mod">
-          <ac:chgData name="Graf Thomas, SCS-INI-NET-VNC-E2E" userId="487bc3e3-9ce7-4cdd-b7b4-8899ea88d289" providerId="ADAL" clId="{ADEEF08A-D719-4B50-A383-4105EDA2C206}" dt="2026-03-16T00:26:03.620" v="12" actId="20577"/>
-          <ac:spMkLst>
-            <pc:docMk/>
-            <pc:sldMk cId="0" sldId="276"/>
-            <ac:spMk id="100" creationId="{00000000-0000-0000-0000-000000000000}"/>
-          </ac:spMkLst>
-        </pc:spChg>
-      </pc:sldChg>
-      <pc:sldChg chg="del">
-        <pc:chgData name="Graf Thomas, SCS-INI-NET-VNC-E2E" userId="487bc3e3-9ce7-4cdd-b7b4-8899ea88d289" providerId="ADAL" clId="{ADEEF08A-D719-4B50-A383-4105EDA2C206}" dt="2026-03-16T00:30:25.888" v="18" actId="47"/>
-        <pc:sldMkLst>
-          <pc:docMk/>
-          <pc:sldMk cId="4020374104" sldId="277"/>
-        </pc:sldMkLst>
-      </pc:sldChg>
-      <pc:sldChg chg="addSp delSp modSp mod">
-        <pc:chgData name="Graf Thomas, SCS-INI-NET-VNC-E2E" userId="487bc3e3-9ce7-4cdd-b7b4-8899ea88d289" providerId="ADAL" clId="{ADEEF08A-D719-4B50-A383-4105EDA2C206}" dt="2026-03-16T00:29:44.360" v="17" actId="14100"/>
-        <pc:sldMkLst>
-          <pc:docMk/>
-          <pc:sldMk cId="3873870168" sldId="278"/>
-        </pc:sldMkLst>
-        <pc:picChg chg="del">
-          <ac:chgData name="Graf Thomas, SCS-INI-NET-VNC-E2E" userId="487bc3e3-9ce7-4cdd-b7b4-8899ea88d289" providerId="ADAL" clId="{ADEEF08A-D719-4B50-A383-4105EDA2C206}" dt="2026-03-16T00:29:35.280" v="14" actId="478"/>
-          <ac:picMkLst>
-            <pc:docMk/>
-            <pc:sldMk cId="3873870168" sldId="278"/>
-            <ac:picMk id="3" creationId="{1FE22749-978F-230A-2C82-B42414055769}"/>
-          </ac:picMkLst>
-        </pc:picChg>
-        <pc:picChg chg="add mod">
-          <ac:chgData name="Graf Thomas, SCS-INI-NET-VNC-E2E" userId="487bc3e3-9ce7-4cdd-b7b4-8899ea88d289" providerId="ADAL" clId="{ADEEF08A-D719-4B50-A383-4105EDA2C206}" dt="2026-03-16T00:29:44.360" v="17" actId="14100"/>
-          <ac:picMkLst>
-            <pc:docMk/>
-            <pc:sldMk cId="3873870168" sldId="278"/>
-            <ac:picMk id="5" creationId="{0A3BAF73-6291-808C-D649-3286010A1023}"/>
-          </ac:picMkLst>
-        </pc:picChg>
-      </pc:sldChg>
-      <pc:sldChg chg="modSp del mod">
-        <pc:chgData name="Graf Thomas, SCS-INI-NET-VNC-E2E" userId="487bc3e3-9ce7-4cdd-b7b4-8899ea88d289" providerId="ADAL" clId="{ADEEF08A-D719-4B50-A383-4105EDA2C206}" dt="2026-03-16T00:34:34.267" v="28" actId="47"/>
-        <pc:sldMkLst>
-          <pc:docMk/>
-          <pc:sldMk cId="1619678016" sldId="280"/>
-        </pc:sldMkLst>
-        <pc:spChg chg="mod">
-          <ac:chgData name="Graf Thomas, SCS-INI-NET-VNC-E2E" userId="487bc3e3-9ce7-4cdd-b7b4-8899ea88d289" providerId="ADAL" clId="{ADEEF08A-D719-4B50-A383-4105EDA2C206}" dt="2026-03-16T00:26:20.766" v="13" actId="20577"/>
-          <ac:spMkLst>
-            <pc:docMk/>
-            <pc:sldMk cId="1619678016" sldId="280"/>
-            <ac:spMk id="69" creationId="{E1870915-5CC2-61FE-6865-3145DCF074BE}"/>
-          </ac:spMkLst>
-        </pc:spChg>
-      </pc:sldChg>
-      <pc:sldChg chg="add del">
-        <pc:chgData name="Graf Thomas, SCS-INI-NET-VNC-E2E" userId="487bc3e3-9ce7-4cdd-b7b4-8899ea88d289" providerId="ADAL" clId="{ADEEF08A-D719-4B50-A383-4105EDA2C206}" dt="2026-03-16T00:32:58.385" v="25"/>
-        <pc:sldMkLst>
-          <pc:docMk/>
-          <pc:sldMk cId="0" sldId="281"/>
-        </pc:sldMkLst>
-      </pc:sldChg>
-      <pc:sldChg chg="delSp add del mod">
-        <pc:chgData name="Graf Thomas, SCS-INI-NET-VNC-E2E" userId="487bc3e3-9ce7-4cdd-b7b4-8899ea88d289" providerId="ADAL" clId="{ADEEF08A-D719-4B50-A383-4105EDA2C206}" dt="2026-03-16T00:32:51.261" v="24" actId="47"/>
-        <pc:sldMkLst>
-          <pc:docMk/>
-          <pc:sldMk cId="609936168" sldId="281"/>
-        </pc:sldMkLst>
-        <pc:picChg chg="del">
-          <ac:chgData name="Graf Thomas, SCS-INI-NET-VNC-E2E" userId="487bc3e3-9ce7-4cdd-b7b4-8899ea88d289" providerId="ADAL" clId="{ADEEF08A-D719-4B50-A383-4105EDA2C206}" dt="2026-03-16T00:32:34.879" v="23" actId="478"/>
-          <ac:picMkLst>
-            <pc:docMk/>
-            <pc:sldMk cId="609936168" sldId="281"/>
-            <ac:picMk id="71" creationId="{F8BD4ADA-9CD0-55D7-76AE-75E246A971E0}"/>
-          </ac:picMkLst>
-        </pc:picChg>
-      </pc:sldChg>
-      <pc:sldChg chg="del">
-        <pc:chgData name="Graf Thomas, SCS-INI-NET-VNC-E2E" userId="487bc3e3-9ce7-4cdd-b7b4-8899ea88d289" providerId="ADAL" clId="{ADEEF08A-D719-4B50-A383-4105EDA2C206}" dt="2026-03-16T00:30:25.888" v="18" actId="47"/>
-        <pc:sldMkLst>
-          <pc:docMk/>
-          <pc:sldMk cId="1293646540" sldId="281"/>
-        </pc:sldMkLst>
-      </pc:sldChg>
-      <pc:sldChg chg="del">
-        <pc:chgData name="Graf Thomas, SCS-INI-NET-VNC-E2E" userId="487bc3e3-9ce7-4cdd-b7b4-8899ea88d289" providerId="ADAL" clId="{ADEEF08A-D719-4B50-A383-4105EDA2C206}" dt="2026-03-16T00:30:25.888" v="18" actId="47"/>
-        <pc:sldMkLst>
-          <pc:docMk/>
-          <pc:sldMk cId="1765196037" sldId="282"/>
-        </pc:sldMkLst>
-      </pc:sldChg>
-      <pc:sldChg chg="del">
-        <pc:chgData name="Graf Thomas, SCS-INI-NET-VNC-E2E" userId="487bc3e3-9ce7-4cdd-b7b4-8899ea88d289" providerId="ADAL" clId="{ADEEF08A-D719-4B50-A383-4105EDA2C206}" dt="2026-03-16T00:30:25.888" v="18" actId="47"/>
-        <pc:sldMkLst>
-          <pc:docMk/>
-          <pc:sldMk cId="385604894" sldId="283"/>
-        </pc:sldMkLst>
-      </pc:sldChg>
-      <pc:sldMasterChg chg="delSldLayout">
-        <pc:chgData name="Graf Thomas, SCS-INI-NET-VNC-E2E" userId="487bc3e3-9ce7-4cdd-b7b4-8899ea88d289" providerId="ADAL" clId="{ADEEF08A-D719-4B50-A383-4105EDA2C206}" dt="2026-03-16T00:33:00.591" v="26" actId="47"/>
-        <pc:sldMasterMkLst>
-          <pc:docMk/>
-          <pc:sldMasterMk cId="0" sldId="2147483664"/>
-        </pc:sldMasterMkLst>
-        <pc:sldLayoutChg chg="del">
-          <pc:chgData name="Graf Thomas, SCS-INI-NET-VNC-E2E" userId="487bc3e3-9ce7-4cdd-b7b4-8899ea88d289" providerId="ADAL" clId="{ADEEF08A-D719-4B50-A383-4105EDA2C206}" dt="2026-03-16T00:30:25.888" v="18" actId="47"/>
-          <pc:sldLayoutMkLst>
-            <pc:docMk/>
-            <pc:sldMasterMk cId="0" sldId="2147483664"/>
-            <pc:sldLayoutMk cId="0" sldId="2147483649"/>
-          </pc:sldLayoutMkLst>
-        </pc:sldLayoutChg>
-        <pc:sldLayoutChg chg="del">
-          <pc:chgData name="Graf Thomas, SCS-INI-NET-VNC-E2E" userId="487bc3e3-9ce7-4cdd-b7b4-8899ea88d289" providerId="ADAL" clId="{ADEEF08A-D719-4B50-A383-4105EDA2C206}" dt="2026-03-16T00:33:00.591" v="26" actId="47"/>
-          <pc:sldLayoutMkLst>
-            <pc:docMk/>
-            <pc:sldMasterMk cId="0" sldId="2147483664"/>
-            <pc:sldLayoutMk cId="545161684" sldId="2147483666"/>
-          </pc:sldLayoutMkLst>
-        </pc:sldLayoutChg>
-      </pc:sldMasterChg>
-    </pc:docChg>
-  </pc:docChgLst>
-</pc:chgInfo>
 </file>
 
 <file path=ppt/ink/ink1.xml><?xml version="1.0" encoding="utf-8"?>
@@ -1790,556 +1614,6 @@
             <a:noAutofit/>
           </a:bodyPr>
           <a:lstStyle/>
-          <a:p>
-            <a:pPr marL="0" lvl="0" indent="0" algn="l" rtl="0">
-              <a:lnSpc>
-                <a:spcPct val="115000"/>
-              </a:lnSpc>
-              <a:spcBef>
-                <a:spcPts val="0"/>
-              </a:spcBef>
-              <a:spcAft>
-                <a:spcPts val="0"/>
-              </a:spcAft>
-              <a:buNone/>
-            </a:pPr>
-            <a:r>
-              <a:rPr lang="en-US" sz="1200" dirty="0">
-                <a:solidFill>
-                  <a:srgbClr val="424242"/>
-                </a:solidFill>
-                <a:highlight>
-                  <a:srgbClr val="FFFFFF"/>
-                </a:highlight>
-                <a:latin typeface="Roboto"/>
-                <a:ea typeface="Roboto"/>
-                <a:cs typeface="Roboto"/>
-                <a:sym typeface="Roboto"/>
-              </a:rPr>
-              <a:t>The IETF Note Well should be shown at the start of every IETF working session. The guidance below is </a:t>
-            </a:r>
-            <a:r>
-              <a:rPr lang="en-US" sz="1200" u="sng" dirty="0">
-                <a:solidFill>
-                  <a:srgbClr val="1976D2"/>
-                </a:solidFill>
-                <a:latin typeface="Roboto"/>
-                <a:ea typeface="Roboto"/>
-                <a:cs typeface="Roboto"/>
-                <a:sym typeface="Roboto"/>
-                <a:hlinkClick r:id="rId3">
-                  <a:extLst>
-                    <a:ext uri="{A12FA001-AC4F-418D-AE19-62706E023703}">
-                      <ahyp:hlinkClr xmlns:ahyp="http://schemas.microsoft.com/office/drawing/2018/hyperlinkcolor" val="tx"/>
-                    </a:ext>
-                  </a:extLst>
-                </a:hlinkClick>
-              </a:rPr>
-              <a:t>adapted from IETF legal counsel presentation during IETF 120</a:t>
-            </a:r>
-            <a:endParaRPr sz="1200" dirty="0">
-              <a:solidFill>
-                <a:srgbClr val="1B5E20"/>
-              </a:solidFill>
-              <a:highlight>
-                <a:srgbClr val="E8F5E9"/>
-              </a:highlight>
-              <a:latin typeface="Roboto"/>
-              <a:ea typeface="Roboto"/>
-              <a:cs typeface="Roboto"/>
-              <a:sym typeface="Roboto"/>
-            </a:endParaRPr>
-          </a:p>
-          <a:p>
-            <a:pPr marL="0" lvl="0" indent="0" algn="l" rtl="0">
-              <a:lnSpc>
-                <a:spcPct val="115000"/>
-              </a:lnSpc>
-              <a:spcBef>
-                <a:spcPts val="0"/>
-              </a:spcBef>
-              <a:spcAft>
-                <a:spcPts val="0"/>
-              </a:spcAft>
-              <a:buNone/>
-            </a:pPr>
-            <a:endParaRPr sz="1200" dirty="0">
-              <a:solidFill>
-                <a:srgbClr val="1B5E20"/>
-              </a:solidFill>
-              <a:highlight>
-                <a:srgbClr val="E8F5E9"/>
-              </a:highlight>
-              <a:latin typeface="Roboto"/>
-              <a:ea typeface="Roboto"/>
-              <a:cs typeface="Roboto"/>
-              <a:sym typeface="Roboto"/>
-            </a:endParaRPr>
-          </a:p>
-          <a:p>
-            <a:pPr marL="0" lvl="0" indent="0" algn="l" rtl="0">
-              <a:lnSpc>
-                <a:spcPct val="115000"/>
-              </a:lnSpc>
-              <a:spcBef>
-                <a:spcPts val="0"/>
-              </a:spcBef>
-              <a:spcAft>
-                <a:spcPts val="0"/>
-              </a:spcAft>
-              <a:buClr>
-                <a:schemeClr val="dk1"/>
-              </a:buClr>
-              <a:buSzPts val="1100"/>
-              <a:buFont typeface="Arial"/>
-              <a:buNone/>
-            </a:pPr>
-            <a:r>
-              <a:rPr lang="en-US" sz="1200" dirty="0">
-                <a:solidFill>
-                  <a:srgbClr val="1B5E20"/>
-                </a:solidFill>
-                <a:highlight>
-                  <a:srgbClr val="E8F5E9"/>
-                </a:highlight>
-                <a:latin typeface="Roboto"/>
-                <a:ea typeface="Roboto"/>
-                <a:cs typeface="Roboto"/>
-                <a:sym typeface="Roboto"/>
-              </a:rPr>
-              <a:t>DO</a:t>
-            </a:r>
-            <a:endParaRPr sz="1200" dirty="0">
-              <a:solidFill>
-                <a:srgbClr val="1B5E20"/>
-              </a:solidFill>
-              <a:highlight>
-                <a:srgbClr val="E8F5E9"/>
-              </a:highlight>
-              <a:latin typeface="Roboto"/>
-              <a:ea typeface="Roboto"/>
-              <a:cs typeface="Roboto"/>
-              <a:sym typeface="Roboto"/>
-            </a:endParaRPr>
-          </a:p>
-          <a:p>
-            <a:pPr marL="457200" lvl="0" indent="-304800" algn="l" rtl="0">
-              <a:lnSpc>
-                <a:spcPct val="115000"/>
-              </a:lnSpc>
-              <a:spcBef>
-                <a:spcPts val="0"/>
-              </a:spcBef>
-              <a:spcAft>
-                <a:spcPts val="0"/>
-              </a:spcAft>
-              <a:buClr>
-                <a:srgbClr val="424242"/>
-              </a:buClr>
-              <a:buSzPts val="1200"/>
-              <a:buFont typeface="Roboto"/>
-              <a:buAutoNum type="arabicPeriod"/>
-            </a:pPr>
-            <a:r>
-              <a:rPr lang="en-US" sz="1200" dirty="0">
-                <a:solidFill>
-                  <a:srgbClr val="424242"/>
-                </a:solidFill>
-                <a:latin typeface="Roboto"/>
-                <a:ea typeface="Roboto"/>
-                <a:cs typeface="Roboto"/>
-                <a:sym typeface="Roboto"/>
-              </a:rPr>
-              <a:t>Do make sure people have enough time to read through the slide before you move on,</a:t>
-            </a:r>
-            <a:endParaRPr sz="1200" dirty="0">
-              <a:solidFill>
-                <a:srgbClr val="424242"/>
-              </a:solidFill>
-              <a:latin typeface="Roboto"/>
-              <a:ea typeface="Roboto"/>
-              <a:cs typeface="Roboto"/>
-              <a:sym typeface="Roboto"/>
-            </a:endParaRPr>
-          </a:p>
-          <a:p>
-            <a:pPr marL="457200" lvl="0" indent="-304800" algn="l" rtl="0">
-              <a:lnSpc>
-                <a:spcPct val="115000"/>
-              </a:lnSpc>
-              <a:spcBef>
-                <a:spcPts val="0"/>
-              </a:spcBef>
-              <a:spcAft>
-                <a:spcPts val="0"/>
-              </a:spcAft>
-              <a:buClr>
-                <a:srgbClr val="424242"/>
-              </a:buClr>
-              <a:buSzPts val="1200"/>
-              <a:buFont typeface="Roboto"/>
-              <a:buAutoNum type="arabicPeriod"/>
-            </a:pPr>
-            <a:r>
-              <a:rPr lang="en-US" sz="1200" dirty="0">
-                <a:solidFill>
-                  <a:srgbClr val="424242"/>
-                </a:solidFill>
-                <a:latin typeface="Roboto"/>
-                <a:ea typeface="Roboto"/>
-                <a:cs typeface="Roboto"/>
-                <a:sym typeface="Roboto"/>
-              </a:rPr>
-              <a:t>Do give a high-level summary of what’s covered in the Note Well: “IETF policies on conduct, privacy and IPR.”,</a:t>
-            </a:r>
-            <a:endParaRPr sz="1200" dirty="0">
-              <a:solidFill>
-                <a:srgbClr val="424242"/>
-              </a:solidFill>
-              <a:latin typeface="Roboto"/>
-              <a:ea typeface="Roboto"/>
-              <a:cs typeface="Roboto"/>
-              <a:sym typeface="Roboto"/>
-            </a:endParaRPr>
-          </a:p>
-          <a:p>
-            <a:pPr marL="457200" lvl="0" indent="-304800" algn="l" rtl="0">
-              <a:lnSpc>
-                <a:spcPct val="115000"/>
-              </a:lnSpc>
-              <a:spcBef>
-                <a:spcPts val="0"/>
-              </a:spcBef>
-              <a:spcAft>
-                <a:spcPts val="0"/>
-              </a:spcAft>
-              <a:buClr>
-                <a:srgbClr val="424242"/>
-              </a:buClr>
-              <a:buSzPts val="1200"/>
-              <a:buFont typeface="Roboto"/>
-              <a:buAutoNum type="arabicPeriod"/>
-            </a:pPr>
-            <a:r>
-              <a:rPr lang="en-US" sz="1200" dirty="0">
-                <a:solidFill>
-                  <a:srgbClr val="424242"/>
-                </a:solidFill>
-                <a:latin typeface="Roboto"/>
-                <a:ea typeface="Roboto"/>
-                <a:cs typeface="Roboto"/>
-                <a:sym typeface="Roboto"/>
-              </a:rPr>
-              <a:t>Do encourage people to read through all the linked policies &amp; documents in detail before participating or contributing,</a:t>
-            </a:r>
-            <a:endParaRPr sz="1200" dirty="0">
-              <a:solidFill>
-                <a:srgbClr val="424242"/>
-              </a:solidFill>
-              <a:latin typeface="Roboto"/>
-              <a:ea typeface="Roboto"/>
-              <a:cs typeface="Roboto"/>
-              <a:sym typeface="Roboto"/>
-            </a:endParaRPr>
-          </a:p>
-          <a:p>
-            <a:pPr marL="457200" lvl="0" indent="-304800" algn="l" rtl="0">
-              <a:lnSpc>
-                <a:spcPct val="115000"/>
-              </a:lnSpc>
-              <a:spcBef>
-                <a:spcPts val="0"/>
-              </a:spcBef>
-              <a:spcAft>
-                <a:spcPts val="0"/>
-              </a:spcAft>
-              <a:buClr>
-                <a:srgbClr val="424242"/>
-              </a:buClr>
-              <a:buSzPts val="1200"/>
-              <a:buFont typeface="Roboto"/>
-              <a:buAutoNum type="arabicPeriod"/>
-            </a:pPr>
-            <a:r>
-              <a:rPr lang="en-US" sz="1200" dirty="0">
-                <a:solidFill>
-                  <a:srgbClr val="424242"/>
-                </a:solidFill>
-                <a:latin typeface="Roboto"/>
-                <a:ea typeface="Roboto"/>
-                <a:cs typeface="Roboto"/>
-                <a:sym typeface="Roboto"/>
-              </a:rPr>
-              <a:t>Do explain where people can direct questions or concerns (IETF Executive Director or </a:t>
-            </a:r>
-            <a:r>
-              <a:rPr lang="en-US" sz="1200" dirty="0" err="1">
-                <a:solidFill>
-                  <a:srgbClr val="424242"/>
-                </a:solidFill>
-                <a:latin typeface="Roboto"/>
-                <a:ea typeface="Roboto"/>
-                <a:cs typeface="Roboto"/>
-                <a:sym typeface="Roboto"/>
-              </a:rPr>
-              <a:t>Ombudsteam</a:t>
-            </a:r>
-            <a:r>
-              <a:rPr lang="en-US" sz="1200" dirty="0">
-                <a:solidFill>
-                  <a:srgbClr val="424242"/>
-                </a:solidFill>
-                <a:latin typeface="Roboto"/>
-                <a:ea typeface="Roboto"/>
-                <a:cs typeface="Roboto"/>
-                <a:sym typeface="Roboto"/>
-              </a:rPr>
-              <a:t>).</a:t>
-            </a:r>
-            <a:endParaRPr sz="1200" dirty="0">
-              <a:solidFill>
-                <a:srgbClr val="424242"/>
-              </a:solidFill>
-              <a:latin typeface="Roboto"/>
-              <a:ea typeface="Roboto"/>
-              <a:cs typeface="Roboto"/>
-              <a:sym typeface="Roboto"/>
-            </a:endParaRPr>
-          </a:p>
-          <a:p>
-            <a:pPr marL="0" lvl="0" indent="0" algn="l" rtl="0">
-              <a:lnSpc>
-                <a:spcPct val="115000"/>
-              </a:lnSpc>
-              <a:spcBef>
-                <a:spcPts val="0"/>
-              </a:spcBef>
-              <a:spcAft>
-                <a:spcPts val="0"/>
-              </a:spcAft>
-              <a:buClr>
-                <a:schemeClr val="dk1"/>
-              </a:buClr>
-              <a:buSzPts val="1100"/>
-              <a:buFont typeface="Arial"/>
-              <a:buNone/>
-            </a:pPr>
-            <a:r>
-              <a:rPr lang="en-US" sz="1200" dirty="0">
-                <a:solidFill>
-                  <a:srgbClr val="B33F00"/>
-                </a:solidFill>
-                <a:highlight>
-                  <a:srgbClr val="FFF3E0"/>
-                </a:highlight>
-                <a:latin typeface="Roboto"/>
-                <a:ea typeface="Roboto"/>
-                <a:cs typeface="Roboto"/>
-                <a:sym typeface="Roboto"/>
-              </a:rPr>
-              <a:t>DON'T</a:t>
-            </a:r>
-            <a:endParaRPr sz="1200" dirty="0">
-              <a:solidFill>
-                <a:srgbClr val="B33F00"/>
-              </a:solidFill>
-              <a:highlight>
-                <a:srgbClr val="FFF3E0"/>
-              </a:highlight>
-              <a:latin typeface="Roboto"/>
-              <a:ea typeface="Roboto"/>
-              <a:cs typeface="Roboto"/>
-              <a:sym typeface="Roboto"/>
-            </a:endParaRPr>
-          </a:p>
-          <a:p>
-            <a:pPr marL="457200" lvl="0" indent="-304800" algn="l" rtl="0">
-              <a:lnSpc>
-                <a:spcPct val="115000"/>
-              </a:lnSpc>
-              <a:spcBef>
-                <a:spcPts val="0"/>
-              </a:spcBef>
-              <a:spcAft>
-                <a:spcPts val="0"/>
-              </a:spcAft>
-              <a:buClr>
-                <a:srgbClr val="424242"/>
-              </a:buClr>
-              <a:buSzPts val="1200"/>
-              <a:buFont typeface="Roboto"/>
-              <a:buAutoNum type="arabicPeriod"/>
-            </a:pPr>
-            <a:r>
-              <a:rPr lang="en-US" sz="1200" dirty="0">
-                <a:solidFill>
-                  <a:srgbClr val="424242"/>
-                </a:solidFill>
-                <a:latin typeface="Roboto"/>
-                <a:ea typeface="Roboto"/>
-                <a:cs typeface="Roboto"/>
-                <a:sym typeface="Roboto"/>
-              </a:rPr>
-              <a:t>Don’t dismiss the importance or relevance of any of the information on the Note Well.</a:t>
-            </a:r>
-            <a:endParaRPr sz="1200" dirty="0">
-              <a:solidFill>
-                <a:srgbClr val="424242"/>
-              </a:solidFill>
-              <a:latin typeface="Roboto"/>
-              <a:ea typeface="Roboto"/>
-              <a:cs typeface="Roboto"/>
-              <a:sym typeface="Roboto"/>
-            </a:endParaRPr>
-          </a:p>
-          <a:p>
-            <a:pPr marL="457200" lvl="0" indent="-304800" algn="l" rtl="0">
-              <a:lnSpc>
-                <a:spcPct val="115000"/>
-              </a:lnSpc>
-              <a:spcBef>
-                <a:spcPts val="0"/>
-              </a:spcBef>
-              <a:spcAft>
-                <a:spcPts val="0"/>
-              </a:spcAft>
-              <a:buClr>
-                <a:srgbClr val="424242"/>
-              </a:buClr>
-              <a:buSzPts val="1200"/>
-              <a:buFont typeface="Roboto"/>
-              <a:buAutoNum type="arabicPeriod"/>
-            </a:pPr>
-            <a:r>
-              <a:rPr lang="en-US" sz="1200" dirty="0">
-                <a:solidFill>
-                  <a:srgbClr val="424242"/>
-                </a:solidFill>
-                <a:latin typeface="Roboto"/>
-                <a:ea typeface="Roboto"/>
-                <a:cs typeface="Roboto"/>
-                <a:sym typeface="Roboto"/>
-              </a:rPr>
-              <a:t>Don’t interpret the meaning or get into the substance of any of the topics or content of the policies.</a:t>
-            </a:r>
-            <a:endParaRPr sz="1200" dirty="0">
-              <a:solidFill>
-                <a:srgbClr val="424242"/>
-              </a:solidFill>
-              <a:latin typeface="Roboto"/>
-              <a:ea typeface="Roboto"/>
-              <a:cs typeface="Roboto"/>
-              <a:sym typeface="Roboto"/>
-            </a:endParaRPr>
-          </a:p>
-          <a:p>
-            <a:pPr marL="457200" lvl="0" indent="-304800" algn="l" rtl="0">
-              <a:lnSpc>
-                <a:spcPct val="115000"/>
-              </a:lnSpc>
-              <a:spcBef>
-                <a:spcPts val="0"/>
-              </a:spcBef>
-              <a:spcAft>
-                <a:spcPts val="0"/>
-              </a:spcAft>
-              <a:buClr>
-                <a:srgbClr val="424242"/>
-              </a:buClr>
-              <a:buSzPts val="1200"/>
-              <a:buFont typeface="Roboto"/>
-              <a:buAutoNum type="arabicPeriod"/>
-            </a:pPr>
-            <a:r>
-              <a:rPr lang="en-US" sz="1200" dirty="0">
-                <a:solidFill>
-                  <a:srgbClr val="424242"/>
-                </a:solidFill>
-                <a:latin typeface="Roboto"/>
-                <a:ea typeface="Roboto"/>
-                <a:cs typeface="Roboto"/>
-                <a:sym typeface="Roboto"/>
-              </a:rPr>
-              <a:t>Don’t communicate that the Note Well conveys all the information participants need to know.</a:t>
-            </a:r>
-            <a:endParaRPr sz="1200" dirty="0">
-              <a:solidFill>
-                <a:srgbClr val="424242"/>
-              </a:solidFill>
-              <a:latin typeface="Roboto"/>
-              <a:ea typeface="Roboto"/>
-              <a:cs typeface="Roboto"/>
-              <a:sym typeface="Roboto"/>
-            </a:endParaRPr>
-          </a:p>
-          <a:p>
-            <a:pPr marL="457200" lvl="0" indent="-304800" algn="l" rtl="0">
-              <a:lnSpc>
-                <a:spcPct val="115000"/>
-              </a:lnSpc>
-              <a:spcBef>
-                <a:spcPts val="0"/>
-              </a:spcBef>
-              <a:spcAft>
-                <a:spcPts val="0"/>
-              </a:spcAft>
-              <a:buClr>
-                <a:srgbClr val="424242"/>
-              </a:buClr>
-              <a:buSzPts val="1200"/>
-              <a:buFont typeface="Roboto"/>
-              <a:buAutoNum type="arabicPeriod"/>
-            </a:pPr>
-            <a:r>
-              <a:rPr lang="en-US" sz="1200" dirty="0">
-                <a:solidFill>
-                  <a:srgbClr val="424242"/>
-                </a:solidFill>
-                <a:latin typeface="Roboto"/>
-                <a:ea typeface="Roboto"/>
-                <a:cs typeface="Roboto"/>
-                <a:sym typeface="Roboto"/>
-              </a:rPr>
-              <a:t>Don’t address questions or concerns in the meeting itself.</a:t>
-            </a:r>
-            <a:endParaRPr sz="1200" dirty="0">
-              <a:solidFill>
-                <a:srgbClr val="424242"/>
-              </a:solidFill>
-              <a:latin typeface="Roboto"/>
-              <a:ea typeface="Roboto"/>
-              <a:cs typeface="Roboto"/>
-              <a:sym typeface="Roboto"/>
-            </a:endParaRPr>
-          </a:p>
-          <a:p>
-            <a:pPr marL="0" lvl="0" indent="0" algn="l" rtl="0">
-              <a:lnSpc>
-                <a:spcPct val="115000"/>
-              </a:lnSpc>
-              <a:spcBef>
-                <a:spcPts val="0"/>
-              </a:spcBef>
-              <a:spcAft>
-                <a:spcPts val="0"/>
-              </a:spcAft>
-              <a:buClr>
-                <a:schemeClr val="dk1"/>
-              </a:buClr>
-              <a:buSzPts val="1100"/>
-              <a:buFont typeface="Arial"/>
-              <a:buNone/>
-            </a:pPr>
-            <a:endParaRPr sz="1200" dirty="0">
-              <a:solidFill>
-                <a:srgbClr val="424242"/>
-              </a:solidFill>
-              <a:latin typeface="Roboto"/>
-              <a:ea typeface="Roboto"/>
-              <a:cs typeface="Roboto"/>
-              <a:sym typeface="Roboto"/>
-            </a:endParaRPr>
-          </a:p>
           <a:p>
             <a:pPr marL="0" lvl="0" indent="0" algn="l" rtl="0">
               <a:spcBef>
@@ -11241,8 +10515,8 @@
           </a:prstGeom>
         </p:spPr>
       </p:pic>
-      <mc:AlternateContent xmlns:mc="http://schemas.openxmlformats.org/markup-compatibility/2006">
-        <mc:Choice xmlns:p14="http://schemas.microsoft.com/office/powerpoint/2010/main" Requires="p14">
+      <mc:AlternateContent xmlns:mc="http://schemas.openxmlformats.org/markup-compatibility/2006" xmlns:p14="http://schemas.microsoft.com/office/powerpoint/2010/main">
+        <mc:Choice Requires="p14">
           <p:contentPart p14:bwMode="auto" r:id="rId4">
             <p14:nvContentPartPr>
               <p14:cNvPr id="4" name="Ink 3">
@@ -11261,7 +10535,7 @@
             </p14:xfrm>
           </p:contentPart>
         </mc:Choice>
-        <mc:Fallback>
+        <mc:Fallback xmlns="">
           <p:pic>
             <p:nvPicPr>
               <p:cNvPr id="4" name="Ink 3">
@@ -11302,138 +10576,18 @@
   <p:clrMapOvr>
     <a:masterClrMapping/>
   </p:clrMapOvr>
-  <mc:AlternateContent xmlns:mc="http://schemas.openxmlformats.org/markup-compatibility/2006">
-    <mc:Choice xmlns:p14="http://schemas.microsoft.com/office/powerpoint/2010/main" Requires="p14">
+  <mc:AlternateContent xmlns:mc="http://schemas.openxmlformats.org/markup-compatibility/2006" xmlns:p14="http://schemas.microsoft.com/office/powerpoint/2010/main">
+    <mc:Choice Requires="p14">
       <p:transition spd="med" p14:dur="700">
         <p:fade/>
       </p:transition>
     </mc:Choice>
-    <mc:Fallback>
+    <mc:Fallback xmlns="">
       <p:transition spd="med">
         <p:fade/>
       </p:transition>
     </mc:Fallback>
   </mc:AlternateContent>
-  <p:timing>
-    <p:tnLst>
-      <p:par>
-        <p:cTn id="1" dur="indefinite" restart="never" nodeType="tmRoot">
-          <p:childTnLst>
-            <p:seq concurrent="1" nextAc="seek">
-              <p:cTn id="2" dur="indefinite" nodeType="mainSeq">
-                <p:childTnLst>
-                  <p:par>
-                    <p:cTn id="3" fill="hold">
-                      <p:stCondLst>
-                        <p:cond delay="indefinite"/>
-                      </p:stCondLst>
-                      <p:childTnLst>
-                        <p:par>
-                          <p:cTn id="4" fill="hold">
-                            <p:stCondLst>
-                              <p:cond delay="0"/>
-                            </p:stCondLst>
-                            <p:childTnLst>
-                              <p:par>
-                                <p:cTn id="5" presetID="1" presetClass="entr" presetSubtype="0" fill="hold" nodeType="clickEffect">
-                                  <p:stCondLst>
-                                    <p:cond delay="0"/>
-                                  </p:stCondLst>
-                                  <p:childTnLst>
-                                    <p:set>
-                                      <p:cBhvr>
-                                        <p:cTn id="6" dur="1" fill="hold">
-                                          <p:stCondLst>
-                                            <p:cond delay="0"/>
-                                          </p:stCondLst>
-                                        </p:cTn>
-                                        <p:tgtEl>
-                                          <p:spTgt spid="3"/>
-                                        </p:tgtEl>
-                                        <p:attrNameLst>
-                                          <p:attrName>style.visibility</p:attrName>
-                                        </p:attrNameLst>
-                                      </p:cBhvr>
-                                      <p:to>
-                                        <p:strVal val="visible"/>
-                                      </p:to>
-                                    </p:set>
-                                  </p:childTnLst>
-                                </p:cTn>
-                              </p:par>
-                            </p:childTnLst>
-                          </p:cTn>
-                        </p:par>
-                      </p:childTnLst>
-                    </p:cTn>
-                  </p:par>
-                  <p:par>
-                    <p:cTn id="7" fill="hold">
-                      <p:stCondLst>
-                        <p:cond delay="indefinite"/>
-                      </p:stCondLst>
-                      <p:childTnLst>
-                        <p:par>
-                          <p:cTn id="8" fill="hold">
-                            <p:stCondLst>
-                              <p:cond delay="0"/>
-                            </p:stCondLst>
-                            <p:childTnLst>
-                              <p:par>
-                                <p:cTn id="9" presetID="1" presetClass="entr" presetSubtype="0" fill="hold" nodeType="clickEffect">
-                                  <p:stCondLst>
-                                    <p:cond delay="0"/>
-                                  </p:stCondLst>
-                                  <p:childTnLst>
-                                    <p:set>
-                                      <p:cBhvr>
-                                        <p:cTn id="10" dur="1" fill="hold">
-                                          <p:stCondLst>
-                                            <p:cond delay="0"/>
-                                          </p:stCondLst>
-                                        </p:cTn>
-                                        <p:tgtEl>
-                                          <p:spTgt spid="4"/>
-                                        </p:tgtEl>
-                                        <p:attrNameLst>
-                                          <p:attrName>style.visibility</p:attrName>
-                                        </p:attrNameLst>
-                                      </p:cBhvr>
-                                      <p:to>
-                                        <p:strVal val="visible"/>
-                                      </p:to>
-                                    </p:set>
-                                  </p:childTnLst>
-                                </p:cTn>
-                              </p:par>
-                            </p:childTnLst>
-                          </p:cTn>
-                        </p:par>
-                      </p:childTnLst>
-                    </p:cTn>
-                  </p:par>
-                </p:childTnLst>
-              </p:cTn>
-              <p:prevCondLst>
-                <p:cond evt="onPrev" delay="0">
-                  <p:tgtEl>
-                    <p:sldTgt/>
-                  </p:tgtEl>
-                </p:cond>
-              </p:prevCondLst>
-              <p:nextCondLst>
-                <p:cond evt="onNext" delay="0">
-                  <p:tgtEl>
-                    <p:sldTgt/>
-                  </p:tgtEl>
-                </p:cond>
-              </p:nextCondLst>
-            </p:seq>
-          </p:childTnLst>
-        </p:cTn>
-      </p:par>
-    </p:tnLst>
-  </p:timing>
 </p:sld>
 </file>
 
@@ -11559,8 +10713,8 @@
           </a:prstGeom>
         </p:spPr>
       </p:pic>
-      <mc:AlternateContent xmlns:mc="http://schemas.openxmlformats.org/markup-compatibility/2006">
-        <mc:Choice xmlns:p14="http://schemas.microsoft.com/office/powerpoint/2010/main" Requires="p14">
+      <mc:AlternateContent xmlns:mc="http://schemas.openxmlformats.org/markup-compatibility/2006" xmlns:p14="http://schemas.microsoft.com/office/powerpoint/2010/main">
+        <mc:Choice Requires="p14">
           <p:contentPart p14:bwMode="auto" r:id="rId4">
             <p14:nvContentPartPr>
               <p14:cNvPr id="2" name="Ink 1">
@@ -11579,7 +10733,7 @@
             </p14:xfrm>
           </p:contentPart>
         </mc:Choice>
-        <mc:Fallback>
+        <mc:Fallback xmlns="">
           <p:pic>
             <p:nvPicPr>
               <p:cNvPr id="2" name="Ink 1">
@@ -11610,8 +10764,8 @@
           </p:pic>
         </mc:Fallback>
       </mc:AlternateContent>
-      <mc:AlternateContent xmlns:mc="http://schemas.openxmlformats.org/markup-compatibility/2006">
-        <mc:Choice xmlns:p14="http://schemas.microsoft.com/office/powerpoint/2010/main" Requires="p14">
+      <mc:AlternateContent xmlns:mc="http://schemas.openxmlformats.org/markup-compatibility/2006" xmlns:p14="http://schemas.microsoft.com/office/powerpoint/2010/main">
+        <mc:Choice Requires="p14">
           <p:contentPart p14:bwMode="auto" r:id="rId6">
             <p14:nvContentPartPr>
               <p14:cNvPr id="4" name="Ink 3">
@@ -11630,7 +10784,7 @@
             </p14:xfrm>
           </p:contentPart>
         </mc:Choice>
-        <mc:Fallback>
+        <mc:Fallback xmlns="">
           <p:pic>
             <p:nvPicPr>
               <p:cNvPr id="4" name="Ink 3">
@@ -11661,8 +10815,8 @@
           </p:pic>
         </mc:Fallback>
       </mc:AlternateContent>
-      <mc:AlternateContent xmlns:mc="http://schemas.openxmlformats.org/markup-compatibility/2006">
-        <mc:Choice xmlns:p14="http://schemas.microsoft.com/office/powerpoint/2010/main" Requires="p14">
+      <mc:AlternateContent xmlns:mc="http://schemas.openxmlformats.org/markup-compatibility/2006" xmlns:p14="http://schemas.microsoft.com/office/powerpoint/2010/main">
+        <mc:Choice Requires="p14">
           <p:contentPart p14:bwMode="auto" r:id="rId8">
             <p14:nvContentPartPr>
               <p14:cNvPr id="5" name="Ink 4">
@@ -11681,7 +10835,7 @@
             </p14:xfrm>
           </p:contentPart>
         </mc:Choice>
-        <mc:Fallback>
+        <mc:Fallback xmlns="">
           <p:pic>
             <p:nvPicPr>
               <p:cNvPr id="5" name="Ink 4">
@@ -11722,165 +10876,18 @@
   <p:clrMapOvr>
     <a:masterClrMapping/>
   </p:clrMapOvr>
-  <mc:AlternateContent xmlns:mc="http://schemas.openxmlformats.org/markup-compatibility/2006">
-    <mc:Choice xmlns:p14="http://schemas.microsoft.com/office/powerpoint/2010/main" Requires="p14">
+  <mc:AlternateContent xmlns:mc="http://schemas.openxmlformats.org/markup-compatibility/2006" xmlns:p14="http://schemas.microsoft.com/office/powerpoint/2010/main">
+    <mc:Choice Requires="p14">
       <p:transition spd="med" p14:dur="700">
         <p:fade/>
       </p:transition>
     </mc:Choice>
-    <mc:Fallback>
+    <mc:Fallback xmlns="">
       <p:transition spd="med">
         <p:fade/>
       </p:transition>
     </mc:Fallback>
   </mc:AlternateContent>
-  <p:timing>
-    <p:tnLst>
-      <p:par>
-        <p:cTn id="1" dur="indefinite" restart="never" nodeType="tmRoot">
-          <p:childTnLst>
-            <p:seq concurrent="1" nextAc="seek">
-              <p:cTn id="2" dur="indefinite" nodeType="mainSeq">
-                <p:childTnLst>
-                  <p:par>
-                    <p:cTn id="3" fill="hold">
-                      <p:stCondLst>
-                        <p:cond delay="indefinite"/>
-                      </p:stCondLst>
-                      <p:childTnLst>
-                        <p:par>
-                          <p:cTn id="4" fill="hold">
-                            <p:stCondLst>
-                              <p:cond delay="0"/>
-                            </p:stCondLst>
-                            <p:childTnLst>
-                              <p:par>
-                                <p:cTn id="5" presetID="1" presetClass="entr" presetSubtype="0" fill="hold" nodeType="clickEffect">
-                                  <p:stCondLst>
-                                    <p:cond delay="0"/>
-                                  </p:stCondLst>
-                                  <p:childTnLst>
-                                    <p:set>
-                                      <p:cBhvr>
-                                        <p:cTn id="6" dur="1" fill="hold">
-                                          <p:stCondLst>
-                                            <p:cond delay="0"/>
-                                          </p:stCondLst>
-                                        </p:cTn>
-                                        <p:tgtEl>
-                                          <p:spTgt spid="3"/>
-                                        </p:tgtEl>
-                                        <p:attrNameLst>
-                                          <p:attrName>style.visibility</p:attrName>
-                                        </p:attrNameLst>
-                                      </p:cBhvr>
-                                      <p:to>
-                                        <p:strVal val="visible"/>
-                                      </p:to>
-                                    </p:set>
-                                  </p:childTnLst>
-                                </p:cTn>
-                              </p:par>
-                            </p:childTnLst>
-                          </p:cTn>
-                        </p:par>
-                      </p:childTnLst>
-                    </p:cTn>
-                  </p:par>
-                  <p:par>
-                    <p:cTn id="7" fill="hold">
-                      <p:stCondLst>
-                        <p:cond delay="indefinite"/>
-                      </p:stCondLst>
-                      <p:childTnLst>
-                        <p:par>
-                          <p:cTn id="8" fill="hold">
-                            <p:stCondLst>
-                              <p:cond delay="0"/>
-                            </p:stCondLst>
-                            <p:childTnLst>
-                              <p:par>
-                                <p:cTn id="9" presetID="1" presetClass="entr" presetSubtype="0" fill="hold" nodeType="clickEffect">
-                                  <p:stCondLst>
-                                    <p:cond delay="0"/>
-                                  </p:stCondLst>
-                                  <p:childTnLst>
-                                    <p:set>
-                                      <p:cBhvr>
-                                        <p:cTn id="10" dur="1" fill="hold">
-                                          <p:stCondLst>
-                                            <p:cond delay="0"/>
-                                          </p:stCondLst>
-                                        </p:cTn>
-                                        <p:tgtEl>
-                                          <p:spTgt spid="2"/>
-                                        </p:tgtEl>
-                                        <p:attrNameLst>
-                                          <p:attrName>style.visibility</p:attrName>
-                                        </p:attrNameLst>
-                                      </p:cBhvr>
-                                      <p:to>
-                                        <p:strVal val="visible"/>
-                                      </p:to>
-                                    </p:set>
-                                  </p:childTnLst>
-                                </p:cTn>
-                              </p:par>
-                              <p:par>
-                                <p:cTn id="11" presetID="1" presetClass="entr" presetSubtype="0" fill="hold" nodeType="withEffect">
-                                  <p:stCondLst>
-                                    <p:cond delay="0"/>
-                                  </p:stCondLst>
-                                  <p:childTnLst>
-                                    <p:set>
-                                      <p:cBhvr>
-                                        <p:cTn id="12" dur="1" fill="hold">
-                                          <p:stCondLst>
-                                            <p:cond delay="0"/>
-                                          </p:stCondLst>
-                                        </p:cTn>
-                                        <p:tgtEl>
-                                          <p:spTgt spid="4"/>
-                                        </p:tgtEl>
-                                        <p:attrNameLst>
-                                          <p:attrName>style.visibility</p:attrName>
-                                        </p:attrNameLst>
-                                      </p:cBhvr>
-                                      <p:to>
-                                        <p:strVal val="visible"/>
-                                      </p:to>
-                                    </p:set>
-                                  </p:childTnLst>
-                                </p:cTn>
-                              </p:par>
-                            </p:childTnLst>
-                          </p:cTn>
-                        </p:par>
-                      </p:childTnLst>
-                    </p:cTn>
-                  </p:par>
-                </p:childTnLst>
-              </p:cTn>
-              <p:prevCondLst>
-                <p:cond evt="onPrev" delay="0">
-                  <p:tgtEl>
-                    <p:sldTgt/>
-                  </p:tgtEl>
-                </p:cond>
-              </p:prevCondLst>
-              <p:nextCondLst>
-                <p:cond evt="onNext" delay="0">
-                  <p:tgtEl>
-                    <p:sldTgt/>
-                  </p:tgtEl>
-                </p:cond>
-              </p:nextCondLst>
-            </p:seq>
-          </p:childTnLst>
-        </p:cTn>
-      </p:par>
-    </p:tnLst>
-  </p:timing>
 </p:sld>
 </file>
 
@@ -12006,8 +11013,8 @@
           </a:prstGeom>
         </p:spPr>
       </p:pic>
-      <mc:AlternateContent xmlns:mc="http://schemas.openxmlformats.org/markup-compatibility/2006">
-        <mc:Choice xmlns:p14="http://schemas.microsoft.com/office/powerpoint/2010/main" Requires="p14">
+      <mc:AlternateContent xmlns:mc="http://schemas.openxmlformats.org/markup-compatibility/2006" xmlns:p14="http://schemas.microsoft.com/office/powerpoint/2010/main">
+        <mc:Choice Requires="p14">
           <p:contentPart p14:bwMode="auto" r:id="rId4">
             <p14:nvContentPartPr>
               <p14:cNvPr id="4" name="Ink 3">
@@ -12026,7 +11033,7 @@
             </p14:xfrm>
           </p:contentPart>
         </mc:Choice>
-        <mc:Fallback>
+        <mc:Fallback xmlns="">
           <p:pic>
             <p:nvPicPr>
               <p:cNvPr id="4" name="Ink 3">
@@ -12067,138 +11074,18 @@
   <p:clrMapOvr>
     <a:masterClrMapping/>
   </p:clrMapOvr>
-  <mc:AlternateContent xmlns:mc="http://schemas.openxmlformats.org/markup-compatibility/2006">
-    <mc:Choice xmlns:p14="http://schemas.microsoft.com/office/powerpoint/2010/main" Requires="p14">
+  <mc:AlternateContent xmlns:mc="http://schemas.openxmlformats.org/markup-compatibility/2006" xmlns:p14="http://schemas.microsoft.com/office/powerpoint/2010/main">
+    <mc:Choice Requires="p14">
       <p:transition spd="med" p14:dur="700">
         <p:fade/>
       </p:transition>
     </mc:Choice>
-    <mc:Fallback>
+    <mc:Fallback xmlns="">
       <p:transition spd="med">
         <p:fade/>
       </p:transition>
     </mc:Fallback>
   </mc:AlternateContent>
-  <p:timing>
-    <p:tnLst>
-      <p:par>
-        <p:cTn id="1" dur="indefinite" restart="never" nodeType="tmRoot">
-          <p:childTnLst>
-            <p:seq concurrent="1" nextAc="seek">
-              <p:cTn id="2" dur="indefinite" nodeType="mainSeq">
-                <p:childTnLst>
-                  <p:par>
-                    <p:cTn id="3" fill="hold">
-                      <p:stCondLst>
-                        <p:cond delay="indefinite"/>
-                      </p:stCondLst>
-                      <p:childTnLst>
-                        <p:par>
-                          <p:cTn id="4" fill="hold">
-                            <p:stCondLst>
-                              <p:cond delay="0"/>
-                            </p:stCondLst>
-                            <p:childTnLst>
-                              <p:par>
-                                <p:cTn id="5" presetID="1" presetClass="entr" presetSubtype="0" fill="hold" nodeType="clickEffect">
-                                  <p:stCondLst>
-                                    <p:cond delay="0"/>
-                                  </p:stCondLst>
-                                  <p:childTnLst>
-                                    <p:set>
-                                      <p:cBhvr>
-                                        <p:cTn id="6" dur="1" fill="hold">
-                                          <p:stCondLst>
-                                            <p:cond delay="0"/>
-                                          </p:stCondLst>
-                                        </p:cTn>
-                                        <p:tgtEl>
-                                          <p:spTgt spid="3"/>
-                                        </p:tgtEl>
-                                        <p:attrNameLst>
-                                          <p:attrName>style.visibility</p:attrName>
-                                        </p:attrNameLst>
-                                      </p:cBhvr>
-                                      <p:to>
-                                        <p:strVal val="visible"/>
-                                      </p:to>
-                                    </p:set>
-                                  </p:childTnLst>
-                                </p:cTn>
-                              </p:par>
-                            </p:childTnLst>
-                          </p:cTn>
-                        </p:par>
-                      </p:childTnLst>
-                    </p:cTn>
-                  </p:par>
-                  <p:par>
-                    <p:cTn id="7" fill="hold">
-                      <p:stCondLst>
-                        <p:cond delay="indefinite"/>
-                      </p:stCondLst>
-                      <p:childTnLst>
-                        <p:par>
-                          <p:cTn id="8" fill="hold">
-                            <p:stCondLst>
-                              <p:cond delay="0"/>
-                            </p:stCondLst>
-                            <p:childTnLst>
-                              <p:par>
-                                <p:cTn id="9" presetID="1" presetClass="entr" presetSubtype="0" fill="hold" nodeType="clickEffect">
-                                  <p:stCondLst>
-                                    <p:cond delay="0"/>
-                                  </p:stCondLst>
-                                  <p:childTnLst>
-                                    <p:set>
-                                      <p:cBhvr>
-                                        <p:cTn id="10" dur="1" fill="hold">
-                                          <p:stCondLst>
-                                            <p:cond delay="0"/>
-                                          </p:stCondLst>
-                                        </p:cTn>
-                                        <p:tgtEl>
-                                          <p:spTgt spid="4"/>
-                                        </p:tgtEl>
-                                        <p:attrNameLst>
-                                          <p:attrName>style.visibility</p:attrName>
-                                        </p:attrNameLst>
-                                      </p:cBhvr>
-                                      <p:to>
-                                        <p:strVal val="visible"/>
-                                      </p:to>
-                                    </p:set>
-                                  </p:childTnLst>
-                                </p:cTn>
-                              </p:par>
-                            </p:childTnLst>
-                          </p:cTn>
-                        </p:par>
-                      </p:childTnLst>
-                    </p:cTn>
-                  </p:par>
-                </p:childTnLst>
-              </p:cTn>
-              <p:prevCondLst>
-                <p:cond evt="onPrev" delay="0">
-                  <p:tgtEl>
-                    <p:sldTgt/>
-                  </p:tgtEl>
-                </p:cond>
-              </p:prevCondLst>
-              <p:nextCondLst>
-                <p:cond evt="onNext" delay="0">
-                  <p:tgtEl>
-                    <p:sldTgt/>
-                  </p:tgtEl>
-                </p:cond>
-              </p:nextCondLst>
-            </p:seq>
-          </p:childTnLst>
-        </p:cTn>
-      </p:par>
-    </p:tnLst>
-  </p:timing>
 </p:sld>
 </file>
 
@@ -12328,13 +11215,8 @@
           <a:p>
             <a:r>
               <a:rPr lang="en-CA" dirty="0"/>
-              <a:t>More work to do on Binary YANG Push (e.g. SID </a:t>
+              <a:t>More work to do on Binary YANG Push (e.g. SID file management)</a:t>
             </a:r>
-            <a:r>
-              <a:rPr lang="en-CA"/>
-              <a:t>file management)</a:t>
-            </a:r>
-            <a:endParaRPr lang="en-CA" dirty="0"/>
           </a:p>
           <a:p>
             <a:r>
@@ -12365,13 +11247,13 @@
   <p:clrMapOvr>
     <a:masterClrMapping/>
   </p:clrMapOvr>
-  <mc:AlternateContent xmlns:mc="http://schemas.openxmlformats.org/markup-compatibility/2006">
-    <mc:Choice xmlns:p14="http://schemas.microsoft.com/office/powerpoint/2010/main" Requires="p14">
+  <mc:AlternateContent xmlns:mc="http://schemas.openxmlformats.org/markup-compatibility/2006" xmlns:p14="http://schemas.microsoft.com/office/powerpoint/2010/main">
+    <mc:Choice Requires="p14">
       <p:transition spd="med" p14:dur="700">
         <p:fade/>
       </p:transition>
     </mc:Choice>
-    <mc:Fallback>
+    <mc:Fallback xmlns="">
       <p:transition spd="med">
         <p:fade/>
       </p:transition>
@@ -13452,7 +12334,7 @@
         <p:fade/>
       </p:transition>
     </mc:Choice>
-    <mc:Fallback xmlns:ahyp="http://schemas.microsoft.com/office/drawing/2018/hyperlinkcolor" xmlns:p15="http://schemas.microsoft.com/office/powerpoint/2012/main" xmlns:com="http://schemas.openxmlformats.org/drawingml/2006/compatibility" xmlns:pvml="urn:schemas-microsoft-com:office:powerpoint" xmlns:v="urn:schemas-microsoft-com:vml" xmlns:o="urn:schemas-microsoft-com:office:office" xmlns:dgm="http://schemas.openxmlformats.org/drawingml/2006/diagram" xmlns:c="http://schemas.openxmlformats.org/drawingml/2006/chart" xmlns:mv="urn:schemas-microsoft-com:mac:vml" xmlns="">
+    <mc:Fallback xmlns="" xmlns:mv="urn:schemas-microsoft-com:mac:vml" xmlns:c="http://schemas.openxmlformats.org/drawingml/2006/chart" xmlns:dgm="http://schemas.openxmlformats.org/drawingml/2006/diagram" xmlns:o="urn:schemas-microsoft-com:office:office" xmlns:v="urn:schemas-microsoft-com:vml" xmlns:pvml="urn:schemas-microsoft-com:office:powerpoint" xmlns:com="http://schemas.openxmlformats.org/drawingml/2006/compatibility" xmlns:p15="http://schemas.microsoft.com/office/powerpoint/2012/main" xmlns:ahyp="http://schemas.microsoft.com/office/drawing/2018/hyperlinkcolor">
       <p:transition spd="slow">
         <p:fade/>
       </p:transition>
@@ -14654,7 +13536,7 @@
         <p:fade/>
       </p:transition>
     </mc:Choice>
-    <mc:Fallback xmlns:ahyp="http://schemas.microsoft.com/office/drawing/2018/hyperlinkcolor" xmlns:p15="http://schemas.microsoft.com/office/powerpoint/2012/main" xmlns:com="http://schemas.openxmlformats.org/drawingml/2006/compatibility" xmlns:pvml="urn:schemas-microsoft-com:office:powerpoint" xmlns:v="urn:schemas-microsoft-com:vml" xmlns:o="urn:schemas-microsoft-com:office:office" xmlns:dgm="http://schemas.openxmlformats.org/drawingml/2006/diagram" xmlns:c="http://schemas.openxmlformats.org/drawingml/2006/chart" xmlns:mv="urn:schemas-microsoft-com:mac:vml" xmlns="">
+    <mc:Fallback xmlns="" xmlns:mv="urn:schemas-microsoft-com:mac:vml" xmlns:c="http://schemas.openxmlformats.org/drawingml/2006/chart" xmlns:dgm="http://schemas.openxmlformats.org/drawingml/2006/diagram" xmlns:o="urn:schemas-microsoft-com:office:office" xmlns:v="urn:schemas-microsoft-com:vml" xmlns:pvml="urn:schemas-microsoft-com:office:powerpoint" xmlns:com="http://schemas.openxmlformats.org/drawingml/2006/compatibility" xmlns:p15="http://schemas.microsoft.com/office/powerpoint/2012/main" xmlns:ahyp="http://schemas.microsoft.com/office/drawing/2018/hyperlinkcolor">
       <p:transition spd="slow">
         <p:fade/>
       </p:transition>
@@ -14982,13 +13864,13 @@
   <p:clrMapOvr>
     <a:masterClrMapping/>
   </p:clrMapOvr>
-  <mc:AlternateContent xmlns:mc="http://schemas.openxmlformats.org/markup-compatibility/2006">
-    <mc:Choice xmlns:p14="http://schemas.microsoft.com/office/powerpoint/2010/main" Requires="p14">
+  <mc:AlternateContent xmlns:mc="http://schemas.openxmlformats.org/markup-compatibility/2006" xmlns:p14="http://schemas.microsoft.com/office/powerpoint/2010/main">
+    <mc:Choice Requires="p14">
       <p:transition spd="med" p14:dur="700">
         <p:fade/>
       </p:transition>
     </mc:Choice>
-    <mc:Fallback>
+    <mc:Fallback xmlns="">
       <p:transition spd="med">
         <p:fade/>
       </p:transition>
@@ -15721,8 +14603,8 @@
           </a:prstGeom>
         </p:spPr>
       </p:pic>
-      <mc:AlternateContent xmlns:mc="http://schemas.openxmlformats.org/markup-compatibility/2006">
-        <mc:Choice xmlns:p14="http://schemas.microsoft.com/office/powerpoint/2010/main" Requires="p14">
+      <mc:AlternateContent xmlns:mc="http://schemas.openxmlformats.org/markup-compatibility/2006" xmlns:p14="http://schemas.microsoft.com/office/powerpoint/2010/main">
+        <mc:Choice Requires="p14">
           <p:contentPart p14:bwMode="auto" r:id="rId4">
             <p14:nvContentPartPr>
               <p14:cNvPr id="4" name="Ink 3">
@@ -15741,7 +14623,7 @@
             </p14:xfrm>
           </p:contentPart>
         </mc:Choice>
-        <mc:Fallback>
+        <mc:Fallback xmlns="">
           <p:pic>
             <p:nvPicPr>
               <p:cNvPr id="4" name="Ink 3">
@@ -15782,138 +14664,18 @@
   <p:clrMapOvr>
     <a:masterClrMapping/>
   </p:clrMapOvr>
-  <mc:AlternateContent xmlns:mc="http://schemas.openxmlformats.org/markup-compatibility/2006">
-    <mc:Choice xmlns:p14="http://schemas.microsoft.com/office/powerpoint/2010/main" Requires="p14">
+  <mc:AlternateContent xmlns:mc="http://schemas.openxmlformats.org/markup-compatibility/2006" xmlns:p14="http://schemas.microsoft.com/office/powerpoint/2010/main">
+    <mc:Choice Requires="p14">
       <p:transition spd="med" p14:dur="700">
         <p:fade/>
       </p:transition>
     </mc:Choice>
-    <mc:Fallback>
+    <mc:Fallback xmlns="">
       <p:transition spd="med">
         <p:fade/>
       </p:transition>
     </mc:Fallback>
   </mc:AlternateContent>
-  <p:timing>
-    <p:tnLst>
-      <p:par>
-        <p:cTn id="1" dur="indefinite" restart="never" nodeType="tmRoot">
-          <p:childTnLst>
-            <p:seq concurrent="1" nextAc="seek">
-              <p:cTn id="2" dur="indefinite" nodeType="mainSeq">
-                <p:childTnLst>
-                  <p:par>
-                    <p:cTn id="3" fill="hold">
-                      <p:stCondLst>
-                        <p:cond delay="indefinite"/>
-                      </p:stCondLst>
-                      <p:childTnLst>
-                        <p:par>
-                          <p:cTn id="4" fill="hold">
-                            <p:stCondLst>
-                              <p:cond delay="0"/>
-                            </p:stCondLst>
-                            <p:childTnLst>
-                              <p:par>
-                                <p:cTn id="5" presetID="1" presetClass="entr" presetSubtype="0" fill="hold" nodeType="clickEffect">
-                                  <p:stCondLst>
-                                    <p:cond delay="0"/>
-                                  </p:stCondLst>
-                                  <p:childTnLst>
-                                    <p:set>
-                                      <p:cBhvr>
-                                        <p:cTn id="6" dur="1" fill="hold">
-                                          <p:stCondLst>
-                                            <p:cond delay="0"/>
-                                          </p:stCondLst>
-                                        </p:cTn>
-                                        <p:tgtEl>
-                                          <p:spTgt spid="3"/>
-                                        </p:tgtEl>
-                                        <p:attrNameLst>
-                                          <p:attrName>style.visibility</p:attrName>
-                                        </p:attrNameLst>
-                                      </p:cBhvr>
-                                      <p:to>
-                                        <p:strVal val="visible"/>
-                                      </p:to>
-                                    </p:set>
-                                  </p:childTnLst>
-                                </p:cTn>
-                              </p:par>
-                            </p:childTnLst>
-                          </p:cTn>
-                        </p:par>
-                      </p:childTnLst>
-                    </p:cTn>
-                  </p:par>
-                  <p:par>
-                    <p:cTn id="7" fill="hold">
-                      <p:stCondLst>
-                        <p:cond delay="indefinite"/>
-                      </p:stCondLst>
-                      <p:childTnLst>
-                        <p:par>
-                          <p:cTn id="8" fill="hold">
-                            <p:stCondLst>
-                              <p:cond delay="0"/>
-                            </p:stCondLst>
-                            <p:childTnLst>
-                              <p:par>
-                                <p:cTn id="9" presetID="1" presetClass="entr" presetSubtype="0" fill="hold" nodeType="clickEffect">
-                                  <p:stCondLst>
-                                    <p:cond delay="0"/>
-                                  </p:stCondLst>
-                                  <p:childTnLst>
-                                    <p:set>
-                                      <p:cBhvr>
-                                        <p:cTn id="10" dur="1" fill="hold">
-                                          <p:stCondLst>
-                                            <p:cond delay="0"/>
-                                          </p:stCondLst>
-                                        </p:cTn>
-                                        <p:tgtEl>
-                                          <p:spTgt spid="4"/>
-                                        </p:tgtEl>
-                                        <p:attrNameLst>
-                                          <p:attrName>style.visibility</p:attrName>
-                                        </p:attrNameLst>
-                                      </p:cBhvr>
-                                      <p:to>
-                                        <p:strVal val="visible"/>
-                                      </p:to>
-                                    </p:set>
-                                  </p:childTnLst>
-                                </p:cTn>
-                              </p:par>
-                            </p:childTnLst>
-                          </p:cTn>
-                        </p:par>
-                      </p:childTnLst>
-                    </p:cTn>
-                  </p:par>
-                </p:childTnLst>
-              </p:cTn>
-              <p:prevCondLst>
-                <p:cond evt="onPrev" delay="0">
-                  <p:tgtEl>
-                    <p:sldTgt/>
-                  </p:tgtEl>
-                </p:cond>
-              </p:prevCondLst>
-              <p:nextCondLst>
-                <p:cond evt="onNext" delay="0">
-                  <p:tgtEl>
-                    <p:sldTgt/>
-                  </p:tgtEl>
-                </p:cond>
-              </p:nextCondLst>
-            </p:seq>
-          </p:childTnLst>
-        </p:cTn>
-      </p:par>
-    </p:tnLst>
-  </p:timing>
 </p:sld>
 </file>
 
@@ -16477,12 +15239,4 @@
   <a:objectDefaults/>
   <a:extraClrSchemeLst/>
 </a:theme>
-</file>
-
-<file path=docMetadata/LabelInfo.xml><?xml version="1.0" encoding="utf-8"?>
-<clbl:labelList xmlns:clbl="http://schemas.microsoft.com/office/2020/mipLabelMetadata">
-  <clbl:label id="{07222825-62ea-40f3-96b5-5375c07996e2}" enabled="1" method="Privileged" siteId="{90c7a20a-f34b-40bf-bc48-b9253b6f5d20}" removed="0"/>
-  <clbl:label id="{20bd2185-7f4f-483c-8403-3480aaa4171f}" enabled="1" method="Standard" siteId="{72adb271-2fc7-4afe-a5ee-9de6a59f6bfb}" removed="0"/>
-  <clbl:label id="{2e1fccfb-80ca-4fe1-a574-1516544edb53}" enabled="1" method="Standard" siteId="{364e5b87-c1c7-420d-9bee-c35d19b557a1}" removed="0"/>
-</clbl:labelList>
 </file>
--- a/126/slides/slides-126-nmop-chair-slides-session1.pptx
+++ b/126/slides/slides-126-nmop-chair-slides-session1.pptx
@@ -10209,7 +10209,7 @@
                 <a:cs typeface="Inter"/>
                 <a:sym typeface="Inter"/>
               </a:rPr>
-              <a:t>© 202 IETF Trust </a:t>
+              <a:t>© 2026 IETF Trust </a:t>
             </a:r>
             <a:endParaRPr sz="1200" dirty="0">
               <a:latin typeface="Inter"/>
@@ -12334,7 +12334,7 @@
         <p:fade/>
       </p:transition>
     </mc:Choice>
-    <mc:Fallback xmlns="" xmlns:mv="urn:schemas-microsoft-com:mac:vml" xmlns:c="http://schemas.openxmlformats.org/drawingml/2006/chart" xmlns:dgm="http://schemas.openxmlformats.org/drawingml/2006/diagram" xmlns:o="urn:schemas-microsoft-com:office:office" xmlns:v="urn:schemas-microsoft-com:vml" xmlns:pvml="urn:schemas-microsoft-com:office:powerpoint" xmlns:com="http://schemas.openxmlformats.org/drawingml/2006/compatibility" xmlns:p15="http://schemas.microsoft.com/office/powerpoint/2012/main" xmlns:ahyp="http://schemas.microsoft.com/office/drawing/2018/hyperlinkcolor">
+    <mc:Fallback xmlns:ahyp="http://schemas.microsoft.com/office/drawing/2018/hyperlinkcolor" xmlns:p15="http://schemas.microsoft.com/office/powerpoint/2012/main" xmlns:com="http://schemas.openxmlformats.org/drawingml/2006/compatibility" xmlns:pvml="urn:schemas-microsoft-com:office:powerpoint" xmlns:v="urn:schemas-microsoft-com:vml" xmlns:o="urn:schemas-microsoft-com:office:office" xmlns:dgm="http://schemas.openxmlformats.org/drawingml/2006/diagram" xmlns:c="http://schemas.openxmlformats.org/drawingml/2006/chart" xmlns:mv="urn:schemas-microsoft-com:mac:vml" xmlns="">
       <p:transition spd="slow">
         <p:fade/>
       </p:transition>
@@ -13536,7 +13536,7 @@
         <p:fade/>
       </p:transition>
     </mc:Choice>
-    <mc:Fallback xmlns="" xmlns:mv="urn:schemas-microsoft-com:mac:vml" xmlns:c="http://schemas.openxmlformats.org/drawingml/2006/chart" xmlns:dgm="http://schemas.openxmlformats.org/drawingml/2006/diagram" xmlns:o="urn:schemas-microsoft-com:office:office" xmlns:v="urn:schemas-microsoft-com:vml" xmlns:pvml="urn:schemas-microsoft-com:office:powerpoint" xmlns:com="http://schemas.openxmlformats.org/drawingml/2006/compatibility" xmlns:p15="http://schemas.microsoft.com/office/powerpoint/2012/main" xmlns:ahyp="http://schemas.microsoft.com/office/drawing/2018/hyperlinkcolor">
+    <mc:Fallback xmlns:ahyp="http://schemas.microsoft.com/office/drawing/2018/hyperlinkcolor" xmlns:p15="http://schemas.microsoft.com/office/powerpoint/2012/main" xmlns:com="http://schemas.openxmlformats.org/drawingml/2006/compatibility" xmlns:pvml="urn:schemas-microsoft-com:office:powerpoint" xmlns:v="urn:schemas-microsoft-com:vml" xmlns:o="urn:schemas-microsoft-com:office:office" xmlns:dgm="http://schemas.openxmlformats.org/drawingml/2006/diagram" xmlns:c="http://schemas.openxmlformats.org/drawingml/2006/chart" xmlns:mv="urn:schemas-microsoft-com:mac:vml" xmlns="">
       <p:transition spd="slow">
         <p:fade/>
       </p:transition>
